--- a/report/NYC_Subway_Part1_Delivrable_Report_V2.pptx
+++ b/report/NYC_Subway_Part1_Delivrable_Report_V2.pptx
@@ -4933,75 +4933,6 @@
           </a:p>
         </p:txBody>
       </p:sp>
-      <p:sp>
-        <p:nvSpPr>
-          <p:cNvPr id="2" name="Rectangle 1">
-            <a:extLst>
-              <a:ext uri="{FF2B5EF4-FFF2-40B4-BE49-F238E27FC236}">
-                <a16:creationId xmlns:a16="http://schemas.microsoft.com/office/drawing/2014/main" id="{0B7191DF-8D71-0218-4950-AA04598108FB}"/>
-              </a:ext>
-            </a:extLst>
-          </p:cNvPr>
-          <p:cNvSpPr/>
-          <p:nvPr/>
-        </p:nvSpPr>
-        <p:spPr>
-          <a:xfrm>
-            <a:off x="564669" y="7011474"/>
-            <a:ext cx="6520069" cy="493228"/>
-          </a:xfrm>
-          <a:prstGeom prst="rect">
-            <a:avLst/>
-          </a:prstGeom>
-          <a:solidFill>
-            <a:schemeClr val="bg1"/>
-          </a:solidFill>
-        </p:spPr>
-        <p:style>
-          <a:lnRef idx="2">
-            <a:schemeClr val="accent1">
-              <a:shade val="15000"/>
-            </a:schemeClr>
-          </a:lnRef>
-          <a:fillRef idx="1">
-            <a:schemeClr val="accent1"/>
-          </a:fillRef>
-          <a:effectRef idx="0">
-            <a:schemeClr val="accent1"/>
-          </a:effectRef>
-          <a:fontRef idx="minor">
-            <a:schemeClr val="lt1"/>
-          </a:fontRef>
-        </p:style>
-        <p:txBody>
-          <a:bodyPr rtlCol="0" anchor="ctr"/>
-          <a:lstStyle/>
-          <a:p>
-            <a:pPr algn="ctr"/>
-            <a:r>
-              <a:rPr lang="en-US" dirty="0"/>
-              <a:t>3rd </a:t>
-            </a:r>
-            <a:r>
-              <a:rPr lang="en-US" dirty="0" err="1"/>
-              <a:t>Analyse</a:t>
-            </a:r>
-            <a:r>
-              <a:rPr lang="en-US" dirty="0"/>
-              <a:t> station and 4th </a:t>
-            </a:r>
-            <a:r>
-              <a:rPr lang="en-US" dirty="0" err="1"/>
-              <a:t>Analyse</a:t>
-            </a:r>
-            <a:r>
-              <a:rPr lang="en-US" dirty="0"/>
-              <a:t> Weather: join by complex ID and by hourly weather</a:t>
-            </a:r>
-            <a:endParaRPr lang="fr-FR" dirty="0"/>
-          </a:p>
-        </p:txBody>
-      </p:sp>
     </p:spTree>
     <p:extLst>
       <p:ext uri="{BB962C8B-B14F-4D97-AF65-F5344CB8AC3E}">
@@ -5351,7 +5282,7 @@
           <p:nvPr>
             <p:extLst>
               <p:ext uri="{D42A27DB-BD31-4B8C-83A1-F6EECF244321}">
-                <p14:modId xmlns:p14="http://schemas.microsoft.com/office/powerpoint/2010/main" val="2242121866"/>
+                <p14:modId xmlns:p14="http://schemas.microsoft.com/office/powerpoint/2010/main" val="1127860743"/>
               </p:ext>
             </p:extLst>
           </p:nvPr>
@@ -5404,9 +5335,9 @@
                         <a:buNone/>
                       </a:pPr>
                       <a:r>
-                        <a:rPr lang="fr-FR" sz="1600" b="0" i="0" u="none" strike="noStrike" dirty="0">
+                        <a:rPr lang="fr-FR" sz="1600" b="1" i="0" u="none" strike="noStrike" dirty="0">
                           <a:solidFill>
-                            <a:srgbClr val="000000"/>
+                            <a:schemeClr val="bg1"/>
                           </a:solidFill>
                           <a:effectLst/>
                           <a:latin typeface="Aptos Narrow" panose="020B0004020202020204" pitchFamily="34" charset="0"/>
@@ -5466,18 +5397,18 @@
                         <a:buNone/>
                       </a:pPr>
                       <a:r>
-                        <a:rPr lang="fr-FR" sz="1600" b="0" i="0" u="none" strike="noStrike" dirty="0" err="1">
+                        <a:rPr lang="fr-FR" sz="1600" b="1" i="0" u="none" strike="noStrike" dirty="0" err="1">
                           <a:solidFill>
-                            <a:srgbClr val="000000"/>
+                            <a:schemeClr val="bg1"/>
                           </a:solidFill>
                           <a:effectLst/>
                           <a:latin typeface="Aptos Narrow" panose="020B0004020202020204" pitchFamily="34" charset="0"/>
                         </a:rPr>
                         <a:t>Step</a:t>
                       </a:r>
-                      <a:endParaRPr lang="fr-FR" sz="1600" b="0" i="0" u="none" strike="noStrike" dirty="0">
+                      <a:endParaRPr lang="fr-FR" sz="1600" b="1" i="0" u="none" strike="noStrike" dirty="0">
                         <a:solidFill>
-                          <a:srgbClr val="000000"/>
+                          <a:schemeClr val="bg1"/>
                         </a:solidFill>
                         <a:effectLst/>
                         <a:latin typeface="Aptos Narrow" panose="020B0004020202020204" pitchFamily="34" charset="0"/>
@@ -5535,18 +5466,18 @@
                         <a:buNone/>
                       </a:pPr>
                       <a:r>
-                        <a:rPr lang="fr-FR" sz="1600" b="0" i="0" u="none" strike="noStrike" dirty="0" err="1">
+                        <a:rPr lang="fr-FR" sz="1600" b="1" i="0" u="none" strike="noStrike" dirty="0" err="1">
                           <a:solidFill>
-                            <a:srgbClr val="000000"/>
+                            <a:schemeClr val="bg1"/>
                           </a:solidFill>
                           <a:effectLst/>
                           <a:latin typeface="Aptos Narrow" panose="020B0004020202020204" pitchFamily="34" charset="0"/>
                         </a:rPr>
                         <a:t>Rows_Before</a:t>
                       </a:r>
-                      <a:endParaRPr lang="fr-FR" sz="1600" b="0" i="0" u="none" strike="noStrike" dirty="0">
+                      <a:endParaRPr lang="fr-FR" sz="1600" b="1" i="0" u="none" strike="noStrike" dirty="0">
                         <a:solidFill>
-                          <a:srgbClr val="000000"/>
+                          <a:schemeClr val="bg1"/>
                         </a:solidFill>
                         <a:effectLst/>
                         <a:latin typeface="Aptos Narrow" panose="020B0004020202020204" pitchFamily="34" charset="0"/>
@@ -5604,9 +5535,9 @@
                         <a:buNone/>
                       </a:pPr>
                       <a:r>
-                        <a:rPr lang="fr-FR" sz="1600" b="0" i="0" u="none" strike="noStrike" dirty="0" err="1">
+                        <a:rPr lang="fr-FR" sz="1600" b="1" i="0" u="none" strike="noStrike" dirty="0" err="1">
                           <a:solidFill>
-                            <a:srgbClr val="000000"/>
+                            <a:schemeClr val="bg1"/>
                           </a:solidFill>
                           <a:effectLst/>
                           <a:latin typeface="Aptos Narrow" panose="020B0004020202020204" pitchFamily="34" charset="0"/>
@@ -5614,9 +5545,9 @@
                         <a:t>Rows</a:t>
                       </a:r>
                       <a:r>
-                        <a:rPr lang="fr-FR" sz="1600" b="0" i="0" u="none" strike="noStrike" dirty="0">
+                        <a:rPr lang="fr-FR" sz="1600" b="1" i="0" u="none" strike="noStrike" dirty="0">
                           <a:solidFill>
-                            <a:srgbClr val="000000"/>
+                            <a:schemeClr val="bg1"/>
                           </a:solidFill>
                           <a:effectLst/>
                           <a:latin typeface="Aptos Narrow" panose="020B0004020202020204" pitchFamily="34" charset="0"/>
@@ -8452,7 +8383,7 @@
         </p:nvSpPr>
         <p:spPr>
           <a:xfrm>
-            <a:off x="98843" y="7723747"/>
+            <a:off x="98843" y="7683991"/>
             <a:ext cx="6647688" cy="413852"/>
           </a:xfrm>
           <a:prstGeom prst="rect">
@@ -8503,7 +8434,7 @@
         </p:nvSpPr>
         <p:spPr>
           <a:xfrm>
-            <a:off x="85216" y="8139198"/>
+            <a:off x="85216" y="8046434"/>
             <a:ext cx="7425657" cy="307777"/>
           </a:xfrm>
           <a:prstGeom prst="rect">
@@ -8518,13 +8449,13 @@
           <a:lstStyle/>
           <a:p>
             <a:r>
-              <a:rPr lang="en-US" sz="1400" b="1">
+              <a:rPr lang="en-US" sz="1400" b="1" dirty="0">
                 <a:ea typeface="Calibri"/>
                 <a:cs typeface="Calibri"/>
               </a:rPr>
-              <a:t>1. Why aggregate ridership by station complex and hour</a:t>
-            </a:r>
-            <a:endParaRPr lang="en-US"/>
+              <a:t>1. Aggregate ridership by station complex and hour</a:t>
+            </a:r>
+            <a:endParaRPr lang="en-US" dirty="0"/>
           </a:p>
         </p:txBody>
       </p:sp>
@@ -8542,8 +8473,8 @@
         </p:nvSpPr>
         <p:spPr>
           <a:xfrm>
-            <a:off x="85307" y="8447973"/>
-            <a:ext cx="7442806" cy="1077218"/>
+            <a:off x="85307" y="8341957"/>
+            <a:ext cx="7442806" cy="492443"/>
           </a:xfrm>
           <a:prstGeom prst="rect">
             <a:avLst/>
@@ -8568,52 +8499,26 @@
               <a:t>   </a:t>
             </a:r>
             <a:r>
-              <a:rPr lang="en-US" sz="1200">
+              <a:rPr lang="en-US" sz="1200" dirty="0">
                 <a:ea typeface="+mn-lt"/>
                 <a:cs typeface="+mn-lt"/>
               </a:rPr>
               <a:t> The raw MTA data contains multiple records for the same station complex and hour, including different fare categories</a:t>
             </a:r>
-            <a:endParaRPr lang="en-US" sz="1200" b="1">
-              <a:ea typeface="+mn-lt"/>
-              <a:cs typeface="+mn-lt"/>
-            </a:endParaRPr>
-          </a:p>
-          <a:p>
-            <a:pPr>
-              <a:buFont typeface="Arial"/>
-              <a:buChar char="•"/>
-            </a:pPr>
-            <a:r>
-              <a:rPr lang="en-US" sz="1200">
+            <a:r>
+              <a:rPr lang="en-US" sz="1200" b="1" dirty="0">
                 <a:ea typeface="+mn-lt"/>
                 <a:cs typeface="+mn-lt"/>
               </a:rPr>
-              <a:t>    Summing those records produces one ridership value per station complex per hour</a:t>
-            </a:r>
-          </a:p>
-          <a:p>
-            <a:pPr>
-              <a:buFont typeface="Arial"/>
-              <a:buChar char="•"/>
-            </a:pPr>
-            <a:r>
-              <a:rPr lang="en-US" sz="1200">
+              <a:t>.</a:t>
+            </a:r>
+            <a:r>
+              <a:rPr lang="en-US" sz="1200" dirty="0">
                 <a:ea typeface="+mn-lt"/>
                 <a:cs typeface="+mn-lt"/>
               </a:rPr>
-              <a:t>    This makes station comparisons meaningful and reduces the volume of data for later analysis</a:t>
-            </a:r>
-          </a:p>
-          <a:p>
-            <a:pPr>
-              <a:buFont typeface="Arial"/>
-              <a:buChar char="•"/>
-            </a:pPr>
-            <a:endParaRPr lang="en-US" sz="1400" dirty="0">
-              <a:ea typeface="+mn-lt"/>
-              <a:cs typeface="+mn-lt"/>
-            </a:endParaRPr>
+              <a:t> Summing those records produces one ridership value per station complex per hour.</a:t>
+            </a:r>
           </a:p>
         </p:txBody>
       </p:sp>
@@ -8631,7 +8536,7 @@
         </p:nvSpPr>
         <p:spPr>
           <a:xfrm>
-            <a:off x="85375" y="9305680"/>
+            <a:off x="85375" y="8815352"/>
             <a:ext cx="7391359" cy="307777"/>
           </a:xfrm>
           <a:prstGeom prst="rect">
@@ -8646,10 +8551,10 @@
           <a:lstStyle/>
           <a:p>
             <a:r>
-              <a:rPr lang="en-US" sz="1400" b="1"/>
-              <a:t>2. Why use dry weather as the baseline?</a:t>
-            </a:r>
-            <a:endParaRPr lang="en-US" sz="1400" b="1">
+              <a:rPr lang="en-US" sz="1400" b="1" dirty="0"/>
+              <a:t>2. The use of dry weather as the baseline</a:t>
+            </a:r>
+            <a:endParaRPr lang="en-US" sz="1400" b="1" dirty="0">
               <a:ea typeface="Calibri"/>
               <a:cs typeface="Calibri"/>
             </a:endParaRPr>
@@ -8670,8 +8575,8 @@
         </p:nvSpPr>
         <p:spPr>
           <a:xfrm>
-            <a:off x="-265" y="9614455"/>
-            <a:ext cx="7408508" cy="1200329"/>
+            <a:off x="92499" y="9137380"/>
+            <a:ext cx="7408508" cy="461665"/>
           </a:xfrm>
           <a:prstGeom prst="rect">
             <a:avLst/>
@@ -8689,111 +8594,35 @@
               <a:buChar char="•"/>
             </a:pPr>
             <a:r>
-              <a:rPr lang="en-US" sz="1200">
+              <a:rPr lang="en-US" sz="1200" dirty="0">
                 <a:ea typeface="+mn-lt"/>
                 <a:cs typeface="+mn-lt"/>
               </a:rPr>
               <a:t>Dry hours represent the reference condition against which rainy and snowy hours are compared</a:t>
             </a:r>
-            <a:endParaRPr lang="en-US" sz="1200">
-              <a:ea typeface="Calibri"/>
-              <a:cs typeface="Calibri"/>
-            </a:endParaRPr>
-          </a:p>
-          <a:p>
-            <a:pPr marL="285750" indent="-285750">
-              <a:buFont typeface="Arial"/>
-              <a:buChar char="•"/>
-            </a:pPr>
-            <a:r>
-              <a:rPr lang="en-US" sz="1200">
+            <a:r>
+              <a:rPr lang="en-US" sz="1200" dirty="0">
+                <a:ea typeface="Calibri"/>
+                <a:cs typeface="Calibri"/>
+              </a:rPr>
+              <a:t> . </a:t>
+            </a:r>
+            <a:r>
+              <a:rPr lang="en-US" sz="1200" dirty="0">
                 <a:ea typeface="+mn-lt"/>
                 <a:cs typeface="+mn-lt"/>
               </a:rPr>
-              <a:t>To make the comparison fairer, we calculated usual ridership for matching month, day of the week, and hour of the day</a:t>
-            </a:r>
-          </a:p>
-          <a:p>
-            <a:pPr marL="285750" indent="-285750">
-              <a:buFont typeface="Arial"/>
-              <a:buChar char="•"/>
-            </a:pPr>
-            <a:r>
-              <a:rPr lang="en-US" sz="1200">
-                <a:ea typeface="+mn-lt"/>
-                <a:cs typeface="+mn-lt"/>
-              </a:rPr>
-              <a:t>This helps account for normal differences between, for example, weekday mornings and weekend evenings</a:t>
-            </a:r>
-          </a:p>
-          <a:p>
-            <a:pPr marL="285750" indent="-285750">
-              <a:buFont typeface="Arial"/>
-              <a:buChar char="•"/>
-            </a:pPr>
-            <a:r>
-              <a:rPr lang="en-US" sz="1200" b="1">
-                <a:ea typeface="+mn-lt"/>
-                <a:cs typeface="+mn-lt"/>
-              </a:rPr>
-              <a:t>However</a:t>
-            </a:r>
-            <a:r>
-              <a:rPr lang="en-US" sz="1200">
-                <a:ea typeface="+mn-lt"/>
-                <a:cs typeface="+mn-lt"/>
-              </a:rPr>
-              <a:t>;  this is a comparison method, not proof that weather caused the change</a:t>
-            </a:r>
-            <a:endParaRPr lang="en-US" sz="1200">
-              <a:ea typeface="Calibri"/>
-              <a:cs typeface="Calibri"/>
-            </a:endParaRPr>
-          </a:p>
-          <a:p>
-            <a:endParaRPr lang="en-US" sz="1200" b="1" dirty="0">
-              <a:ea typeface="Calibri"/>
-              <a:cs typeface="Calibri"/>
-            </a:endParaRPr>
+              <a:t>To make this comparison fairer, we calculated usual ridership for matching month, day of the week, and hour of the day</a:t>
+            </a:r>
           </a:p>
         </p:txBody>
       </p:sp>
-    </p:spTree>
-    <p:extLst>
-      <p:ext uri="{BB962C8B-B14F-4D97-AF65-F5344CB8AC3E}">
-        <p14:creationId xmlns:p14="http://schemas.microsoft.com/office/powerpoint/2010/main" val="344045745"/>
-      </p:ext>
-    </p:extLst>
-  </p:cSld>
-  <p:clrMapOvr>
-    <a:masterClrMapping/>
-  </p:clrMapOvr>
-</p:sld>
-</file>
-
-<file path=ppt/slides/slide4.xml><?xml version="1.0" encoding="utf-8"?>
-<p:sld xmlns:a="http://schemas.openxmlformats.org/drawingml/2006/main" xmlns:r="http://schemas.openxmlformats.org/officeDocument/2006/relationships" xmlns:p="http://schemas.openxmlformats.org/presentationml/2006/main">
-  <p:cSld>
-    <p:spTree>
-      <p:nvGrpSpPr>
-        <p:cNvPr id="1" name=""/>
-        <p:cNvGrpSpPr/>
-        <p:nvPr/>
-      </p:nvGrpSpPr>
-      <p:grpSpPr>
-        <a:xfrm>
-          <a:off x="0" y="0"/>
-          <a:ext cx="0" cy="0"/>
-          <a:chOff x="0" y="0"/>
-          <a:chExt cx="0" cy="0"/>
-        </a:xfrm>
-      </p:grpSpPr>
       <p:sp>
         <p:nvSpPr>
-          <p:cNvPr id="3" name="Text 10">
+          <p:cNvPr id="7" name="Text 10">
             <a:extLst>
               <a:ext uri="{FF2B5EF4-FFF2-40B4-BE49-F238E27FC236}">
-                <a16:creationId xmlns:a16="http://schemas.microsoft.com/office/drawing/2014/main" id="{8C6EC6AA-DFDC-B910-F354-3ABEEF1A5D16}"/>
+                <a16:creationId xmlns:a16="http://schemas.microsoft.com/office/drawing/2014/main" id="{0B645DD0-7BE1-9259-62D6-50F1F8BAA7A6}"/>
               </a:ext>
             </a:extLst>
           </p:cNvPr>
@@ -8802,7 +8631,7 @@
         </p:nvSpPr>
         <p:spPr>
           <a:xfrm>
-            <a:off x="184576" y="1657716"/>
+            <a:off x="167561" y="9588350"/>
             <a:ext cx="6647688" cy="413852"/>
           </a:xfrm>
           <a:prstGeom prst="rect">
@@ -8908,30 +8737,25 @@
           <a:p>
             <a:pPr marL="12700"/>
             <a:r>
-              <a:rPr lang="en-US" sz="1600" b="1" u="sng" dirty="0">
-                <a:solidFill>
-                  <a:schemeClr val="tx1"/>
-                </a:solidFill>
+              <a:rPr lang="en-US" sz="1400" b="1" dirty="0">
+                <a:ea typeface="+mn-lt"/>
+                <a:cs typeface="+mn-lt"/>
               </a:rPr>
-              <a:t>6/</a:t>
-            </a:r>
-            <a:r>
-              <a:rPr lang="en-US" sz="1600" b="1" u="sng" dirty="0"/>
-              <a:t> The answer to our part 1 Sub-question</a:t>
-            </a:r>
-            <a:endParaRPr lang="en-US" sz="1600" b="1" u="sng" dirty="0">
-              <a:latin typeface="Arial MT"/>
-              <a:cs typeface="Arial MT"/>
+              <a:t>3. Excluding records with missing weather conditions</a:t>
+            </a:r>
+            <a:endParaRPr lang="en-US" sz="1400" b="1" dirty="0">
+              <a:ea typeface="Calibri"/>
+              <a:cs typeface="Calibri"/>
             </a:endParaRPr>
           </a:p>
         </p:txBody>
       </p:sp>
       <p:sp>
         <p:nvSpPr>
-          <p:cNvPr id="4" name="Text 10">
+          <p:cNvPr id="11" name="Text 10">
             <a:extLst>
               <a:ext uri="{FF2B5EF4-FFF2-40B4-BE49-F238E27FC236}">
-                <a16:creationId xmlns:a16="http://schemas.microsoft.com/office/drawing/2014/main" id="{1C9402DD-3908-B966-E65B-BDF0AB3BBA9A}"/>
+                <a16:creationId xmlns:a16="http://schemas.microsoft.com/office/drawing/2014/main" id="{0DF37903-A246-28D8-C215-2FA4DE794AF5}"/>
               </a:ext>
             </a:extLst>
           </p:cNvPr>
@@ -8940,141 +8764,8 @@
         </p:nvSpPr>
         <p:spPr>
           <a:xfrm>
-            <a:off x="167561" y="-6239"/>
-            <a:ext cx="6647688" cy="413852"/>
-          </a:xfrm>
-          <a:prstGeom prst="rect">
-            <a:avLst/>
-          </a:prstGeom>
-          <a:noFill/>
-          <a:ln/>
-        </p:spPr>
-        <p:txBody>
-          <a:bodyPr wrap="square" lIns="0" tIns="0" rIns="0" bIns="0" rtlCol="0" anchor="ctr"/>
-          <a:lstStyle>
-            <a:lvl1pPr marL="0" algn="l" defTabSz="914400" rtl="0" eaLnBrk="1" latinLnBrk="0" hangingPunct="1">
-              <a:defRPr sz="1800" kern="1200">
-                <a:solidFill>
-                  <a:schemeClr val="tx1"/>
-                </a:solidFill>
-                <a:latin typeface="+mn-lt"/>
-                <a:ea typeface="+mn-ea"/>
-                <a:cs typeface="+mn-cs"/>
-              </a:defRPr>
-            </a:lvl1pPr>
-            <a:lvl2pPr marL="457200" algn="l" defTabSz="914400" rtl="0" eaLnBrk="1" latinLnBrk="0" hangingPunct="1">
-              <a:defRPr sz="1800" kern="1200">
-                <a:solidFill>
-                  <a:schemeClr val="tx1"/>
-                </a:solidFill>
-                <a:latin typeface="+mn-lt"/>
-                <a:ea typeface="+mn-ea"/>
-                <a:cs typeface="+mn-cs"/>
-              </a:defRPr>
-            </a:lvl2pPr>
-            <a:lvl3pPr marL="914400" algn="l" defTabSz="914400" rtl="0" eaLnBrk="1" latinLnBrk="0" hangingPunct="1">
-              <a:defRPr sz="1800" kern="1200">
-                <a:solidFill>
-                  <a:schemeClr val="tx1"/>
-                </a:solidFill>
-                <a:latin typeface="+mn-lt"/>
-                <a:ea typeface="+mn-ea"/>
-                <a:cs typeface="+mn-cs"/>
-              </a:defRPr>
-            </a:lvl3pPr>
-            <a:lvl4pPr marL="1371600" algn="l" defTabSz="914400" rtl="0" eaLnBrk="1" latinLnBrk="0" hangingPunct="1">
-              <a:defRPr sz="1800" kern="1200">
-                <a:solidFill>
-                  <a:schemeClr val="tx1"/>
-                </a:solidFill>
-                <a:latin typeface="+mn-lt"/>
-                <a:ea typeface="+mn-ea"/>
-                <a:cs typeface="+mn-cs"/>
-              </a:defRPr>
-            </a:lvl4pPr>
-            <a:lvl5pPr marL="1828800" algn="l" defTabSz="914400" rtl="0" eaLnBrk="1" latinLnBrk="0" hangingPunct="1">
-              <a:defRPr sz="1800" kern="1200">
-                <a:solidFill>
-                  <a:schemeClr val="tx1"/>
-                </a:solidFill>
-                <a:latin typeface="+mn-lt"/>
-                <a:ea typeface="+mn-ea"/>
-                <a:cs typeface="+mn-cs"/>
-              </a:defRPr>
-            </a:lvl5pPr>
-            <a:lvl6pPr marL="2286000" algn="l" defTabSz="914400" rtl="0" eaLnBrk="1" latinLnBrk="0" hangingPunct="1">
-              <a:defRPr sz="1800" kern="1200">
-                <a:solidFill>
-                  <a:schemeClr val="tx1"/>
-                </a:solidFill>
-                <a:latin typeface="+mn-lt"/>
-                <a:ea typeface="+mn-ea"/>
-                <a:cs typeface="+mn-cs"/>
-              </a:defRPr>
-            </a:lvl6pPr>
-            <a:lvl7pPr marL="2743200" algn="l" defTabSz="914400" rtl="0" eaLnBrk="1" latinLnBrk="0" hangingPunct="1">
-              <a:defRPr sz="1800" kern="1200">
-                <a:solidFill>
-                  <a:schemeClr val="tx1"/>
-                </a:solidFill>
-                <a:latin typeface="+mn-lt"/>
-                <a:ea typeface="+mn-ea"/>
-                <a:cs typeface="+mn-cs"/>
-              </a:defRPr>
-            </a:lvl7pPr>
-            <a:lvl8pPr marL="3200400" algn="l" defTabSz="914400" rtl="0" eaLnBrk="1" latinLnBrk="0" hangingPunct="1">
-              <a:defRPr sz="1800" kern="1200">
-                <a:solidFill>
-                  <a:schemeClr val="tx1"/>
-                </a:solidFill>
-                <a:latin typeface="+mn-lt"/>
-                <a:ea typeface="+mn-ea"/>
-                <a:cs typeface="+mn-cs"/>
-              </a:defRPr>
-            </a:lvl8pPr>
-            <a:lvl9pPr marL="3657600" algn="l" defTabSz="914400" rtl="0" eaLnBrk="1" latinLnBrk="0" hangingPunct="1">
-              <a:defRPr sz="1800" kern="1200">
-                <a:solidFill>
-                  <a:schemeClr val="tx1"/>
-                </a:solidFill>
-                <a:latin typeface="+mn-lt"/>
-                <a:ea typeface="+mn-ea"/>
-                <a:cs typeface="+mn-cs"/>
-              </a:defRPr>
-            </a:lvl9pPr>
-          </a:lstStyle>
-          <a:p>
-            <a:pPr marL="12700"/>
-            <a:r>
-              <a:rPr lang="en-US" sz="1400" b="1">
-                <a:ea typeface="+mn-lt"/>
-                <a:cs typeface="+mn-lt"/>
-              </a:rPr>
-              <a:t>3. Excluding records with missing weather conditions</a:t>
-            </a:r>
-            <a:endParaRPr lang="en-US" sz="1400" b="1">
-              <a:ea typeface="Calibri"/>
-              <a:cs typeface="Calibri"/>
-            </a:endParaRPr>
-          </a:p>
-        </p:txBody>
-      </p:sp>
-      <p:sp>
-        <p:nvSpPr>
-          <p:cNvPr id="5" name="Text 10">
-            <a:extLst>
-              <a:ext uri="{FF2B5EF4-FFF2-40B4-BE49-F238E27FC236}">
-                <a16:creationId xmlns:a16="http://schemas.microsoft.com/office/drawing/2014/main" id="{467F7188-0C51-B5A8-E43B-673245F6B12A}"/>
-              </a:ext>
-            </a:extLst>
-          </p:cNvPr>
-          <p:cNvSpPr txBox="1"/>
-          <p:nvPr/>
-        </p:nvSpPr>
-        <p:spPr>
-          <a:xfrm>
-            <a:off x="167692" y="405580"/>
-            <a:ext cx="6647688" cy="859927"/>
+            <a:off x="167691" y="9897760"/>
+            <a:ext cx="7333315" cy="644291"/>
           </a:xfrm>
           <a:prstGeom prst="rect">
             <a:avLst/>
@@ -9182,14 +8873,14 @@
               <a:buChar char="•"/>
             </a:pPr>
             <a:r>
-              <a:rPr lang="en-US" sz="1200">
+              <a:rPr lang="en-US" sz="1200" dirty="0">
                 <a:ea typeface="+mn-lt"/>
                 <a:cs typeface="+mn-lt"/>
               </a:rPr>
               <a:t>The weather table has 317 records with a missing </a:t>
             </a:r>
             <a:r>
-              <a:rPr lang="en-US" sz="1200">
+              <a:rPr lang="en-US" sz="1200" dirty="0">
                 <a:latin typeface="Consolas"/>
                 <a:ea typeface="+mn-lt"/>
                 <a:cs typeface="+mn-lt"/>
@@ -9197,32 +8888,197 @@
               <a:t>condition</a:t>
             </a:r>
             <a:r>
-              <a:rPr lang="en-US" sz="1200">
+              <a:rPr lang="en-US" sz="1200" dirty="0">
                 <a:ea typeface="+mn-lt"/>
                 <a:cs typeface="+mn-lt"/>
               </a:rPr>
               <a:t>, leaving 8,387 records with known conditions.</a:t>
             </a:r>
-            <a:endParaRPr lang="en-US" sz="1200">
+            <a:r>
+              <a:rPr lang="en-US" sz="1200" dirty="0">
+                <a:ea typeface="Calibri"/>
+                <a:cs typeface="Calibri"/>
+              </a:rPr>
+              <a:t> </a:t>
+            </a:r>
+            <a:r>
+              <a:rPr lang="en-US" sz="1200" dirty="0">
+                <a:ea typeface="+mn-lt"/>
+                <a:cs typeface="+mn-lt"/>
+              </a:rPr>
+              <a:t>We excluded those records from the weather-effect analysis because we could not confidently classify them as dry, light rain, heavy rain, or snow.</a:t>
+            </a:r>
+            <a:endParaRPr lang="en-US" sz="1200" dirty="0">
               <a:ea typeface="Calibri"/>
               <a:cs typeface="Calibri"/>
             </a:endParaRPr>
           </a:p>
+        </p:txBody>
+      </p:sp>
+    </p:spTree>
+    <p:extLst>
+      <p:ext uri="{BB962C8B-B14F-4D97-AF65-F5344CB8AC3E}">
+        <p14:creationId xmlns:p14="http://schemas.microsoft.com/office/powerpoint/2010/main" val="344045745"/>
+      </p:ext>
+    </p:extLst>
+  </p:cSld>
+  <p:clrMapOvr>
+    <a:masterClrMapping/>
+  </p:clrMapOvr>
+</p:sld>
+</file>
+
+<file path=ppt/slides/slide4.xml><?xml version="1.0" encoding="utf-8"?>
+<p:sld xmlns:a="http://schemas.openxmlformats.org/drawingml/2006/main" xmlns:r="http://schemas.openxmlformats.org/officeDocument/2006/relationships" xmlns:p="http://schemas.openxmlformats.org/presentationml/2006/main">
+  <p:cSld>
+    <p:spTree>
+      <p:nvGrpSpPr>
+        <p:cNvPr id="1" name=""/>
+        <p:cNvGrpSpPr/>
+        <p:nvPr/>
+      </p:nvGrpSpPr>
+      <p:grpSpPr>
+        <a:xfrm>
+          <a:off x="0" y="0"/>
+          <a:ext cx="0" cy="0"/>
+          <a:chOff x="0" y="0"/>
+          <a:chExt cx="0" cy="0"/>
+        </a:xfrm>
+      </p:grpSpPr>
+      <p:sp>
+        <p:nvSpPr>
+          <p:cNvPr id="3" name="Text 10">
+            <a:extLst>
+              <a:ext uri="{FF2B5EF4-FFF2-40B4-BE49-F238E27FC236}">
+                <a16:creationId xmlns:a16="http://schemas.microsoft.com/office/drawing/2014/main" id="{8C6EC6AA-DFDC-B910-F354-3ABEEF1A5D16}"/>
+              </a:ext>
+            </a:extLst>
+          </p:cNvPr>
+          <p:cNvSpPr txBox="1"/>
+          <p:nvPr/>
+        </p:nvSpPr>
+        <p:spPr>
+          <a:xfrm>
+            <a:off x="184576" y="93961"/>
+            <a:ext cx="6647688" cy="413852"/>
+          </a:xfrm>
+          <a:prstGeom prst="rect">
+            <a:avLst/>
+          </a:prstGeom>
+          <a:noFill/>
+          <a:ln/>
+        </p:spPr>
+        <p:txBody>
+          <a:bodyPr wrap="square" lIns="0" tIns="0" rIns="0" bIns="0" rtlCol="0" anchor="ctr"/>
+          <a:lstStyle>
+            <a:lvl1pPr marL="0" algn="l" defTabSz="914400" rtl="0" eaLnBrk="1" latinLnBrk="0" hangingPunct="1">
+              <a:defRPr sz="1800" kern="1200">
+                <a:solidFill>
+                  <a:schemeClr val="tx1"/>
+                </a:solidFill>
+                <a:latin typeface="+mn-lt"/>
+                <a:ea typeface="+mn-ea"/>
+                <a:cs typeface="+mn-cs"/>
+              </a:defRPr>
+            </a:lvl1pPr>
+            <a:lvl2pPr marL="457200" algn="l" defTabSz="914400" rtl="0" eaLnBrk="1" latinLnBrk="0" hangingPunct="1">
+              <a:defRPr sz="1800" kern="1200">
+                <a:solidFill>
+                  <a:schemeClr val="tx1"/>
+                </a:solidFill>
+                <a:latin typeface="+mn-lt"/>
+                <a:ea typeface="+mn-ea"/>
+                <a:cs typeface="+mn-cs"/>
+              </a:defRPr>
+            </a:lvl2pPr>
+            <a:lvl3pPr marL="914400" algn="l" defTabSz="914400" rtl="0" eaLnBrk="1" latinLnBrk="0" hangingPunct="1">
+              <a:defRPr sz="1800" kern="1200">
+                <a:solidFill>
+                  <a:schemeClr val="tx1"/>
+                </a:solidFill>
+                <a:latin typeface="+mn-lt"/>
+                <a:ea typeface="+mn-ea"/>
+                <a:cs typeface="+mn-cs"/>
+              </a:defRPr>
+            </a:lvl3pPr>
+            <a:lvl4pPr marL="1371600" algn="l" defTabSz="914400" rtl="0" eaLnBrk="1" latinLnBrk="0" hangingPunct="1">
+              <a:defRPr sz="1800" kern="1200">
+                <a:solidFill>
+                  <a:schemeClr val="tx1"/>
+                </a:solidFill>
+                <a:latin typeface="+mn-lt"/>
+                <a:ea typeface="+mn-ea"/>
+                <a:cs typeface="+mn-cs"/>
+              </a:defRPr>
+            </a:lvl4pPr>
+            <a:lvl5pPr marL="1828800" algn="l" defTabSz="914400" rtl="0" eaLnBrk="1" latinLnBrk="0" hangingPunct="1">
+              <a:defRPr sz="1800" kern="1200">
+                <a:solidFill>
+                  <a:schemeClr val="tx1"/>
+                </a:solidFill>
+                <a:latin typeface="+mn-lt"/>
+                <a:ea typeface="+mn-ea"/>
+                <a:cs typeface="+mn-cs"/>
+              </a:defRPr>
+            </a:lvl5pPr>
+            <a:lvl6pPr marL="2286000" algn="l" defTabSz="914400" rtl="0" eaLnBrk="1" latinLnBrk="0" hangingPunct="1">
+              <a:defRPr sz="1800" kern="1200">
+                <a:solidFill>
+                  <a:schemeClr val="tx1"/>
+                </a:solidFill>
+                <a:latin typeface="+mn-lt"/>
+                <a:ea typeface="+mn-ea"/>
+                <a:cs typeface="+mn-cs"/>
+              </a:defRPr>
+            </a:lvl6pPr>
+            <a:lvl7pPr marL="2743200" algn="l" defTabSz="914400" rtl="0" eaLnBrk="1" latinLnBrk="0" hangingPunct="1">
+              <a:defRPr sz="1800" kern="1200">
+                <a:solidFill>
+                  <a:schemeClr val="tx1"/>
+                </a:solidFill>
+                <a:latin typeface="+mn-lt"/>
+                <a:ea typeface="+mn-ea"/>
+                <a:cs typeface="+mn-cs"/>
+              </a:defRPr>
+            </a:lvl7pPr>
+            <a:lvl8pPr marL="3200400" algn="l" defTabSz="914400" rtl="0" eaLnBrk="1" latinLnBrk="0" hangingPunct="1">
+              <a:defRPr sz="1800" kern="1200">
+                <a:solidFill>
+                  <a:schemeClr val="tx1"/>
+                </a:solidFill>
+                <a:latin typeface="+mn-lt"/>
+                <a:ea typeface="+mn-ea"/>
+                <a:cs typeface="+mn-cs"/>
+              </a:defRPr>
+            </a:lvl8pPr>
+            <a:lvl9pPr marL="3657600" algn="l" defTabSz="914400" rtl="0" eaLnBrk="1" latinLnBrk="0" hangingPunct="1">
+              <a:defRPr sz="1800" kern="1200">
+                <a:solidFill>
+                  <a:schemeClr val="tx1"/>
+                </a:solidFill>
+                <a:latin typeface="+mn-lt"/>
+                <a:ea typeface="+mn-ea"/>
+                <a:cs typeface="+mn-cs"/>
+              </a:defRPr>
+            </a:lvl9pPr>
+          </a:lstStyle>
           <a:p>
-            <a:pPr marL="171450" indent="-171450">
-              <a:buFont typeface="Arial"/>
-              <a:buChar char="•"/>
-            </a:pPr>
-            <a:r>
-              <a:rPr lang="en-US" sz="1200">
-                <a:ea typeface="+mn-lt"/>
-                <a:cs typeface="+mn-lt"/>
+            <a:pPr marL="12700"/>
+            <a:r>
+              <a:rPr lang="en-US" sz="1600" b="1" u="sng" dirty="0">
+                <a:solidFill>
+                  <a:schemeClr val="tx1"/>
+                </a:solidFill>
               </a:rPr>
-              <a:t>We excluded those records from the weather-effect analysis because we could not confidently classify them as dry, light rain, heavy rain, or snow.</a:t>
-            </a:r>
-            <a:endParaRPr lang="en-US" sz="1200">
-              <a:ea typeface="Calibri"/>
-              <a:cs typeface="Calibri"/>
+              <a:t>6/</a:t>
+            </a:r>
+            <a:r>
+              <a:rPr lang="en-US" sz="1600" b="1" u="sng" dirty="0"/>
+              <a:t> The answer to our part 1 Sub-question</a:t>
+            </a:r>
+            <a:endParaRPr lang="en-US" sz="1600" b="1" u="sng" dirty="0">
+              <a:latin typeface="Arial MT"/>
+              <a:cs typeface="Arial MT"/>
             </a:endParaRPr>
           </a:p>
         </p:txBody>
@@ -9241,7 +9097,7 @@
         </p:nvSpPr>
         <p:spPr>
           <a:xfrm>
-            <a:off x="184970" y="2275384"/>
+            <a:off x="184970" y="910415"/>
             <a:ext cx="2977734" cy="396696"/>
           </a:xfrm>
           <a:prstGeom prst="rect">
@@ -9349,10 +9205,10 @@
               <a:buAutoNum type="arabicPeriod"/>
             </a:pPr>
             <a:r>
-              <a:rPr lang="en-US" sz="1400" b="1"/>
+              <a:rPr lang="en-US" sz="1400" b="1" dirty="0"/>
               <a:t>Network-wide effect of weather</a:t>
             </a:r>
-            <a:endParaRPr lang="en-US" sz="1400" b="1">
+            <a:endParaRPr lang="en-US" sz="1400" b="1" dirty="0">
               <a:ea typeface="Calibri"/>
               <a:cs typeface="Calibri"/>
             </a:endParaRPr>
@@ -9373,7 +9229,7 @@
         </p:nvSpPr>
         <p:spPr>
           <a:xfrm>
-            <a:off x="184707" y="1863566"/>
+            <a:off x="184707" y="498598"/>
             <a:ext cx="6647688" cy="413852"/>
           </a:xfrm>
           <a:prstGeom prst="rect">
@@ -9479,10 +9335,10 @@
           <a:p>
             <a:pPr marL="12700"/>
             <a:r>
-              <a:rPr lang="en-US" sz="1000"/>
+              <a:rPr lang="en-US" sz="1200" dirty="0"/>
               <a:t>What is the usual ridership in each subway station by hour and day of the week, and by how much does the weather change it?</a:t>
             </a:r>
-            <a:endParaRPr lang="en-US" sz="1000" b="1" u="sng">
+            <a:endParaRPr lang="en-US" sz="1200" b="1" u="sng" dirty="0">
               <a:latin typeface="Calibri"/>
               <a:ea typeface="Calibri"/>
               <a:cs typeface="Calibri"/>
@@ -9505,13 +9361,13 @@
           <p:nvPr>
             <p:extLst>
               <p:ext uri="{D42A27DB-BD31-4B8C-83A1-F6EECF244321}">
-                <p14:modId xmlns:p14="http://schemas.microsoft.com/office/powerpoint/2010/main" val="1853525484"/>
+                <p14:modId xmlns:p14="http://schemas.microsoft.com/office/powerpoint/2010/main" val="4106972898"/>
               </p:ext>
             </p:extLst>
           </p:nvPr>
         </p:nvGraphicFramePr>
         <p:xfrm>
-          <a:off x="17147" y="2674451"/>
+          <a:off x="17147" y="1362491"/>
           <a:ext cx="7562850" cy="1127760"/>
         </p:xfrm>
         <a:graphic>
@@ -9553,7 +9409,7 @@
                         <a:buNone/>
                       </a:pPr>
                       <a:r>
-                        <a:rPr lang="en-US" sz="1400" b="1"/>
+                        <a:rPr lang="en-US" sz="1400" b="1" dirty="0"/>
                         <a:t>Weather condition</a:t>
                       </a:r>
                     </a:p>
@@ -9916,7 +9772,7 @@
                         <a:buNone/>
                       </a:pPr>
                       <a:r>
-                        <a:rPr lang="en-US" sz="1200"/>
+                        <a:rPr lang="en-US" sz="1200" dirty="0"/>
                         <a:t>Snow</a:t>
                       </a:r>
                     </a:p>
@@ -9992,7 +9848,7 @@
                         <a:buNone/>
                       </a:pPr>
                       <a:r>
-                        <a:rPr lang="en-US" sz="1200"/>
+                        <a:rPr lang="en-US" sz="1200" dirty="0"/>
                         <a:t>−4.8%</a:t>
                       </a:r>
                     </a:p>
@@ -10045,8 +9901,8 @@
         </p:nvSpPr>
         <p:spPr>
           <a:xfrm>
-            <a:off x="21716" y="3971985"/>
-            <a:ext cx="6799705" cy="584775"/>
+            <a:off x="21716" y="2567258"/>
+            <a:ext cx="6799705" cy="276999"/>
           </a:xfrm>
           <a:prstGeom prst="rect">
             <a:avLst/>
@@ -10063,17 +9919,13 @@
           <a:lstStyle/>
           <a:p>
             <a:r>
-              <a:rPr lang="en-US" sz="1400"/>
-              <a:t>Snow had the largest estimated network-wide decrease, at 4.8%</a:t>
-            </a:r>
-            <a:endParaRPr lang="en-US" sz="1400">
+              <a:rPr lang="en-US" sz="1200" dirty="0"/>
+              <a:t>Snow causes the largest estimated network-wide decrease, at 4.8%</a:t>
+            </a:r>
+            <a:endParaRPr lang="en-US" sz="1200" dirty="0">
               <a:ea typeface="Calibri"/>
               <a:cs typeface="Calibri"/>
             </a:endParaRPr>
-          </a:p>
-          <a:p>
-            <a:pPr algn="ctr"/>
-            <a:endParaRPr lang="en-US"/>
           </a:p>
         </p:txBody>
       </p:sp>
@@ -10091,7 +9943,7 @@
         </p:nvSpPr>
         <p:spPr>
           <a:xfrm>
-            <a:off x="185161" y="4351038"/>
+            <a:off x="185161" y="2840296"/>
             <a:ext cx="2977734" cy="396696"/>
           </a:xfrm>
           <a:prstGeom prst="rect">
@@ -10196,13 +10048,13 @@
           </a:lstStyle>
           <a:p>
             <a:r>
-              <a:rPr lang="en-US" sz="1400" b="1">
+              <a:rPr lang="en-US" sz="1400" b="1" dirty="0">
                 <a:ea typeface="+mn-lt"/>
                 <a:cs typeface="+mn-lt"/>
               </a:rPr>
               <a:t>2.       Differences between boroughs</a:t>
             </a:r>
-            <a:endParaRPr lang="en-US" sz="1400" b="1">
+            <a:endParaRPr lang="en-US" sz="1400" b="1" dirty="0">
               <a:ea typeface="Calibri"/>
               <a:cs typeface="Calibri"/>
             </a:endParaRPr>
@@ -10224,13 +10076,13 @@
           <p:nvPr>
             <p:extLst>
               <p:ext uri="{D42A27DB-BD31-4B8C-83A1-F6EECF244321}">
-                <p14:modId xmlns:p14="http://schemas.microsoft.com/office/powerpoint/2010/main" val="1682888440"/>
+                <p14:modId xmlns:p14="http://schemas.microsoft.com/office/powerpoint/2010/main" val="266828142"/>
               </p:ext>
             </p:extLst>
           </p:nvPr>
         </p:nvGraphicFramePr>
         <p:xfrm>
-          <a:off x="17147" y="4738694"/>
+          <a:off x="17147" y="3241204"/>
           <a:ext cx="7562852" cy="1402080"/>
         </p:xfrm>
         <a:graphic>
@@ -10756,7 +10608,7 @@
                         <a:buNone/>
                       </a:pPr>
                       <a:r>
-                        <a:rPr lang="en-US" sz="1200"/>
+                        <a:rPr lang="en-US" sz="1200" dirty="0"/>
                         <a:t>Manhattan</a:t>
                       </a:r>
                     </a:p>
@@ -10915,7 +10767,7 @@
                         <a:buNone/>
                       </a:pPr>
                       <a:r>
-                        <a:rPr lang="en-US" sz="1200"/>
+                        <a:rPr lang="en-US" sz="1200" dirty="0"/>
                         <a:t>Queens</a:t>
                       </a:r>
                     </a:p>
@@ -11029,7 +10881,7 @@
                         <a:buNone/>
                       </a:pPr>
                       <a:r>
-                        <a:rPr lang="en-US" sz="1200"/>
+                        <a:rPr lang="en-US" sz="1200" dirty="0"/>
                         <a:t>−8.6%</a:t>
                       </a:r>
                     </a:p>
@@ -11082,8 +10934,8 @@
         </p:nvSpPr>
         <p:spPr>
           <a:xfrm>
-            <a:off x="21713" y="6356415"/>
-            <a:ext cx="7365632" cy="1384995"/>
+            <a:off x="21713" y="4699897"/>
+            <a:ext cx="7365632" cy="646331"/>
           </a:xfrm>
           <a:prstGeom prst="rect">
             <a:avLst/>
@@ -11100,419 +10952,15 @@
           <a:lstStyle/>
           <a:p>
             <a:r>
-              <a:rPr lang="en-US" sz="1400" dirty="0"/>
-              <a:t>Manhattan behaved differently: its estimated ridership was slightly higher during heavy rain (3.2%) </a:t>
-            </a:r>
-            <a:r>
-              <a:rPr lang="en-US" sz="1400"/>
-              <a:t>and almost unchanged during light rain (−0.3%)</a:t>
-            </a:r>
-            <a:endParaRPr lang="en-US" sz="1400" dirty="0">
-              <a:ea typeface="Calibri"/>
-              <a:cs typeface="Calibri"/>
-            </a:endParaRPr>
+              <a:rPr lang="en-US" sz="1200" dirty="0"/>
+              <a:t>Manhattan behaved differently: its estimated ridership was slightly higher during heavy rain (3.2%) and almost unchanged during light rain (−0.3%)</a:t>
+            </a:r>
           </a:p>
           <a:p>
-            <a:endParaRPr lang="en-US" sz="1400" dirty="0"/>
-          </a:p>
-          <a:p>
-            <a:r>
-              <a:rPr lang="en-US" sz="1400"/>
-              <a:t>This suggests weather related ridership patterns vary geographically rather than affecting every </a:t>
-            </a:r>
-            <a:r>
-              <a:rPr lang="en-US" sz="1400" dirty="0"/>
-              <a:t>borough equally</a:t>
-            </a:r>
-            <a:endParaRPr lang="en-US" sz="1400" dirty="0">
-              <a:ea typeface="Calibri"/>
-              <a:cs typeface="Calibri"/>
-            </a:endParaRPr>
-          </a:p>
-          <a:p>
-            <a:pPr algn="ctr"/>
-            <a:endParaRPr lang="en-US" sz="1400" dirty="0">
-              <a:ea typeface="Calibri"/>
-              <a:cs typeface="Calibri"/>
-            </a:endParaRPr>
-          </a:p>
-        </p:txBody>
-      </p:sp>
-      <p:sp>
-        <p:nvSpPr>
-          <p:cNvPr id="19" name="Text 10">
-            <a:extLst>
-              <a:ext uri="{FF2B5EF4-FFF2-40B4-BE49-F238E27FC236}">
-                <a16:creationId xmlns:a16="http://schemas.microsoft.com/office/drawing/2014/main" id="{E3CDD629-180A-6FFD-71A3-9512933535D5}"/>
-              </a:ext>
-            </a:extLst>
-          </p:cNvPr>
-          <p:cNvSpPr txBox="1"/>
-          <p:nvPr/>
-        </p:nvSpPr>
-        <p:spPr>
-          <a:xfrm>
-            <a:off x="185279" y="7747565"/>
-            <a:ext cx="2977734" cy="396696"/>
-          </a:xfrm>
-          <a:prstGeom prst="rect">
-            <a:avLst/>
-          </a:prstGeom>
-          <a:noFill/>
-          <a:ln/>
-        </p:spPr>
-        <p:txBody>
-          <a:bodyPr wrap="square" lIns="0" tIns="0" rIns="0" bIns="0" rtlCol="0" anchor="ctr"/>
-          <a:lstStyle>
-            <a:lvl1pPr marL="0" algn="l" defTabSz="914400" rtl="0" eaLnBrk="1" latinLnBrk="0" hangingPunct="1">
-              <a:defRPr sz="1800" kern="1200">
-                <a:solidFill>
-                  <a:schemeClr val="tx1"/>
-                </a:solidFill>
-                <a:latin typeface="+mn-lt"/>
-                <a:ea typeface="+mn-ea"/>
-                <a:cs typeface="+mn-cs"/>
-              </a:defRPr>
-            </a:lvl1pPr>
-            <a:lvl2pPr marL="457200" algn="l" defTabSz="914400" rtl="0" eaLnBrk="1" latinLnBrk="0" hangingPunct="1">
-              <a:defRPr sz="1800" kern="1200">
-                <a:solidFill>
-                  <a:schemeClr val="tx1"/>
-                </a:solidFill>
-                <a:latin typeface="+mn-lt"/>
-                <a:ea typeface="+mn-ea"/>
-                <a:cs typeface="+mn-cs"/>
-              </a:defRPr>
-            </a:lvl2pPr>
-            <a:lvl3pPr marL="914400" algn="l" defTabSz="914400" rtl="0" eaLnBrk="1" latinLnBrk="0" hangingPunct="1">
-              <a:defRPr sz="1800" kern="1200">
-                <a:solidFill>
-                  <a:schemeClr val="tx1"/>
-                </a:solidFill>
-                <a:latin typeface="+mn-lt"/>
-                <a:ea typeface="+mn-ea"/>
-                <a:cs typeface="+mn-cs"/>
-              </a:defRPr>
-            </a:lvl3pPr>
-            <a:lvl4pPr marL="1371600" algn="l" defTabSz="914400" rtl="0" eaLnBrk="1" latinLnBrk="0" hangingPunct="1">
-              <a:defRPr sz="1800" kern="1200">
-                <a:solidFill>
-                  <a:schemeClr val="tx1"/>
-                </a:solidFill>
-                <a:latin typeface="+mn-lt"/>
-                <a:ea typeface="+mn-ea"/>
-                <a:cs typeface="+mn-cs"/>
-              </a:defRPr>
-            </a:lvl4pPr>
-            <a:lvl5pPr marL="1828800" algn="l" defTabSz="914400" rtl="0" eaLnBrk="1" latinLnBrk="0" hangingPunct="1">
-              <a:defRPr sz="1800" kern="1200">
-                <a:solidFill>
-                  <a:schemeClr val="tx1"/>
-                </a:solidFill>
-                <a:latin typeface="+mn-lt"/>
-                <a:ea typeface="+mn-ea"/>
-                <a:cs typeface="+mn-cs"/>
-              </a:defRPr>
-            </a:lvl5pPr>
-            <a:lvl6pPr marL="2286000" algn="l" defTabSz="914400" rtl="0" eaLnBrk="1" latinLnBrk="0" hangingPunct="1">
-              <a:defRPr sz="1800" kern="1200">
-                <a:solidFill>
-                  <a:schemeClr val="tx1"/>
-                </a:solidFill>
-                <a:latin typeface="+mn-lt"/>
-                <a:ea typeface="+mn-ea"/>
-                <a:cs typeface="+mn-cs"/>
-              </a:defRPr>
-            </a:lvl6pPr>
-            <a:lvl7pPr marL="2743200" algn="l" defTabSz="914400" rtl="0" eaLnBrk="1" latinLnBrk="0" hangingPunct="1">
-              <a:defRPr sz="1800" kern="1200">
-                <a:solidFill>
-                  <a:schemeClr val="tx1"/>
-                </a:solidFill>
-                <a:latin typeface="+mn-lt"/>
-                <a:ea typeface="+mn-ea"/>
-                <a:cs typeface="+mn-cs"/>
-              </a:defRPr>
-            </a:lvl7pPr>
-            <a:lvl8pPr marL="3200400" algn="l" defTabSz="914400" rtl="0" eaLnBrk="1" latinLnBrk="0" hangingPunct="1">
-              <a:defRPr sz="1800" kern="1200">
-                <a:solidFill>
-                  <a:schemeClr val="tx1"/>
-                </a:solidFill>
-                <a:latin typeface="+mn-lt"/>
-                <a:ea typeface="+mn-ea"/>
-                <a:cs typeface="+mn-cs"/>
-              </a:defRPr>
-            </a:lvl8pPr>
-            <a:lvl9pPr marL="3657600" algn="l" defTabSz="914400" rtl="0" eaLnBrk="1" latinLnBrk="0" hangingPunct="1">
-              <a:defRPr sz="1800" kern="1200">
-                <a:solidFill>
-                  <a:schemeClr val="tx1"/>
-                </a:solidFill>
-                <a:latin typeface="+mn-lt"/>
-                <a:ea typeface="+mn-ea"/>
-                <a:cs typeface="+mn-cs"/>
-              </a:defRPr>
-            </a:lvl9pPr>
-          </a:lstStyle>
-          <a:p>
-            <a:r>
-              <a:rPr lang="en-US" sz="1400" b="1"/>
-              <a:t>3.        Conclusion</a:t>
-            </a:r>
-            <a:endParaRPr lang="en-US" sz="1400" b="1">
-              <a:ea typeface="Calibri"/>
-              <a:cs typeface="Calibri"/>
-            </a:endParaRPr>
-          </a:p>
-        </p:txBody>
-      </p:sp>
-      <p:sp>
-        <p:nvSpPr>
-          <p:cNvPr id="20" name="Text 10">
-            <a:extLst>
-              <a:ext uri="{FF2B5EF4-FFF2-40B4-BE49-F238E27FC236}">
-                <a16:creationId xmlns:a16="http://schemas.microsoft.com/office/drawing/2014/main" id="{D5D043C6-73C4-F4BC-F895-18B072440526}"/>
-              </a:ext>
-            </a:extLst>
-          </p:cNvPr>
-          <p:cNvSpPr txBox="1"/>
-          <p:nvPr/>
-        </p:nvSpPr>
-        <p:spPr>
-          <a:xfrm>
-            <a:off x="185410" y="9342958"/>
-            <a:ext cx="6836330" cy="1082965"/>
-          </a:xfrm>
-          <a:prstGeom prst="rect">
-            <a:avLst/>
-          </a:prstGeom>
-          <a:noFill/>
-          <a:ln/>
-        </p:spPr>
-        <p:txBody>
-          <a:bodyPr wrap="square" lIns="0" tIns="0" rIns="0" bIns="0" rtlCol="0" anchor="ctr"/>
-          <a:lstStyle>
-            <a:lvl1pPr marL="0" algn="l" defTabSz="914400" rtl="0" eaLnBrk="1" latinLnBrk="0" hangingPunct="1">
-              <a:defRPr sz="1800" kern="1200">
-                <a:solidFill>
-                  <a:schemeClr val="tx1"/>
-                </a:solidFill>
-                <a:latin typeface="+mn-lt"/>
-                <a:ea typeface="+mn-ea"/>
-                <a:cs typeface="+mn-cs"/>
-              </a:defRPr>
-            </a:lvl1pPr>
-            <a:lvl2pPr marL="457200" algn="l" defTabSz="914400" rtl="0" eaLnBrk="1" latinLnBrk="0" hangingPunct="1">
-              <a:defRPr sz="1800" kern="1200">
-                <a:solidFill>
-                  <a:schemeClr val="tx1"/>
-                </a:solidFill>
-                <a:latin typeface="+mn-lt"/>
-                <a:ea typeface="+mn-ea"/>
-                <a:cs typeface="+mn-cs"/>
-              </a:defRPr>
-            </a:lvl2pPr>
-            <a:lvl3pPr marL="914400" algn="l" defTabSz="914400" rtl="0" eaLnBrk="1" latinLnBrk="0" hangingPunct="1">
-              <a:defRPr sz="1800" kern="1200">
-                <a:solidFill>
-                  <a:schemeClr val="tx1"/>
-                </a:solidFill>
-                <a:latin typeface="+mn-lt"/>
-                <a:ea typeface="+mn-ea"/>
-                <a:cs typeface="+mn-cs"/>
-              </a:defRPr>
-            </a:lvl3pPr>
-            <a:lvl4pPr marL="1371600" algn="l" defTabSz="914400" rtl="0" eaLnBrk="1" latinLnBrk="0" hangingPunct="1">
-              <a:defRPr sz="1800" kern="1200">
-                <a:solidFill>
-                  <a:schemeClr val="tx1"/>
-                </a:solidFill>
-                <a:latin typeface="+mn-lt"/>
-                <a:ea typeface="+mn-ea"/>
-                <a:cs typeface="+mn-cs"/>
-              </a:defRPr>
-            </a:lvl4pPr>
-            <a:lvl5pPr marL="1828800" algn="l" defTabSz="914400" rtl="0" eaLnBrk="1" latinLnBrk="0" hangingPunct="1">
-              <a:defRPr sz="1800" kern="1200">
-                <a:solidFill>
-                  <a:schemeClr val="tx1"/>
-                </a:solidFill>
-                <a:latin typeface="+mn-lt"/>
-                <a:ea typeface="+mn-ea"/>
-                <a:cs typeface="+mn-cs"/>
-              </a:defRPr>
-            </a:lvl5pPr>
-            <a:lvl6pPr marL="2286000" algn="l" defTabSz="914400" rtl="0" eaLnBrk="1" latinLnBrk="0" hangingPunct="1">
-              <a:defRPr sz="1800" kern="1200">
-                <a:solidFill>
-                  <a:schemeClr val="tx1"/>
-                </a:solidFill>
-                <a:latin typeface="+mn-lt"/>
-                <a:ea typeface="+mn-ea"/>
-                <a:cs typeface="+mn-cs"/>
-              </a:defRPr>
-            </a:lvl6pPr>
-            <a:lvl7pPr marL="2743200" algn="l" defTabSz="914400" rtl="0" eaLnBrk="1" latinLnBrk="0" hangingPunct="1">
-              <a:defRPr sz="1800" kern="1200">
-                <a:solidFill>
-                  <a:schemeClr val="tx1"/>
-                </a:solidFill>
-                <a:latin typeface="+mn-lt"/>
-                <a:ea typeface="+mn-ea"/>
-                <a:cs typeface="+mn-cs"/>
-              </a:defRPr>
-            </a:lvl7pPr>
-            <a:lvl8pPr marL="3200400" algn="l" defTabSz="914400" rtl="0" eaLnBrk="1" latinLnBrk="0" hangingPunct="1">
-              <a:defRPr sz="1800" kern="1200">
-                <a:solidFill>
-                  <a:schemeClr val="tx1"/>
-                </a:solidFill>
-                <a:latin typeface="+mn-lt"/>
-                <a:ea typeface="+mn-ea"/>
-                <a:cs typeface="+mn-cs"/>
-              </a:defRPr>
-            </a:lvl8pPr>
-            <a:lvl9pPr marL="3657600" algn="l" defTabSz="914400" rtl="0" eaLnBrk="1" latinLnBrk="0" hangingPunct="1">
-              <a:defRPr sz="1800" kern="1200">
-                <a:solidFill>
-                  <a:schemeClr val="tx1"/>
-                </a:solidFill>
-                <a:latin typeface="+mn-lt"/>
-                <a:ea typeface="+mn-ea"/>
-                <a:cs typeface="+mn-cs"/>
-              </a:defRPr>
-            </a:lvl9pPr>
-          </a:lstStyle>
-          <a:p>
-            <a:pPr marL="285750" indent="-285750">
-              <a:buFont typeface="Arial"/>
-              <a:buChar char="•"/>
-            </a:pPr>
-            <a:r>
-              <a:rPr lang="en-US" sz="1200">
-                <a:ea typeface="+mn-lt"/>
-                <a:cs typeface="+mn-lt"/>
-              </a:rPr>
-              <a:t>These are observational comparisons, not proof that weather caused the changes</a:t>
-            </a:r>
-            <a:endParaRPr lang="en-US" sz="1200">
-              <a:ea typeface="Calibri"/>
-              <a:cs typeface="Calibri"/>
-            </a:endParaRPr>
-          </a:p>
-          <a:p>
-            <a:pPr marL="285750" indent="-285750">
-              <a:buFont typeface="Arial"/>
-              <a:buChar char="•"/>
-            </a:pPr>
-            <a:r>
-              <a:rPr lang="en-US" sz="1200">
-                <a:ea typeface="+mn-lt"/>
-                <a:cs typeface="+mn-lt"/>
-              </a:rPr>
-              <a:t>We used average ridership during dry hours with the same month, weekday, and hour. However, other factors such as holidays, service disruptions, or special events could also influence ridership</a:t>
-            </a:r>
-            <a:endParaRPr lang="en-US" sz="1200">
-              <a:ea typeface="Calibri"/>
-              <a:cs typeface="Calibri"/>
-            </a:endParaRPr>
-          </a:p>
-          <a:p>
-            <a:pPr marL="285750" indent="-285750">
-              <a:buFont typeface="Arial"/>
-              <a:buChar char="•"/>
-            </a:pPr>
-            <a:r>
-              <a:rPr lang="en-US" sz="1200">
-                <a:ea typeface="+mn-lt"/>
-                <a:cs typeface="+mn-lt"/>
-              </a:rPr>
-              <a:t>Snow had only 64 observed hours in the analysis, compared with 454 hours of light rain, so the weather categories have unequal amounts of data</a:t>
-            </a:r>
-          </a:p>
-          <a:p>
-            <a:endParaRPr lang="en-US" sz="1200" b="1" dirty="0">
-              <a:ea typeface="Calibri"/>
-              <a:cs typeface="Calibri"/>
-            </a:endParaRPr>
-          </a:p>
-        </p:txBody>
-      </p:sp>
-      <p:sp>
-        <p:nvSpPr>
-          <p:cNvPr id="21" name="TextBox 20">
-            <a:extLst>
-              <a:ext uri="{FF2B5EF4-FFF2-40B4-BE49-F238E27FC236}">
-                <a16:creationId xmlns:a16="http://schemas.microsoft.com/office/drawing/2014/main" id="{83E547E9-E6B1-88B7-0090-2C34C0F4C86B}"/>
-              </a:ext>
-            </a:extLst>
-          </p:cNvPr>
-          <p:cNvSpPr txBox="1"/>
-          <p:nvPr/>
-        </p:nvSpPr>
-        <p:spPr>
-          <a:xfrm>
-            <a:off x="107448" y="8140449"/>
-            <a:ext cx="6645360" cy="1015663"/>
-          </a:xfrm>
-          <a:prstGeom prst="rect">
-            <a:avLst/>
-          </a:prstGeom>
-          <a:noFill/>
-        </p:spPr>
-        <p:txBody>
-          <a:bodyPr rot="0" spcFirstLastPara="0" vertOverflow="overflow" horzOverflow="overflow" vert="horz" wrap="square" lIns="91440" tIns="45720" rIns="91440" bIns="45720" numCol="1" spcCol="0" rtlCol="0" fromWordArt="0" anchor="t" anchorCtr="0" forceAA="0" compatLnSpc="1">
-            <a:prstTxWarp prst="textNoShape">
-              <a:avLst/>
-            </a:prstTxWarp>
-            <a:spAutoFit/>
-          </a:bodyPr>
-          <a:lstStyle/>
-          <a:p>
-            <a:pPr marL="228600" indent="-228600">
-              <a:buFont typeface=""/>
-              <a:buChar char="•"/>
-            </a:pPr>
-            <a:r>
-              <a:rPr lang="en-US" sz="1200"/>
-              <a:t> Weather conditions are associated with changes in subway ridership</a:t>
-            </a:r>
-            <a:endParaRPr lang="en-US" sz="1200" dirty="0">
-              <a:ea typeface="Calibri"/>
-              <a:cs typeface="Calibri"/>
-            </a:endParaRPr>
-          </a:p>
-          <a:p>
-            <a:pPr marL="228600" indent="-228600">
-              <a:buFont typeface=""/>
-              <a:buChar char="•"/>
-            </a:pPr>
-            <a:r>
-              <a:rPr lang="en-US" sz="1200"/>
-              <a:t> The borough-level analysis gives a more detailed picture than a single network-wide number</a:t>
-            </a:r>
-            <a:endParaRPr lang="en-US" sz="1200" dirty="0">
-              <a:ea typeface="Calibri"/>
-              <a:cs typeface="Calibri"/>
-            </a:endParaRPr>
-          </a:p>
-          <a:p>
-            <a:pPr marL="228600" indent="-228600">
-              <a:buFont typeface=""/>
-              <a:buChar char="•"/>
-            </a:pPr>
-            <a:r>
-              <a:rPr lang="en-US" sz="1200"/>
-              <a:t> These results could help motivate further investigation into where weather may have the greatest impact on public transport demand</a:t>
-            </a:r>
-            <a:endParaRPr lang="en-US" sz="1200" dirty="0">
-              <a:ea typeface="Calibri"/>
-              <a:cs typeface="Calibri"/>
-            </a:endParaRPr>
-          </a:p>
-          <a:p>
-            <a:pPr algn="ctr"/>
+            <a:r>
+              <a:rPr lang="en-US" sz="1200" dirty="0"/>
+              <a:t>This suggests weather related ridership patterns vary geographically rather than affecting every borough equally</a:t>
+            </a:r>
             <a:endParaRPr lang="en-US" sz="1200" dirty="0">
               <a:ea typeface="Calibri"/>
               <a:cs typeface="Calibri"/>

--- a/report/NYC_Subway_Part1_Delivrable_Report_V2.pptx
+++ b/report/NYC_Subway_Part1_Delivrable_Report_V2.pptx
@@ -5,13 +5,12 @@
     <p:sldMasterId id="2147483648" r:id="rId1"/>
   </p:sldMasterIdLst>
   <p:notesMasterIdLst>
-    <p:notesMasterId r:id="rId6"/>
+    <p:notesMasterId r:id="rId5"/>
   </p:notesMasterIdLst>
   <p:sldIdLst>
     <p:sldId id="256" r:id="rId2"/>
     <p:sldId id="257" r:id="rId3"/>
     <p:sldId id="258" r:id="rId4"/>
-    <p:sldId id="259" r:id="rId5"/>
   </p:sldIdLst>
   <p:sldSz cx="7562850" cy="10688638"/>
   <p:notesSz cx="10688638" cy="7562850"/>
@@ -3096,8 +3095,8 @@
         </p:nvSpPr>
         <p:spPr>
           <a:xfrm>
-            <a:off x="2292628" y="4931122"/>
-            <a:ext cx="2822712" cy="693497"/>
+            <a:off x="921838" y="4587102"/>
+            <a:ext cx="5616699" cy="338030"/>
           </a:xfrm>
           <a:prstGeom prst="rect">
             <a:avLst/>
@@ -3125,14 +3124,14 @@
           <a:p>
             <a:pPr algn="ctr"/>
             <a:r>
-              <a:rPr lang="en-US" dirty="0">
+              <a:rPr lang="en-US" sz="1400" dirty="0">
                 <a:solidFill>
                   <a:schemeClr val="tx1"/>
                 </a:solidFill>
               </a:rPr>
               <a:t>Silver Layer Output: Clean tables, Ready to join</a:t>
             </a:r>
-            <a:endParaRPr lang="fr-FR" dirty="0">
+            <a:endParaRPr lang="fr-FR" sz="1400" dirty="0">
               <a:solidFill>
                 <a:schemeClr val="tx1"/>
               </a:solidFill>
@@ -3154,8 +3153,8 @@
         </p:nvSpPr>
         <p:spPr>
           <a:xfrm>
-            <a:off x="2292628" y="3235264"/>
-            <a:ext cx="2822712" cy="699516"/>
+            <a:off x="921839" y="3235264"/>
+            <a:ext cx="5616696" cy="368110"/>
           </a:xfrm>
           <a:prstGeom prst="rect">
             <a:avLst/>
@@ -3183,14 +3182,14 @@
           <a:p>
             <a:pPr algn="ctr"/>
             <a:r>
-              <a:rPr lang="en-US" dirty="0">
+              <a:rPr lang="en-US" sz="1400" dirty="0">
                 <a:solidFill>
                   <a:schemeClr val="tx1"/>
                 </a:solidFill>
               </a:rPr>
               <a:t>Bronze Layer Output: Typed Parquet files </a:t>
             </a:r>
-            <a:endParaRPr lang="fr-FR" dirty="0">
+            <a:endParaRPr lang="fr-FR" sz="1400" dirty="0">
               <a:solidFill>
                 <a:schemeClr val="tx1"/>
               </a:solidFill>
@@ -3212,8 +3211,8 @@
         </p:nvSpPr>
         <p:spPr>
           <a:xfrm>
-            <a:off x="1762540" y="6588405"/>
-            <a:ext cx="4055164" cy="553576"/>
+            <a:off x="921838" y="5891291"/>
+            <a:ext cx="5616699" cy="336839"/>
           </a:xfrm>
           <a:prstGeom prst="rect">
             <a:avLst/>
@@ -3244,7 +3243,7 @@
           <a:p>
             <a:pPr algn="ctr"/>
             <a:r>
-              <a:rPr lang="en-US" dirty="0">
+              <a:rPr lang="en-US" sz="1400" dirty="0">
                 <a:solidFill>
                   <a:schemeClr val="tx1"/>
                 </a:solidFill>
@@ -3252,7 +3251,7 @@
               <a:t>Gold Layer Output : Usual </a:t>
             </a:r>
             <a:r>
-              <a:rPr lang="en-US" dirty="0" err="1">
+              <a:rPr lang="en-US" sz="1400" dirty="0" err="1">
                 <a:solidFill>
                   <a:schemeClr val="tx1"/>
                 </a:solidFill>
@@ -3260,14 +3259,14 @@
               <a:t>Riderships</a:t>
             </a:r>
             <a:r>
-              <a:rPr lang="en-US" dirty="0">
+              <a:rPr lang="en-US" sz="1400" dirty="0">
                 <a:solidFill>
                   <a:schemeClr val="tx1"/>
                 </a:solidFill>
               </a:rPr>
               <a:t>, Busiest Station and Weather effect</a:t>
             </a:r>
-            <a:endParaRPr lang="fr-FR" dirty="0">
+            <a:endParaRPr lang="fr-FR" sz="1400" dirty="0">
               <a:solidFill>
                 <a:schemeClr val="tx1"/>
               </a:solidFill>
@@ -3321,14 +3320,14 @@
           <a:p>
             <a:pPr algn="ctr"/>
             <a:r>
-              <a:rPr lang="en-US" sz="1600" b="1" dirty="0">
+              <a:rPr lang="en-US" sz="1400" b="1" dirty="0">
                 <a:solidFill>
                   <a:schemeClr val="tx1"/>
                 </a:solidFill>
               </a:rPr>
               <a:t>Downloaded Raw Data</a:t>
             </a:r>
-            <a:endParaRPr lang="fr-FR" sz="1600" b="1" dirty="0">
+            <a:endParaRPr lang="fr-FR" sz="1400" b="1" dirty="0">
               <a:solidFill>
                 <a:schemeClr val="tx1"/>
               </a:solidFill>
@@ -3382,14 +3381,14 @@
           <a:p>
             <a:pPr algn="ctr"/>
             <a:r>
-              <a:rPr lang="en-US" sz="1600" dirty="0">
+              <a:rPr lang="en-US" sz="1400" dirty="0">
                 <a:solidFill>
                   <a:schemeClr val="tx1"/>
                 </a:solidFill>
               </a:rPr>
               <a:t>MTA hourly Ridership 12 months CSVs, 5,1 GB </a:t>
             </a:r>
-            <a:endParaRPr lang="fr-FR" sz="1600" dirty="0">
+            <a:endParaRPr lang="fr-FR" sz="1400" dirty="0">
               <a:solidFill>
                 <a:schemeClr val="tx1"/>
               </a:solidFill>
@@ -3443,14 +3442,14 @@
           <a:p>
             <a:pPr algn="ctr"/>
             <a:r>
-              <a:rPr lang="en-US" sz="1600" dirty="0">
+              <a:rPr lang="en-US" sz="1400" dirty="0">
                 <a:solidFill>
                   <a:schemeClr val="tx1"/>
                 </a:solidFill>
               </a:rPr>
               <a:t>MTA Subway Stations 1 CSV</a:t>
             </a:r>
-            <a:endParaRPr lang="fr-FR" sz="1600" dirty="0">
+            <a:endParaRPr lang="fr-FR" sz="1400" dirty="0">
               <a:solidFill>
                 <a:schemeClr val="tx1"/>
               </a:solidFill>
@@ -3504,14 +3503,14 @@
           <a:p>
             <a:pPr algn="ctr"/>
             <a:r>
-              <a:rPr lang="en-US" sz="1600" dirty="0">
+              <a:rPr lang="en-US" sz="1400" dirty="0">
                 <a:solidFill>
                   <a:schemeClr val="tx1"/>
                 </a:solidFill>
               </a:rPr>
               <a:t>NOAA Weather from Central Park 12 CSVs</a:t>
             </a:r>
-            <a:endParaRPr lang="fr-FR" sz="1600" dirty="0">
+            <a:endParaRPr lang="fr-FR" sz="1400" dirty="0">
               <a:solidFill>
                 <a:schemeClr val="tx1"/>
               </a:solidFill>
@@ -3749,7 +3748,7 @@
           <a:p>
             <a:pPr algn="ctr"/>
             <a:r>
-              <a:rPr lang="en-US" sz="1600" b="1" u="sng" dirty="0">
+              <a:rPr lang="en-US" sz="1400" b="1" u="sng" dirty="0">
                 <a:solidFill>
                   <a:srgbClr val="C00000"/>
                 </a:solidFill>
@@ -3757,7 +3756,7 @@
               <a:t>1</a:t>
             </a:r>
             <a:r>
-              <a:rPr lang="en-US" sz="1600" b="1" u="sng" baseline="30000" dirty="0">
+              <a:rPr lang="en-US" sz="1400" b="1" u="sng" baseline="30000" dirty="0">
                 <a:solidFill>
                   <a:srgbClr val="C00000"/>
                 </a:solidFill>
@@ -3765,7 +3764,7 @@
               <a:t>st</a:t>
             </a:r>
             <a:r>
-              <a:rPr lang="en-US" sz="1600" b="1" u="sng" dirty="0">
+              <a:rPr lang="en-US" sz="1400" b="1" u="sng" dirty="0">
                 <a:solidFill>
                   <a:srgbClr val="C00000"/>
                 </a:solidFill>
@@ -3773,14 +3772,14 @@
               <a:t> Ingest: </a:t>
             </a:r>
             <a:r>
-              <a:rPr lang="en-US" sz="1600" dirty="0">
+              <a:rPr lang="en-US" sz="1400" dirty="0">
                 <a:solidFill>
                   <a:schemeClr val="tx1"/>
                 </a:solidFill>
               </a:rPr>
               <a:t> Reads with Explicit Schema and Check the rows count</a:t>
             </a:r>
-            <a:endParaRPr lang="fr-FR" sz="1600" dirty="0">
+            <a:endParaRPr lang="fr-FR" sz="1400" dirty="0">
               <a:solidFill>
                 <a:schemeClr val="tx1"/>
               </a:solidFill>
@@ -3948,7 +3947,7 @@
         </p:nvSpPr>
         <p:spPr>
           <a:xfrm>
-            <a:off x="3488106" y="3960860"/>
+            <a:off x="3488106" y="3616839"/>
             <a:ext cx="358789" cy="228789"/>
           </a:xfrm>
           <a:prstGeom prst="downArrow">
@@ -3994,8 +3993,8 @@
         </p:nvSpPr>
         <p:spPr>
           <a:xfrm>
-            <a:off x="530088" y="4189649"/>
-            <a:ext cx="6520069" cy="493228"/>
+            <a:off x="19288" y="3845628"/>
+            <a:ext cx="7508019" cy="493228"/>
           </a:xfrm>
           <a:prstGeom prst="rect">
             <a:avLst/>
@@ -4026,7 +4025,7 @@
           <a:p>
             <a:pPr algn="ctr"/>
             <a:r>
-              <a:rPr lang="en-US" sz="1600" b="1" u="sng" dirty="0">
+              <a:rPr lang="en-US" sz="1400" b="1" u="sng" dirty="0">
                 <a:solidFill>
                   <a:srgbClr val="C00000"/>
                 </a:solidFill>
@@ -4034,7 +4033,7 @@
               <a:t>2</a:t>
             </a:r>
             <a:r>
-              <a:rPr lang="en-US" sz="1600" b="1" u="sng" baseline="30000" dirty="0">
+              <a:rPr lang="en-US" sz="1400" b="1" u="sng" baseline="30000" dirty="0">
                 <a:solidFill>
                   <a:srgbClr val="C00000"/>
                 </a:solidFill>
@@ -4042,7 +4041,7 @@
               <a:t>nd</a:t>
             </a:r>
             <a:r>
-              <a:rPr lang="en-US" sz="1600" b="1" u="sng" dirty="0">
+              <a:rPr lang="en-US" sz="1400" b="1" u="sng" dirty="0">
                 <a:solidFill>
                   <a:srgbClr val="C00000"/>
                 </a:solidFill>
@@ -4050,7 +4049,7 @@
               <a:t> Clean:</a:t>
             </a:r>
             <a:r>
-              <a:rPr lang="en-US" sz="1600" b="1" dirty="0">
+              <a:rPr lang="en-US" sz="1400" b="1" dirty="0">
                 <a:solidFill>
                   <a:srgbClr val="C00000"/>
                 </a:solidFill>
@@ -4058,14 +4057,14 @@
               <a:t> </a:t>
             </a:r>
             <a:r>
-              <a:rPr lang="en-US" sz="1600" dirty="0">
+              <a:rPr lang="en-US" sz="1400" dirty="0">
                 <a:solidFill>
                   <a:schemeClr val="tx1"/>
                 </a:solidFill>
               </a:rPr>
               <a:t>Apply 6 cleaning rules for the ridership Dataset, 2 cleaning rules for the Stations Dataset and 4 cleaning rules for the weather Dataset</a:t>
             </a:r>
-            <a:endParaRPr lang="fr-FR" sz="1600" dirty="0">
+            <a:endParaRPr lang="fr-FR" sz="1400" dirty="0">
               <a:solidFill>
                 <a:schemeClr val="tx1"/>
               </a:solidFill>
@@ -4087,7 +4086,7 @@
         </p:nvSpPr>
         <p:spPr>
           <a:xfrm>
-            <a:off x="3521238" y="4683104"/>
+            <a:off x="3521238" y="4339083"/>
             <a:ext cx="358789" cy="228789"/>
           </a:xfrm>
           <a:prstGeom prst="downArrow">
@@ -4133,7 +4132,7 @@
         </p:nvSpPr>
         <p:spPr>
           <a:xfrm>
-            <a:off x="3521236" y="5637258"/>
+            <a:off x="3521236" y="4931094"/>
             <a:ext cx="358789" cy="228789"/>
           </a:xfrm>
           <a:prstGeom prst="downArrow">
@@ -4179,8 +4178,8 @@
         </p:nvSpPr>
         <p:spPr>
           <a:xfrm>
-            <a:off x="530088" y="5879299"/>
-            <a:ext cx="6520069" cy="493228"/>
+            <a:off x="42170" y="5173135"/>
+            <a:ext cx="7478509" cy="493228"/>
           </a:xfrm>
           <a:prstGeom prst="rect">
             <a:avLst/>
@@ -4211,7 +4210,7 @@
           <a:p>
             <a:pPr algn="ctr"/>
             <a:r>
-              <a:rPr lang="en-US" sz="1600" b="1" u="sng" dirty="0">
+              <a:rPr lang="en-US" sz="1400" b="1" u="sng" dirty="0">
                 <a:solidFill>
                   <a:srgbClr val="C00000"/>
                 </a:solidFill>
@@ -4219,7 +4218,7 @@
               <a:t>3</a:t>
             </a:r>
             <a:r>
-              <a:rPr lang="en-US" sz="1600" b="1" u="sng" baseline="30000" dirty="0">
+              <a:rPr lang="en-US" sz="1400" b="1" u="sng" baseline="30000" dirty="0">
                 <a:solidFill>
                   <a:srgbClr val="C00000"/>
                 </a:solidFill>
@@ -4227,7 +4226,7 @@
               <a:t>rd</a:t>
             </a:r>
             <a:r>
-              <a:rPr lang="en-US" sz="1600" b="1" u="sng" dirty="0">
+              <a:rPr lang="en-US" sz="1400" b="1" u="sng" dirty="0">
                 <a:solidFill>
                   <a:srgbClr val="C00000"/>
                 </a:solidFill>
@@ -4235,7 +4234,7 @@
               <a:t> </a:t>
             </a:r>
             <a:r>
-              <a:rPr lang="en-US" sz="1600" b="1" u="sng" dirty="0" err="1">
+              <a:rPr lang="en-US" sz="1400" b="1" u="sng" dirty="0" err="1">
                 <a:solidFill>
                   <a:srgbClr val="C00000"/>
                 </a:solidFill>
@@ -4243,7 +4242,7 @@
               <a:t>Analyse</a:t>
             </a:r>
             <a:r>
-              <a:rPr lang="en-US" sz="1600" b="1" u="sng" dirty="0">
+              <a:rPr lang="en-US" sz="1400" b="1" u="sng" dirty="0">
                 <a:solidFill>
                   <a:srgbClr val="C00000"/>
                 </a:solidFill>
@@ -4251,7 +4250,7 @@
               <a:t> station and 4</a:t>
             </a:r>
             <a:r>
-              <a:rPr lang="en-US" sz="1600" b="1" u="sng" baseline="30000" dirty="0">
+              <a:rPr lang="en-US" sz="1400" b="1" u="sng" baseline="30000" dirty="0">
                 <a:solidFill>
                   <a:srgbClr val="C00000"/>
                 </a:solidFill>
@@ -4259,7 +4258,7 @@
               <a:t>th</a:t>
             </a:r>
             <a:r>
-              <a:rPr lang="en-US" sz="1600" b="1" u="sng" dirty="0">
+              <a:rPr lang="en-US" sz="1400" b="1" u="sng" dirty="0">
                 <a:solidFill>
                   <a:srgbClr val="C00000"/>
                 </a:solidFill>
@@ -4267,7 +4266,7 @@
               <a:t> </a:t>
             </a:r>
             <a:r>
-              <a:rPr lang="en-US" sz="1600" b="1" u="sng" dirty="0" err="1">
+              <a:rPr lang="en-US" sz="1400" b="1" u="sng" dirty="0" err="1">
                 <a:solidFill>
                   <a:srgbClr val="C00000"/>
                 </a:solidFill>
@@ -4275,7 +4274,7 @@
               <a:t>Analyse</a:t>
             </a:r>
             <a:r>
-              <a:rPr lang="en-US" sz="1600" b="1" u="sng" dirty="0">
+              <a:rPr lang="en-US" sz="1400" b="1" u="sng" dirty="0">
                 <a:solidFill>
                   <a:srgbClr val="C00000"/>
                 </a:solidFill>
@@ -4283,14 +4282,14 @@
               <a:t> Weather:</a:t>
             </a:r>
             <a:r>
-              <a:rPr lang="en-US" sz="1600" dirty="0">
+              <a:rPr lang="en-US" sz="1400" dirty="0">
                 <a:solidFill>
                   <a:schemeClr val="tx1"/>
                 </a:solidFill>
               </a:rPr>
               <a:t> join by complex ID and by hourly weather</a:t>
             </a:r>
-            <a:endParaRPr lang="fr-FR" sz="1600" dirty="0">
+            <a:endParaRPr lang="fr-FR" sz="1400" dirty="0">
               <a:solidFill>
                 <a:schemeClr val="tx1"/>
               </a:solidFill>
@@ -4312,7 +4311,7 @@
         </p:nvSpPr>
         <p:spPr>
           <a:xfrm>
-            <a:off x="3527864" y="6372755"/>
+            <a:off x="3527864" y="5675641"/>
             <a:ext cx="358789" cy="208266"/>
           </a:xfrm>
           <a:prstGeom prst="downArrow">
@@ -4358,8 +4357,8 @@
         </p:nvSpPr>
         <p:spPr>
           <a:xfrm>
-            <a:off x="1769168" y="7363660"/>
-            <a:ext cx="4055164" cy="553576"/>
+            <a:off x="1769168" y="6449269"/>
+            <a:ext cx="4055164" cy="367997"/>
           </a:xfrm>
           <a:prstGeom prst="rect">
             <a:avLst/>
@@ -4390,14 +4389,14 @@
           <a:p>
             <a:pPr algn="ctr"/>
             <a:r>
-              <a:rPr lang="en-US" dirty="0">
+              <a:rPr lang="en-US" sz="1400" dirty="0">
                 <a:solidFill>
                   <a:schemeClr val="tx1"/>
                 </a:solidFill>
               </a:rPr>
               <a:t>Results: CSV files and 4 figures</a:t>
             </a:r>
-            <a:endParaRPr lang="fr-FR" dirty="0">
+            <a:endParaRPr lang="fr-FR" sz="1400" dirty="0">
               <a:solidFill>
                 <a:schemeClr val="tx1"/>
               </a:solidFill>
@@ -4419,7 +4418,7 @@
         </p:nvSpPr>
         <p:spPr>
           <a:xfrm>
-            <a:off x="3534492" y="7148010"/>
+            <a:off x="3534492" y="6233619"/>
             <a:ext cx="358789" cy="208266"/>
           </a:xfrm>
           <a:prstGeom prst="downArrow">
@@ -4465,8 +4464,8 @@
         </p:nvSpPr>
         <p:spPr>
           <a:xfrm>
-            <a:off x="-589" y="8406945"/>
-            <a:ext cx="7562850" cy="1908215"/>
+            <a:off x="-589" y="7130408"/>
+            <a:ext cx="7562850" cy="1446550"/>
           </a:xfrm>
           <a:prstGeom prst="rect">
             <a:avLst/>
@@ -4480,419 +4479,411 @@
           <a:lstStyle/>
           <a:p>
             <a:r>
-              <a:rPr lang="fr-FR" sz="1400" b="1" dirty="0"/>
+              <a:rPr lang="fr-FR" sz="1100" b="1" dirty="0"/>
               <a:t>Download → Raw:</a:t>
             </a:r>
             <a:r>
-              <a:rPr lang="fr-FR" sz="1400" dirty="0"/>
+              <a:rPr lang="fr-FR" sz="1100" dirty="0"/>
               <a:t> </a:t>
             </a:r>
             <a:r>
-              <a:rPr lang="fr-FR" sz="1400" b="1" dirty="0"/>
+              <a:rPr lang="fr-FR" sz="1100" b="1" dirty="0"/>
               <a:t>00_download notebook: </a:t>
             </a:r>
             <a:r>
-              <a:rPr lang="fr-FR" sz="1200" dirty="0" err="1"/>
+              <a:rPr lang="fr-FR" sz="1100" dirty="0" err="1"/>
               <a:t>it</a:t>
             </a:r>
             <a:r>
-              <a:rPr lang="fr-FR" sz="1200" dirty="0"/>
+              <a:rPr lang="fr-FR" sz="1100" dirty="0"/>
               <a:t> downloads the </a:t>
             </a:r>
             <a:r>
-              <a:rPr lang="fr-FR" sz="1200" dirty="0" err="1"/>
+              <a:rPr lang="fr-FR" sz="1100" dirty="0" err="1"/>
               <a:t>ridership</a:t>
             </a:r>
             <a:r>
-              <a:rPr lang="fr-FR" sz="1200" dirty="0"/>
+              <a:rPr lang="fr-FR" sz="1100" dirty="0"/>
               <a:t> (12 files), stations (1 file) and </a:t>
             </a:r>
             <a:r>
-              <a:rPr lang="fr-FR" sz="1200" dirty="0" err="1"/>
+              <a:rPr lang="fr-FR" sz="1100" dirty="0" err="1"/>
               <a:t>weather</a:t>
             </a:r>
             <a:r>
-              <a:rPr lang="fr-FR" sz="1200" dirty="0"/>
+              <a:rPr lang="fr-FR" sz="1100" dirty="0"/>
               <a:t> (12 files) as CSV, the </a:t>
             </a:r>
             <a:r>
-              <a:rPr lang="fr-FR" sz="1200" dirty="0" err="1"/>
+              <a:rPr lang="fr-FR" sz="1100" dirty="0" err="1"/>
               <a:t>whole</a:t>
             </a:r>
             <a:r>
-              <a:rPr lang="fr-FR" sz="1200" dirty="0"/>
+              <a:rPr lang="fr-FR" sz="1100" dirty="0"/>
               <a:t> data sets are about 5.1 GB.</a:t>
             </a:r>
           </a:p>
           <a:p>
             <a:pPr lvl="0"/>
             <a:r>
-              <a:rPr lang="fr-FR" sz="1400" b="1" dirty="0" err="1"/>
+              <a:rPr lang="fr-FR" sz="1100" b="1" dirty="0" err="1"/>
               <a:t>Ingest</a:t>
             </a:r>
             <a:r>
-              <a:rPr lang="fr-FR" sz="1400" b="1" dirty="0"/>
+              <a:rPr lang="fr-FR" sz="1100" b="1" dirty="0"/>
               <a:t> → Bronze Layer:</a:t>
             </a:r>
             <a:r>
-              <a:rPr lang="fr-FR" sz="1400" dirty="0"/>
+              <a:rPr lang="fr-FR" sz="1100" dirty="0"/>
               <a:t> </a:t>
             </a:r>
             <a:r>
-              <a:rPr lang="fr-FR" sz="1400" b="1" dirty="0"/>
+              <a:rPr lang="fr-FR" sz="1100" b="1" dirty="0"/>
               <a:t>01_ingest</a:t>
             </a:r>
             <a:r>
-              <a:rPr lang="fr-FR" sz="1400" dirty="0"/>
+              <a:rPr lang="fr-FR" sz="1100" dirty="0"/>
               <a:t> </a:t>
             </a:r>
             <a:r>
-              <a:rPr lang="fr-FR" sz="1400" b="1" dirty="0"/>
+              <a:rPr lang="fr-FR" sz="1100" b="1" dirty="0"/>
               <a:t>notebook: </a:t>
             </a:r>
             <a:r>
-              <a:rPr lang="fr-FR" sz="1200" dirty="0" err="1"/>
+              <a:rPr lang="fr-FR" sz="1100" dirty="0" err="1"/>
               <a:t>it</a:t>
             </a:r>
             <a:r>
-              <a:rPr lang="fr-FR" sz="1200" dirty="0"/>
+              <a:rPr lang="fr-FR" sz="1100" dirty="0"/>
               <a:t> </a:t>
             </a:r>
             <a:r>
-              <a:rPr lang="fr-FR" sz="1200" dirty="0" err="1"/>
+              <a:rPr lang="fr-FR" sz="1100" dirty="0" err="1"/>
               <a:t>reads</a:t>
             </a:r>
             <a:r>
-              <a:rPr lang="fr-FR" sz="1200" dirty="0"/>
+              <a:rPr lang="fr-FR" sz="1100" dirty="0"/>
               <a:t> the CSV files </a:t>
             </a:r>
             <a:r>
-              <a:rPr lang="fr-FR" sz="1200" dirty="0" err="1"/>
+              <a:rPr lang="fr-FR" sz="1100" dirty="0" err="1"/>
               <a:t>with</a:t>
             </a:r>
             <a:r>
-              <a:rPr lang="fr-FR" sz="1200" dirty="0"/>
+              <a:rPr lang="fr-FR" sz="1100" dirty="0"/>
               <a:t> an explicit </a:t>
             </a:r>
             <a:r>
-              <a:rPr lang="fr-FR" sz="1200" dirty="0" err="1"/>
+              <a:rPr lang="fr-FR" sz="1100" dirty="0" err="1"/>
               <a:t>schema</a:t>
             </a:r>
             <a:r>
-              <a:rPr lang="fr-FR" sz="1200" dirty="0"/>
+              <a:rPr lang="fr-FR" sz="1100" dirty="0"/>
               <a:t> and </a:t>
             </a:r>
             <a:r>
-              <a:rPr lang="fr-FR" sz="1200" dirty="0" err="1"/>
+              <a:rPr lang="fr-FR" sz="1100" dirty="0" err="1"/>
               <a:t>saves</a:t>
             </a:r>
             <a:r>
-              <a:rPr lang="fr-FR" sz="1200" dirty="0"/>
+              <a:rPr lang="fr-FR" sz="1100" dirty="0"/>
               <a:t> </a:t>
             </a:r>
             <a:r>
-              <a:rPr lang="fr-FR" sz="1200" dirty="0" err="1"/>
+              <a:rPr lang="fr-FR" sz="1100" dirty="0" err="1"/>
               <a:t>them</a:t>
             </a:r>
             <a:r>
-              <a:rPr lang="fr-FR" sz="1200" dirty="0"/>
+              <a:rPr lang="fr-FR" sz="1100" dirty="0"/>
               <a:t> as </a:t>
             </a:r>
             <a:r>
-              <a:rPr lang="fr-FR" sz="1200" dirty="0" err="1"/>
+              <a:rPr lang="fr-FR" sz="1100" dirty="0" err="1"/>
               <a:t>typed</a:t>
             </a:r>
             <a:r>
-              <a:rPr lang="fr-FR" sz="1200" dirty="0"/>
+              <a:rPr lang="fr-FR" sz="1100" dirty="0"/>
               <a:t> Parquet.</a:t>
             </a:r>
           </a:p>
           <a:p>
             <a:pPr lvl="0"/>
             <a:r>
-              <a:rPr lang="fr-FR" sz="1400" b="1" dirty="0"/>
+              <a:rPr lang="fr-FR" sz="1100" b="1" dirty="0"/>
               <a:t>Clean → Silver Layer:</a:t>
             </a:r>
             <a:r>
-              <a:rPr lang="fr-FR" sz="1400" dirty="0"/>
+              <a:rPr lang="fr-FR" sz="1100" dirty="0"/>
               <a:t> </a:t>
             </a:r>
             <a:r>
-              <a:rPr lang="fr-FR" sz="1400" b="1" dirty="0"/>
+              <a:rPr lang="fr-FR" sz="1100" b="1" dirty="0"/>
               <a:t>02_clean notebook:</a:t>
             </a:r>
             <a:r>
-              <a:rPr lang="fr-FR" sz="1400" dirty="0"/>
+              <a:rPr lang="fr-FR" sz="1100" dirty="0"/>
               <a:t> </a:t>
             </a:r>
             <a:r>
-              <a:rPr lang="fr-FR" sz="1200" dirty="0" err="1"/>
+              <a:rPr lang="fr-FR" sz="1100" dirty="0" err="1"/>
               <a:t>it</a:t>
             </a:r>
             <a:r>
-              <a:rPr lang="fr-FR" sz="1200" dirty="0"/>
+              <a:rPr lang="fr-FR" sz="1100" dirty="0"/>
               <a:t> </a:t>
             </a:r>
             <a:r>
-              <a:rPr lang="fr-FR" sz="1200" dirty="0" err="1"/>
+              <a:rPr lang="fr-FR" sz="1100" dirty="0" err="1"/>
               <a:t>applies</a:t>
             </a:r>
             <a:r>
-              <a:rPr lang="fr-FR" sz="1200" dirty="0"/>
+              <a:rPr lang="fr-FR" sz="1100" dirty="0"/>
               <a:t> all of the 12 </a:t>
             </a:r>
             <a:r>
-              <a:rPr lang="fr-FR" sz="1200" dirty="0" err="1"/>
+              <a:rPr lang="fr-FR" sz="1100" dirty="0" err="1"/>
               <a:t>cleaning</a:t>
             </a:r>
             <a:r>
-              <a:rPr lang="fr-FR" sz="1200" dirty="0"/>
+              <a:rPr lang="fr-FR" sz="1100" dirty="0"/>
               <a:t> </a:t>
             </a:r>
             <a:r>
-              <a:rPr lang="fr-FR" sz="1200" dirty="0" err="1"/>
+              <a:rPr lang="fr-FR" sz="1100" dirty="0" err="1"/>
               <a:t>rules</a:t>
             </a:r>
             <a:r>
-              <a:rPr lang="fr-FR" sz="1200" dirty="0"/>
+              <a:rPr lang="fr-FR" sz="1100" dirty="0"/>
               <a:t> (6 for the </a:t>
             </a:r>
             <a:r>
-              <a:rPr lang="fr-FR" sz="1200" dirty="0" err="1"/>
+              <a:rPr lang="fr-FR" sz="1100" dirty="0" err="1"/>
               <a:t>riderships</a:t>
             </a:r>
             <a:r>
-              <a:rPr lang="fr-FR" sz="1200" dirty="0"/>
+              <a:rPr lang="fr-FR" sz="1100" dirty="0"/>
               <a:t> </a:t>
             </a:r>
             <a:r>
-              <a:rPr lang="fr-FR" sz="1200" dirty="0" err="1"/>
+              <a:rPr lang="fr-FR" sz="1100" dirty="0" err="1"/>
               <a:t>dataset</a:t>
             </a:r>
             <a:r>
-              <a:rPr lang="fr-FR" sz="1200" dirty="0"/>
+              <a:rPr lang="fr-FR" sz="1100" dirty="0"/>
               <a:t>, 2 for the stations </a:t>
             </a:r>
             <a:r>
-              <a:rPr lang="fr-FR" sz="1200" dirty="0" err="1"/>
+              <a:rPr lang="fr-FR" sz="1100" dirty="0" err="1"/>
               <a:t>dataset</a:t>
             </a:r>
             <a:r>
-              <a:rPr lang="fr-FR" sz="1200" dirty="0"/>
+              <a:rPr lang="fr-FR" sz="1100" dirty="0"/>
               <a:t> and 4 for the </a:t>
             </a:r>
             <a:r>
-              <a:rPr lang="fr-FR" sz="1200" dirty="0" err="1"/>
+              <a:rPr lang="fr-FR" sz="1100" dirty="0" err="1"/>
               <a:t>weather</a:t>
             </a:r>
             <a:r>
-              <a:rPr lang="fr-FR" sz="1200" dirty="0"/>
+              <a:rPr lang="fr-FR" sz="1100" dirty="0"/>
               <a:t> </a:t>
             </a:r>
             <a:r>
-              <a:rPr lang="fr-FR" sz="1200" dirty="0" err="1"/>
+              <a:rPr lang="fr-FR" sz="1100" dirty="0" err="1"/>
               <a:t>dataset</a:t>
             </a:r>
             <a:r>
-              <a:rPr lang="fr-FR" sz="1200" dirty="0"/>
+              <a:rPr lang="fr-FR" sz="1100" dirty="0"/>
               <a:t>)  and </a:t>
             </a:r>
             <a:r>
-              <a:rPr lang="fr-FR" sz="1200" dirty="0" err="1"/>
+              <a:rPr lang="fr-FR" sz="1100" dirty="0" err="1"/>
               <a:t>results</a:t>
             </a:r>
             <a:r>
-              <a:rPr lang="fr-FR" sz="1200" dirty="0"/>
+              <a:rPr lang="fr-FR" sz="1100" dirty="0"/>
               <a:t> in 3 clean tables </a:t>
             </a:r>
             <a:r>
-              <a:rPr lang="fr-FR" sz="1200" dirty="0" err="1"/>
+              <a:rPr lang="fr-FR" sz="1100" dirty="0" err="1"/>
               <a:t>ready</a:t>
             </a:r>
             <a:r>
-              <a:rPr lang="fr-FR" sz="1200" dirty="0"/>
+              <a:rPr lang="fr-FR" sz="1100" dirty="0"/>
               <a:t> to </a:t>
             </a:r>
             <a:r>
-              <a:rPr lang="fr-FR" sz="1200" dirty="0" err="1"/>
+              <a:rPr lang="fr-FR" sz="1100" dirty="0" err="1"/>
               <a:t>join</a:t>
             </a:r>
             <a:r>
-              <a:rPr lang="fr-FR" sz="1200" dirty="0"/>
+              <a:rPr lang="fr-FR" sz="1100" dirty="0"/>
               <a:t>.</a:t>
             </a:r>
           </a:p>
           <a:p>
             <a:pPr lvl="0"/>
             <a:r>
-              <a:rPr lang="fr-FR" sz="1400" b="1" dirty="0" err="1"/>
+              <a:rPr lang="fr-FR" sz="1100" b="1" dirty="0" err="1"/>
               <a:t>Analysis</a:t>
             </a:r>
             <a:r>
-              <a:rPr lang="fr-FR" sz="1400" b="1" dirty="0"/>
+              <a:rPr lang="fr-FR" sz="1100" b="1" dirty="0"/>
               <a:t> → Gold Layer:</a:t>
             </a:r>
             <a:r>
-              <a:rPr lang="fr-FR" sz="1400" dirty="0"/>
+              <a:rPr lang="fr-FR" sz="1100" dirty="0"/>
               <a:t> </a:t>
             </a:r>
             <a:r>
-              <a:rPr lang="fr-FR" sz="1400" b="1" dirty="0"/>
-              <a:t>03_analyze_stations notebook</a:t>
-            </a:r>
-            <a:r>
-              <a:rPr lang="fr-FR" sz="1200" b="1" dirty="0"/>
-              <a:t>:</a:t>
-            </a:r>
-            <a:r>
-              <a:rPr lang="fr-FR" sz="1200" dirty="0"/>
+              <a:rPr lang="fr-FR" sz="1100" b="1" dirty="0"/>
+              <a:t>03_analyze_stations notebook:</a:t>
+            </a:r>
+            <a:r>
+              <a:rPr lang="fr-FR" sz="1100" dirty="0"/>
               <a:t> </a:t>
             </a:r>
             <a:r>
-              <a:rPr lang="fr-FR" sz="1200" dirty="0" err="1"/>
+              <a:rPr lang="fr-FR" sz="1100" dirty="0" err="1"/>
               <a:t>it</a:t>
             </a:r>
             <a:r>
-              <a:rPr lang="fr-FR" sz="1200" dirty="0"/>
+              <a:rPr lang="fr-FR" sz="1100" dirty="0"/>
               <a:t>  </a:t>
             </a:r>
             <a:r>
-              <a:rPr lang="fr-FR" sz="1200" dirty="0" err="1"/>
+              <a:rPr lang="fr-FR" sz="1100" dirty="0" err="1"/>
               <a:t>computes</a:t>
             </a:r>
             <a:r>
-              <a:rPr lang="fr-FR" sz="1200" dirty="0"/>
+              <a:rPr lang="fr-FR" sz="1100" dirty="0"/>
               <a:t> the </a:t>
             </a:r>
             <a:r>
-              <a:rPr lang="fr-FR" sz="1200" dirty="0" err="1"/>
+              <a:rPr lang="fr-FR" sz="1100" dirty="0" err="1"/>
               <a:t>usual</a:t>
             </a:r>
             <a:r>
-              <a:rPr lang="fr-FR" sz="1200" dirty="0"/>
+              <a:rPr lang="fr-FR" sz="1100" dirty="0"/>
               <a:t> </a:t>
             </a:r>
             <a:r>
-              <a:rPr lang="fr-FR" sz="1200" dirty="0" err="1"/>
+              <a:rPr lang="fr-FR" sz="1100" dirty="0" err="1"/>
               <a:t>ridership</a:t>
             </a:r>
             <a:r>
-              <a:rPr lang="fr-FR" sz="1200" dirty="0"/>
+              <a:rPr lang="fr-FR" sz="1100" dirty="0"/>
               <a:t> per station and the </a:t>
             </a:r>
             <a:r>
-              <a:rPr lang="fr-FR" sz="1200" dirty="0" err="1"/>
+              <a:rPr lang="fr-FR" sz="1100" dirty="0" err="1"/>
               <a:t>busiest</a:t>
             </a:r>
             <a:r>
-              <a:rPr lang="fr-FR" sz="1200" dirty="0"/>
+              <a:rPr lang="fr-FR" sz="1100" dirty="0"/>
               <a:t> stations. </a:t>
             </a:r>
             <a:r>
-              <a:rPr lang="fr-FR" sz="1400" b="1" dirty="0"/>
-              <a:t>04_analyze_weather notebook</a:t>
-            </a:r>
-            <a:r>
-              <a:rPr lang="fr-FR" sz="1200" b="1" dirty="0"/>
-              <a:t>:</a:t>
-            </a:r>
-            <a:r>
-              <a:rPr lang="fr-FR" sz="1200" dirty="0"/>
+              <a:rPr lang="fr-FR" sz="1100" b="1" dirty="0"/>
+              <a:t>04_analyze_weather notebook:</a:t>
+            </a:r>
+            <a:r>
+              <a:rPr lang="fr-FR" sz="1100" dirty="0"/>
               <a:t> </a:t>
             </a:r>
             <a:r>
-              <a:rPr lang="fr-FR" sz="1200" dirty="0" err="1"/>
+              <a:rPr lang="fr-FR" sz="1100" dirty="0" err="1"/>
               <a:t>it</a:t>
             </a:r>
             <a:r>
-              <a:rPr lang="fr-FR" sz="1200" dirty="0"/>
+              <a:rPr lang="fr-FR" sz="1100" dirty="0"/>
               <a:t> compares </a:t>
             </a:r>
             <a:r>
-              <a:rPr lang="fr-FR" sz="1200" dirty="0" err="1"/>
+              <a:rPr lang="fr-FR" sz="1100" dirty="0" err="1"/>
               <a:t>rainy</a:t>
             </a:r>
             <a:r>
-              <a:rPr lang="fr-FR" sz="1200" dirty="0"/>
+              <a:rPr lang="fr-FR" sz="1100" dirty="0"/>
               <a:t> and </a:t>
             </a:r>
             <a:r>
-              <a:rPr lang="fr-FR" sz="1200" dirty="0" err="1"/>
+              <a:rPr lang="fr-FR" sz="1100" dirty="0" err="1"/>
               <a:t>snowy</a:t>
             </a:r>
             <a:r>
-              <a:rPr lang="fr-FR" sz="1200" dirty="0"/>
+              <a:rPr lang="fr-FR" sz="1100" dirty="0"/>
               <a:t> </a:t>
             </a:r>
             <a:r>
-              <a:rPr lang="fr-FR" sz="1200" dirty="0" err="1"/>
+              <a:rPr lang="fr-FR" sz="1100" dirty="0" err="1"/>
               <a:t>hours</a:t>
             </a:r>
             <a:r>
-              <a:rPr lang="fr-FR" sz="1200" dirty="0"/>
+              <a:rPr lang="fr-FR" sz="1100" dirty="0"/>
               <a:t> </a:t>
             </a:r>
             <a:r>
-              <a:rPr lang="fr-FR" sz="1200" dirty="0" err="1"/>
+              <a:rPr lang="fr-FR" sz="1100" dirty="0" err="1"/>
               <a:t>with</a:t>
             </a:r>
             <a:r>
-              <a:rPr lang="fr-FR" sz="1200" dirty="0"/>
+              <a:rPr lang="fr-FR" sz="1100" dirty="0"/>
               <a:t> dry </a:t>
             </a:r>
             <a:r>
-              <a:rPr lang="fr-FR" sz="1200" dirty="0" err="1"/>
+              <a:rPr lang="fr-FR" sz="1100" dirty="0" err="1"/>
               <a:t>weather</a:t>
             </a:r>
             <a:r>
-              <a:rPr lang="fr-FR" sz="1200" dirty="0"/>
+              <a:rPr lang="fr-FR" sz="1100" dirty="0"/>
               <a:t> </a:t>
             </a:r>
             <a:r>
-              <a:rPr lang="fr-FR" sz="1200" dirty="0" err="1"/>
+              <a:rPr lang="fr-FR" sz="1100" dirty="0" err="1"/>
               <a:t>hours</a:t>
             </a:r>
             <a:r>
-              <a:rPr lang="fr-FR" sz="1200" dirty="0"/>
+              <a:rPr lang="fr-FR" sz="1100" dirty="0"/>
               <a:t>.</a:t>
             </a:r>
           </a:p>
           <a:p>
             <a:pPr lvl="0"/>
             <a:r>
-              <a:rPr lang="fr-FR" sz="1200" b="1" dirty="0" err="1"/>
+              <a:rPr lang="fr-FR" sz="1100" b="1" dirty="0" err="1"/>
               <a:t>Results</a:t>
             </a:r>
             <a:r>
-              <a:rPr lang="fr-FR" sz="1200" b="1" dirty="0"/>
+              <a:rPr lang="fr-FR" sz="1100" b="1" dirty="0"/>
               <a:t>:</a:t>
             </a:r>
             <a:r>
-              <a:rPr lang="fr-FR" sz="1200" dirty="0"/>
+              <a:rPr lang="fr-FR" sz="1100" dirty="0"/>
               <a:t> </a:t>
             </a:r>
             <a:r>
-              <a:rPr lang="fr-FR" sz="1200" dirty="0" err="1"/>
+              <a:rPr lang="fr-FR" sz="1100" dirty="0" err="1"/>
               <a:t>we</a:t>
             </a:r>
             <a:r>
-              <a:rPr lang="fr-FR" sz="1200" dirty="0"/>
+              <a:rPr lang="fr-FR" sz="1100" dirty="0"/>
               <a:t> end up </a:t>
             </a:r>
             <a:r>
-              <a:rPr lang="fr-FR" sz="1200" dirty="0" err="1"/>
+              <a:rPr lang="fr-FR" sz="1100" dirty="0" err="1"/>
               <a:t>with</a:t>
             </a:r>
             <a:r>
-              <a:rPr lang="fr-FR" sz="1200" dirty="0"/>
+              <a:rPr lang="fr-FR" sz="1100" dirty="0"/>
               <a:t> CSV tables and </a:t>
             </a:r>
             <a:r>
-              <a:rPr lang="fr-FR" sz="1200" dirty="0" err="1"/>
+              <a:rPr lang="fr-FR" sz="1100" dirty="0" err="1"/>
               <a:t>also</a:t>
             </a:r>
             <a:r>
-              <a:rPr lang="fr-FR" sz="1200" dirty="0"/>
+              <a:rPr lang="fr-FR" sz="1100" dirty="0"/>
               <a:t> 4 figures.</a:t>
             </a:r>
           </a:p>
@@ -4912,7 +4903,7 @@
         </p:nvSpPr>
         <p:spPr>
           <a:xfrm>
-            <a:off x="19288" y="8126928"/>
+            <a:off x="19288" y="6850391"/>
             <a:ext cx="7508019" cy="307777"/>
           </a:xfrm>
           <a:prstGeom prst="rect">
@@ -4930,6 +4921,256 @@
               <a:rPr lang="en-US" sz="1400" b="1" dirty="0"/>
               <a:t>B.   A description of the analysis process from raw data to results: </a:t>
             </a:r>
+          </a:p>
+        </p:txBody>
+      </p:sp>
+      <p:sp>
+        <p:nvSpPr>
+          <p:cNvPr id="6" name="Text 10">
+            <a:extLst>
+              <a:ext uri="{FF2B5EF4-FFF2-40B4-BE49-F238E27FC236}">
+                <a16:creationId xmlns:a16="http://schemas.microsoft.com/office/drawing/2014/main" id="{A55A23D3-BC19-54E3-F81E-1AC8FBB884B4}"/>
+              </a:ext>
+            </a:extLst>
+          </p:cNvPr>
+          <p:cNvSpPr txBox="1"/>
+          <p:nvPr/>
+        </p:nvSpPr>
+        <p:spPr>
+          <a:xfrm>
+            <a:off x="106241" y="8548715"/>
+            <a:ext cx="7456019" cy="312555"/>
+          </a:xfrm>
+          <a:prstGeom prst="rect">
+            <a:avLst/>
+          </a:prstGeom>
+          <a:noFill/>
+          <a:ln/>
+        </p:spPr>
+        <p:txBody>
+          <a:bodyPr wrap="square" lIns="0" tIns="0" rIns="0" bIns="0" rtlCol="0" anchor="ctr"/>
+          <a:lstStyle/>
+          <a:p>
+            <a:pPr marL="12700"/>
+            <a:r>
+              <a:rPr lang="en-US" sz="1600" b="1" u="sng" dirty="0">
+                <a:solidFill>
+                  <a:schemeClr val="tx1"/>
+                </a:solidFill>
+              </a:rPr>
+              <a:t>4/ </a:t>
+            </a:r>
+            <a:r>
+              <a:rPr lang="en-US" sz="1600" b="1" u="sng" dirty="0">
+                <a:latin typeface="Arial MT"/>
+                <a:cs typeface="Arial MT"/>
+              </a:rPr>
+              <a:t>Data</a:t>
+            </a:r>
+            <a:r>
+              <a:rPr lang="en-US" sz="1600" b="1" u="sng" spc="-45" dirty="0">
+                <a:latin typeface="Arial MT"/>
+                <a:cs typeface="Arial MT"/>
+              </a:rPr>
+              <a:t> </a:t>
+            </a:r>
+            <a:r>
+              <a:rPr lang="en-US" sz="1600" b="1" u="sng" spc="-10" dirty="0">
+                <a:latin typeface="Arial MT"/>
+                <a:cs typeface="Arial MT"/>
+              </a:rPr>
+              <a:t>cleaning.</a:t>
+            </a:r>
+            <a:r>
+              <a:rPr lang="en-US" sz="1600" b="1" u="sng" spc="-30" dirty="0">
+                <a:latin typeface="Arial MT"/>
+                <a:cs typeface="Arial MT"/>
+              </a:rPr>
+              <a:t> </a:t>
+            </a:r>
+            <a:r>
+              <a:rPr lang="en-US" sz="1600" b="1" u="sng" dirty="0">
+                <a:latin typeface="Arial MT"/>
+                <a:cs typeface="Arial MT"/>
+              </a:rPr>
+              <a:t>what</a:t>
+            </a:r>
+            <a:r>
+              <a:rPr lang="en-US" sz="1600" b="1" u="sng" spc="-35" dirty="0">
+                <a:latin typeface="Arial MT"/>
+                <a:cs typeface="Arial MT"/>
+              </a:rPr>
+              <a:t> we</a:t>
+            </a:r>
+            <a:r>
+              <a:rPr lang="en-US" sz="1600" b="1" u="sng" spc="-30" dirty="0">
+                <a:latin typeface="Arial MT"/>
+                <a:cs typeface="Arial MT"/>
+              </a:rPr>
+              <a:t> </a:t>
+            </a:r>
+            <a:r>
+              <a:rPr lang="en-US" sz="1600" b="1" u="sng" dirty="0">
+                <a:latin typeface="Arial MT"/>
+                <a:cs typeface="Arial MT"/>
+              </a:rPr>
+              <a:t>found,</a:t>
+            </a:r>
+            <a:r>
+              <a:rPr lang="en-US" sz="1600" b="1" u="sng" spc="-30" dirty="0">
+                <a:latin typeface="Arial MT"/>
+                <a:cs typeface="Arial MT"/>
+              </a:rPr>
+              <a:t> </a:t>
+            </a:r>
+            <a:r>
+              <a:rPr lang="en-US" sz="1600" b="1" u="sng" dirty="0">
+                <a:latin typeface="Arial MT"/>
+                <a:cs typeface="Arial MT"/>
+              </a:rPr>
+              <a:t>what</a:t>
+            </a:r>
+            <a:r>
+              <a:rPr lang="en-US" sz="1600" b="1" u="sng" spc="-35" dirty="0">
+                <a:latin typeface="Arial MT"/>
+                <a:cs typeface="Arial MT"/>
+              </a:rPr>
+              <a:t> we</a:t>
+            </a:r>
+            <a:r>
+              <a:rPr lang="en-US" sz="1600" b="1" u="sng" spc="-30" dirty="0">
+                <a:latin typeface="Arial MT"/>
+                <a:cs typeface="Arial MT"/>
+              </a:rPr>
+              <a:t> </a:t>
+            </a:r>
+            <a:r>
+              <a:rPr lang="en-US" sz="1600" b="1" u="sng" dirty="0">
+                <a:latin typeface="Arial MT"/>
+                <a:cs typeface="Arial MT"/>
+              </a:rPr>
+              <a:t>did,</a:t>
+            </a:r>
+            <a:r>
+              <a:rPr lang="en-US" sz="1600" b="1" u="sng" spc="-35" dirty="0">
+                <a:latin typeface="Arial MT"/>
+                <a:cs typeface="Arial MT"/>
+              </a:rPr>
+              <a:t> </a:t>
+            </a:r>
+            <a:r>
+              <a:rPr lang="en-US" sz="1600" b="1" u="sng" dirty="0">
+                <a:latin typeface="Arial MT"/>
+                <a:cs typeface="Arial MT"/>
+              </a:rPr>
+              <a:t>row</a:t>
+            </a:r>
+            <a:r>
+              <a:rPr lang="en-US" sz="1600" b="1" u="sng" spc="-30" dirty="0">
+                <a:latin typeface="Arial MT"/>
+                <a:cs typeface="Arial MT"/>
+              </a:rPr>
+              <a:t> </a:t>
+            </a:r>
+            <a:r>
+              <a:rPr lang="en-US" sz="1600" b="1" u="sng" dirty="0">
+                <a:latin typeface="Arial MT"/>
+                <a:cs typeface="Arial MT"/>
+              </a:rPr>
+              <a:t>counts</a:t>
+            </a:r>
+            <a:r>
+              <a:rPr lang="en-US" sz="1600" b="1" u="sng" spc="-30" dirty="0">
+                <a:latin typeface="Arial MT"/>
+                <a:cs typeface="Arial MT"/>
+              </a:rPr>
+              <a:t> </a:t>
+            </a:r>
+            <a:r>
+              <a:rPr lang="en-US" sz="1600" b="1" u="sng" spc="-10" dirty="0">
+                <a:latin typeface="Arial MT"/>
+                <a:cs typeface="Arial MT"/>
+              </a:rPr>
+              <a:t>before/after</a:t>
+            </a:r>
+            <a:endParaRPr lang="en-US" sz="1600" b="1" u="sng" dirty="0">
+              <a:latin typeface="Arial MT"/>
+              <a:cs typeface="Arial MT"/>
+            </a:endParaRPr>
+          </a:p>
+        </p:txBody>
+      </p:sp>
+      <p:sp>
+        <p:nvSpPr>
+          <p:cNvPr id="9" name="ZoneTexte 8">
+            <a:extLst>
+              <a:ext uri="{FF2B5EF4-FFF2-40B4-BE49-F238E27FC236}">
+                <a16:creationId xmlns:a16="http://schemas.microsoft.com/office/drawing/2014/main" id="{DBFDF1C6-9301-F085-6116-9FC563952143}"/>
+              </a:ext>
+            </a:extLst>
+          </p:cNvPr>
+          <p:cNvSpPr txBox="1"/>
+          <p:nvPr/>
+        </p:nvSpPr>
+        <p:spPr>
+          <a:xfrm>
+            <a:off x="-589" y="8839569"/>
+            <a:ext cx="7562850" cy="1831271"/>
+          </a:xfrm>
+          <a:prstGeom prst="rect">
+            <a:avLst/>
+          </a:prstGeom>
+          <a:noFill/>
+        </p:spPr>
+        <p:txBody>
+          <a:bodyPr wrap="square" rtlCol="0">
+            <a:spAutoFit/>
+          </a:bodyPr>
+          <a:lstStyle/>
+          <a:p>
+            <a:r>
+              <a:rPr lang="en-US" sz="1400" b="1" dirty="0"/>
+              <a:t>A.  Data Cleaning and what we have found: </a:t>
+            </a:r>
+          </a:p>
+          <a:p>
+            <a:pPr marL="171450" indent="-171450">
+              <a:buFont typeface="Arial" panose="020B0604020202020204" pitchFamily="34" charset="0"/>
+              <a:buChar char="•"/>
+            </a:pPr>
+            <a:r>
+              <a:rPr lang="en-US" sz="1100" dirty="0"/>
+              <a:t>The ridership dataset contains also tramway and railway stations data which we will not need. Also, The Station Complex ID is considered as a string but it is an integer in stations dataset. In addition, We found 1250 rows of data for an hour that doesn’t exist because of the switch to the summer hour on the 9</a:t>
+            </a:r>
+            <a:r>
+              <a:rPr lang="en-US" sz="1100" baseline="30000" dirty="0"/>
+              <a:t>th</a:t>
+            </a:r>
+            <a:r>
+              <a:rPr lang="en-US" sz="1100" dirty="0"/>
+              <a:t> of march 2025 at 2:00. Finally, we found that MTA writes multiple rows for the same station at the same hour.</a:t>
+            </a:r>
+          </a:p>
+          <a:p>
+            <a:pPr marL="171450" indent="-171450">
+              <a:buFont typeface="Arial" panose="020B0604020202020204" pitchFamily="34" charset="0"/>
+              <a:buChar char="•"/>
+            </a:pPr>
+            <a:r>
+              <a:rPr lang="en-US" sz="1100" dirty="0"/>
+              <a:t>In the Stations dataset, we found that the boroughs are written by codes (M, BK etc..) which doesn’t correlate with the ridership datasets because it has full names for the boroughs. Also, we found several rows per station complex</a:t>
+            </a:r>
+          </a:p>
+          <a:p>
+            <a:pPr marL="171450" indent="-171450">
+              <a:buFont typeface="Arial" panose="020B0604020202020204" pitchFamily="34" charset="0"/>
+              <a:buChar char="•"/>
+            </a:pPr>
+            <a:r>
+              <a:rPr lang="en-US" sz="1100" dirty="0"/>
+              <a:t>In the Weather dataset we have extra reports about the weather. There were also lines with very negligible rain value &lt;0.1 mm due to the weather measurement errors noted as “T”.  In addition, we found that we have 317 hours without any rain value  Finally, the time in this datasets does not change accordingly because usually New York time moves by 1 hour in summer time.</a:t>
+            </a:r>
+            <a:endParaRPr lang="en-US" sz="1100" b="1" dirty="0"/>
           </a:p>
         </p:txBody>
       </p:sp>
@@ -4965,182 +5206,6 @@
       </p:grpSpPr>
       <p:sp>
         <p:nvSpPr>
-          <p:cNvPr id="8" name="Text 10">
-            <a:extLst>
-              <a:ext uri="{FF2B5EF4-FFF2-40B4-BE49-F238E27FC236}">
-                <a16:creationId xmlns:a16="http://schemas.microsoft.com/office/drawing/2014/main" id="{7EEC807B-6DE5-DB41-C9B6-8249C0009947}"/>
-              </a:ext>
-            </a:extLst>
-          </p:cNvPr>
-          <p:cNvSpPr txBox="1"/>
-          <p:nvPr/>
-        </p:nvSpPr>
-        <p:spPr>
-          <a:xfrm>
-            <a:off x="106241" y="49493"/>
-            <a:ext cx="7456019" cy="401082"/>
-          </a:xfrm>
-          <a:prstGeom prst="rect">
-            <a:avLst/>
-          </a:prstGeom>
-          <a:noFill/>
-          <a:ln/>
-        </p:spPr>
-        <p:txBody>
-          <a:bodyPr wrap="square" lIns="0" tIns="0" rIns="0" bIns="0" rtlCol="0" anchor="ctr"/>
-          <a:lstStyle/>
-          <a:p>
-            <a:pPr marL="12700"/>
-            <a:r>
-              <a:rPr lang="en-US" sz="1600" b="1" u="sng" dirty="0">
-                <a:solidFill>
-                  <a:schemeClr val="tx1"/>
-                </a:solidFill>
-              </a:rPr>
-              <a:t>4/ </a:t>
-            </a:r>
-            <a:r>
-              <a:rPr lang="en-US" sz="1600" b="1" u="sng" dirty="0">
-                <a:latin typeface="Arial MT"/>
-                <a:cs typeface="Arial MT"/>
-              </a:rPr>
-              <a:t>Data</a:t>
-            </a:r>
-            <a:r>
-              <a:rPr lang="en-US" sz="1600" b="1" u="sng" spc="-45" dirty="0">
-                <a:latin typeface="Arial MT"/>
-                <a:cs typeface="Arial MT"/>
-              </a:rPr>
-              <a:t> </a:t>
-            </a:r>
-            <a:r>
-              <a:rPr lang="en-US" sz="1600" b="1" u="sng" spc="-10" dirty="0">
-                <a:latin typeface="Arial MT"/>
-                <a:cs typeface="Arial MT"/>
-              </a:rPr>
-              <a:t>cleaning.</a:t>
-            </a:r>
-            <a:r>
-              <a:rPr lang="en-US" sz="1600" b="1" u="sng" spc="-30" dirty="0">
-                <a:latin typeface="Arial MT"/>
-                <a:cs typeface="Arial MT"/>
-              </a:rPr>
-              <a:t> </a:t>
-            </a:r>
-            <a:r>
-              <a:rPr lang="en-US" sz="1600" b="1" u="sng" dirty="0">
-                <a:latin typeface="Arial MT"/>
-                <a:cs typeface="Arial MT"/>
-              </a:rPr>
-              <a:t>what</a:t>
-            </a:r>
-            <a:r>
-              <a:rPr lang="en-US" sz="1600" b="1" u="sng" spc="-35" dirty="0">
-                <a:latin typeface="Arial MT"/>
-                <a:cs typeface="Arial MT"/>
-              </a:rPr>
-              <a:t> we</a:t>
-            </a:r>
-            <a:r>
-              <a:rPr lang="en-US" sz="1600" b="1" u="sng" spc="-30" dirty="0">
-                <a:latin typeface="Arial MT"/>
-                <a:cs typeface="Arial MT"/>
-              </a:rPr>
-              <a:t> </a:t>
-            </a:r>
-            <a:r>
-              <a:rPr lang="en-US" sz="1600" b="1" u="sng" dirty="0">
-                <a:latin typeface="Arial MT"/>
-                <a:cs typeface="Arial MT"/>
-              </a:rPr>
-              <a:t>found,</a:t>
-            </a:r>
-            <a:r>
-              <a:rPr lang="en-US" sz="1600" b="1" u="sng" spc="-30" dirty="0">
-                <a:latin typeface="Arial MT"/>
-                <a:cs typeface="Arial MT"/>
-              </a:rPr>
-              <a:t> </a:t>
-            </a:r>
-            <a:r>
-              <a:rPr lang="en-US" sz="1600" b="1" u="sng" dirty="0">
-                <a:latin typeface="Arial MT"/>
-                <a:cs typeface="Arial MT"/>
-              </a:rPr>
-              <a:t>what</a:t>
-            </a:r>
-            <a:r>
-              <a:rPr lang="en-US" sz="1600" b="1" u="sng" spc="-35" dirty="0">
-                <a:latin typeface="Arial MT"/>
-                <a:cs typeface="Arial MT"/>
-              </a:rPr>
-              <a:t> we</a:t>
-            </a:r>
-            <a:r>
-              <a:rPr lang="en-US" sz="1600" b="1" u="sng" spc="-30" dirty="0">
-                <a:latin typeface="Arial MT"/>
-                <a:cs typeface="Arial MT"/>
-              </a:rPr>
-              <a:t> </a:t>
-            </a:r>
-            <a:r>
-              <a:rPr lang="en-US" sz="1600" b="1" u="sng" dirty="0">
-                <a:latin typeface="Arial MT"/>
-                <a:cs typeface="Arial MT"/>
-              </a:rPr>
-              <a:t>did,</a:t>
-            </a:r>
-            <a:r>
-              <a:rPr lang="en-US" sz="1600" b="1" u="sng" spc="-35" dirty="0">
-                <a:latin typeface="Arial MT"/>
-                <a:cs typeface="Arial MT"/>
-              </a:rPr>
-              <a:t> </a:t>
-            </a:r>
-            <a:r>
-              <a:rPr lang="en-US" sz="1600" b="1" u="sng" dirty="0">
-                <a:latin typeface="Arial MT"/>
-                <a:cs typeface="Arial MT"/>
-              </a:rPr>
-              <a:t>row</a:t>
-            </a:r>
-            <a:r>
-              <a:rPr lang="en-US" sz="1600" b="1" u="sng" spc="-30" dirty="0">
-                <a:latin typeface="Arial MT"/>
-                <a:cs typeface="Arial MT"/>
-              </a:rPr>
-              <a:t> </a:t>
-            </a:r>
-            <a:r>
-              <a:rPr lang="en-US" sz="1600" b="1" u="sng" dirty="0">
-                <a:latin typeface="Arial MT"/>
-                <a:cs typeface="Arial MT"/>
-              </a:rPr>
-              <a:t>counts</a:t>
-            </a:r>
-            <a:r>
-              <a:rPr lang="en-US" sz="1600" b="1" u="sng" spc="-30" dirty="0">
-                <a:latin typeface="Arial MT"/>
-                <a:cs typeface="Arial MT"/>
-              </a:rPr>
-              <a:t> </a:t>
-            </a:r>
-            <a:r>
-              <a:rPr lang="en-US" sz="1600" b="1" u="sng" spc="-10" dirty="0">
-                <a:latin typeface="Arial MT"/>
-                <a:cs typeface="Arial MT"/>
-              </a:rPr>
-              <a:t>before/after</a:t>
-            </a:r>
-            <a:endParaRPr lang="en-US" sz="1600" b="1" u="sng" dirty="0">
-              <a:latin typeface="Arial MT"/>
-              <a:cs typeface="Arial MT"/>
-            </a:endParaRPr>
-          </a:p>
-        </p:txBody>
-      </p:sp>
-      <p:sp>
-        <p:nvSpPr>
           <p:cNvPr id="10" name="ZoneTexte 9">
             <a:extLst>
               <a:ext uri="{FF2B5EF4-FFF2-40B4-BE49-F238E27FC236}">
@@ -5153,8 +5218,8 @@
         </p:nvSpPr>
         <p:spPr>
           <a:xfrm>
-            <a:off x="-589" y="419820"/>
-            <a:ext cx="7562850" cy="4247317"/>
+            <a:off x="-589" y="66748"/>
+            <a:ext cx="7562850" cy="1708160"/>
           </a:xfrm>
           <a:prstGeom prst="rect">
             <a:avLst/>
@@ -5167,102 +5232,48 @@
           </a:bodyPr>
           <a:lstStyle/>
           <a:p>
-            <a:pPr marL="228600" indent="-228600">
-              <a:buFont typeface="+mj-lt"/>
-              <a:buAutoNum type="alphaUcPeriod"/>
+            <a:pPr marL="342900" indent="-342900">
+              <a:buAutoNum type="alphaUcPeriod" startAt="2"/>
             </a:pPr>
             <a:r>
               <a:rPr lang="en-US" sz="1400" b="1" dirty="0"/>
-              <a:t>Data Cleaning and what we have found: </a:t>
+              <a:t>How did we proceed (what we did about the findings in data):</a:t>
             </a:r>
           </a:p>
           <a:p>
-            <a:pPr marL="742950" lvl="1" indent="-285750">
+            <a:pPr marL="171450" indent="-171450">
               <a:buFont typeface="Arial" panose="020B0604020202020204" pitchFamily="34" charset="0"/>
               <a:buChar char="•"/>
             </a:pPr>
             <a:r>
-              <a:rPr lang="en-US" sz="1200" dirty="0"/>
-              <a:t>The ridership dataset contains also tramway and railway stations data which we will not need. Also, The Station Complex ID is considered as a string but it is an integer in stations dataset. In addition, We found 1250 rows of data for an hour that doesn’t exist because of the switch to the summer hour on the 9</a:t>
-            </a:r>
-            <a:r>
-              <a:rPr lang="en-US" sz="1200" baseline="30000" dirty="0"/>
-              <a:t>th</a:t>
-            </a:r>
-            <a:r>
-              <a:rPr lang="en-US" sz="1200" dirty="0"/>
-              <a:t> of march 2025 at 2:00. Finally, we found that MTA writes multiple rows for the same station at the same hour.</a:t>
+              <a:rPr lang="en-US" sz="1100" dirty="0"/>
+              <a:t>For the ridership dataset: We removed Tramway and Railway rows, we converted the complex ID to a number, we removed those 1250 rows for the hour that doesn’t exist and finally we added up in order to obtain one row per station complex and hour. </a:t>
             </a:r>
           </a:p>
           <a:p>
-            <a:pPr marL="742950" lvl="1" indent="-285750">
+            <a:pPr marL="171450" indent="-171450">
               <a:buFont typeface="Arial" panose="020B0604020202020204" pitchFamily="34" charset="0"/>
               <a:buChar char="•"/>
             </a:pPr>
             <a:r>
-              <a:rPr lang="en-US" sz="1200" dirty="0"/>
-              <a:t>In the Stations dataset, we found that the boroughs are written by codes (M, BK etc..) which doesn’t correlate with the ridership datasets because it has full names for the boroughs. Also, we found several rows per station complex</a:t>
+              <a:rPr lang="en-US" sz="1100" dirty="0"/>
+              <a:t>For the stations dataset: we replaced boroughs codes with full corresponding names and we grouped into one row per station complex instead of many rows.</a:t>
             </a:r>
           </a:p>
           <a:p>
-            <a:pPr marL="742950" lvl="1" indent="-285750">
+            <a:pPr marL="171450" indent="-171450">
               <a:buFont typeface="Arial" panose="020B0604020202020204" pitchFamily="34" charset="0"/>
               <a:buChar char="•"/>
             </a:pPr>
             <a:r>
-              <a:rPr lang="en-US" sz="1200" dirty="0"/>
-              <a:t>In the Weather dataset we have extra reports about the weather. There were also lines with very negligible rain value &lt;0.1 mm due to the weather measurement errors noted as “T”.  In addition to that we found that we have 317 hours without any rain value  Finally, the time in this datasets does not change accordingly because usually New York time moves by 1 hour in the summer time.</a:t>
-            </a:r>
-            <a:endParaRPr lang="en-US" sz="1200" b="1" dirty="0"/>
+              <a:rPr lang="en-US" sz="1100" dirty="0"/>
+              <a:t>For the weather dataset: we kept only the hourly weather reports and dropped others. We moved ahead with 1 hour for the summer time. We replaced the trace of rain T with 0. We also have merged to  obtain one row per hour. </a:t>
+            </a:r>
           </a:p>
           <a:p>
-            <a:pPr marL="228600" indent="-228600">
-              <a:buFont typeface="+mj-lt"/>
-              <a:buAutoNum type="alphaUcPeriod"/>
-            </a:pPr>
             <a:r>
               <a:rPr lang="en-US" sz="1400" b="1" dirty="0"/>
-              <a:t>How did we proceed (what we did about the findings in data):</a:t>
-            </a:r>
-          </a:p>
-          <a:p>
-            <a:pPr marL="742950" lvl="1" indent="-285750">
-              <a:buFont typeface="Arial" panose="020B0604020202020204" pitchFamily="34" charset="0"/>
-              <a:buChar char="•"/>
-            </a:pPr>
-            <a:r>
-              <a:rPr lang="en-US" sz="1200" dirty="0"/>
-              <a:t>For the ridership dataset: We removed Tramway and Railway rows, we converted the complex ID to a number, we removed those 1250 rows for the hour that doesn’t exist and finally we added up in order to obtain one row per station complex and hour. </a:t>
-            </a:r>
-          </a:p>
-          <a:p>
-            <a:pPr marL="742950" lvl="1" indent="-285750">
-              <a:buFont typeface="Arial" panose="020B0604020202020204" pitchFamily="34" charset="0"/>
-              <a:buChar char="•"/>
-            </a:pPr>
-            <a:r>
-              <a:rPr lang="en-US" sz="1200" dirty="0"/>
-              <a:t>For the stations dataset: we replaced boroughs codes with full corresponding names and we grouped into one row per station complex instead of many rows.</a:t>
-            </a:r>
-          </a:p>
-          <a:p>
-            <a:pPr marL="742950" lvl="1" indent="-285750">
-              <a:buFont typeface="Arial" panose="020B0604020202020204" pitchFamily="34" charset="0"/>
-              <a:buChar char="•"/>
-            </a:pPr>
-            <a:r>
-              <a:rPr lang="en-US" sz="1200" dirty="0"/>
-              <a:t>For the weather dataset: we kept only the hourly weather reports and dropped others. We moved ahead with 1 hour for the summer time. We replaced the trace of rain T with 0. We also have merged to  obtain one row per hour. </a:t>
-            </a:r>
-          </a:p>
-          <a:p>
-            <a:pPr marL="228600" indent="-228600">
-              <a:buFont typeface="+mj-lt"/>
-              <a:buAutoNum type="alphaUcPeriod"/>
-            </a:pPr>
-            <a:r>
-              <a:rPr lang="en-US" sz="1400" b="1" dirty="0"/>
-              <a:t>The row counts before/after:</a:t>
+              <a:t>C.  The row counts before/after:</a:t>
             </a:r>
           </a:p>
         </p:txBody>
@@ -5282,14 +5293,14 @@
           <p:nvPr>
             <p:extLst>
               <p:ext uri="{D42A27DB-BD31-4B8C-83A1-F6EECF244321}">
-                <p14:modId xmlns:p14="http://schemas.microsoft.com/office/powerpoint/2010/main" val="1127860743"/>
+                <p14:modId xmlns:p14="http://schemas.microsoft.com/office/powerpoint/2010/main" val="2550644882"/>
               </p:ext>
             </p:extLst>
           </p:nvPr>
         </p:nvGraphicFramePr>
         <p:xfrm>
-          <a:off x="163510" y="4667137"/>
-          <a:ext cx="7341480" cy="2957774"/>
+          <a:off x="163510" y="1738269"/>
+          <a:ext cx="7341480" cy="2011696"/>
         </p:xfrm>
         <a:graphic>
           <a:graphicData uri="http://schemas.openxmlformats.org/drawingml/2006/table">
@@ -5325,7 +5336,7 @@
                   </a:extLst>
                 </a:gridCol>
               </a:tblGrid>
-              <a:tr h="421657">
+              <a:tr h="249571">
                 <a:tc>
                   <a:txBody>
                     <a:bodyPr/>
@@ -5335,7 +5346,7 @@
                         <a:buNone/>
                       </a:pPr>
                       <a:r>
-                        <a:rPr lang="fr-FR" sz="1600" b="1" i="0" u="none" strike="noStrike" dirty="0">
+                        <a:rPr lang="fr-FR" sz="1400" b="1" i="0" u="none" strike="noStrike" dirty="0">
                           <a:solidFill>
                             <a:schemeClr val="bg1"/>
                           </a:solidFill>
@@ -5397,7 +5408,7 @@
                         <a:buNone/>
                       </a:pPr>
                       <a:r>
-                        <a:rPr lang="fr-FR" sz="1600" b="1" i="0" u="none" strike="noStrike" dirty="0" err="1">
+                        <a:rPr lang="fr-FR" sz="1400" b="1" i="0" u="none" strike="noStrike" dirty="0" err="1">
                           <a:solidFill>
                             <a:schemeClr val="bg1"/>
                           </a:solidFill>
@@ -5406,7 +5417,7 @@
                         </a:rPr>
                         <a:t>Step</a:t>
                       </a:r>
-                      <a:endParaRPr lang="fr-FR" sz="1600" b="1" i="0" u="none" strike="noStrike" dirty="0">
+                      <a:endParaRPr lang="fr-FR" sz="1400" b="1" i="0" u="none" strike="noStrike" dirty="0">
                         <a:solidFill>
                           <a:schemeClr val="bg1"/>
                         </a:solidFill>
@@ -5466,7 +5477,7 @@
                         <a:buNone/>
                       </a:pPr>
                       <a:r>
-                        <a:rPr lang="fr-FR" sz="1600" b="1" i="0" u="none" strike="noStrike" dirty="0" err="1">
+                        <a:rPr lang="fr-FR" sz="1400" b="1" i="0" u="none" strike="noStrike" dirty="0" err="1">
                           <a:solidFill>
                             <a:schemeClr val="bg1"/>
                           </a:solidFill>
@@ -5475,7 +5486,7 @@
                         </a:rPr>
                         <a:t>Rows_Before</a:t>
                       </a:r>
-                      <a:endParaRPr lang="fr-FR" sz="1600" b="1" i="0" u="none" strike="noStrike" dirty="0">
+                      <a:endParaRPr lang="fr-FR" sz="1400" b="1" i="0" u="none" strike="noStrike" dirty="0">
                         <a:solidFill>
                           <a:schemeClr val="bg1"/>
                         </a:solidFill>
@@ -5535,7 +5546,7 @@
                         <a:buNone/>
                       </a:pPr>
                       <a:r>
-                        <a:rPr lang="fr-FR" sz="1600" b="1" i="0" u="none" strike="noStrike" dirty="0" err="1">
+                        <a:rPr lang="fr-FR" sz="1400" b="1" i="0" u="none" strike="noStrike" dirty="0" err="1">
                           <a:solidFill>
                             <a:schemeClr val="bg1"/>
                           </a:solidFill>
@@ -5545,7 +5556,7 @@
                         <a:t>Rows</a:t>
                       </a:r>
                       <a:r>
-                        <a:rPr lang="fr-FR" sz="1600" b="1" i="0" u="none" strike="noStrike" dirty="0">
+                        <a:rPr lang="fr-FR" sz="1400" b="1" i="0" u="none" strike="noStrike" dirty="0">
                           <a:solidFill>
                             <a:schemeClr val="bg1"/>
                           </a:solidFill>
@@ -5604,7 +5615,7 @@
                   </a:ext>
                 </a:extLst>
               </a:tr>
-              <a:tr h="273914">
+              <a:tr h="168712">
                 <a:tc>
                   <a:txBody>
                     <a:bodyPr/>
@@ -5923,7 +5934,7 @@
                   </a:ext>
                 </a:extLst>
               </a:tr>
-              <a:tr h="273914">
+              <a:tr h="168712">
                 <a:tc>
                   <a:txBody>
                     <a:bodyPr/>
@@ -6225,7 +6236,7 @@
                   </a:ext>
                 </a:extLst>
               </a:tr>
-              <a:tr h="273914">
+              <a:tr h="168712">
                 <a:tc>
                   <a:txBody>
                     <a:bodyPr/>
@@ -6524,7 +6535,7 @@
                   </a:ext>
                 </a:extLst>
               </a:tr>
-              <a:tr h="286887">
+              <a:tr h="328354">
                 <a:tc>
                   <a:txBody>
                     <a:bodyPr/>
@@ -6866,7 +6877,7 @@
                   </a:ext>
                 </a:extLst>
               </a:tr>
-              <a:tr h="273914">
+              <a:tr h="168712">
                 <a:tc>
                   <a:txBody>
                     <a:bodyPr/>
@@ -7159,7 +7170,7 @@
                   </a:ext>
                 </a:extLst>
               </a:tr>
-              <a:tr h="273914">
+              <a:tr h="168712">
                 <a:tc>
                   <a:txBody>
                     <a:bodyPr/>
@@ -7486,7 +7497,7 @@
                   </a:ext>
                 </a:extLst>
               </a:tr>
-              <a:tr h="273914">
+              <a:tr h="168712">
                 <a:tc>
                   <a:txBody>
                     <a:bodyPr/>
@@ -7778,7 +7789,7 @@
                   </a:ext>
                 </a:extLst>
               </a:tr>
-              <a:tr h="273914">
+              <a:tr h="168712">
                 <a:tc>
                   <a:txBody>
                     <a:bodyPr/>
@@ -8073,7 +8084,7 @@
                   </a:ext>
                 </a:extLst>
               </a:tr>
-              <a:tr h="273914">
+              <a:tr h="168712">
                 <a:tc>
                   <a:txBody>
                     <a:bodyPr/>
@@ -8383,8 +8394,8 @@
         </p:nvSpPr>
         <p:spPr>
           <a:xfrm>
-            <a:off x="98843" y="7683991"/>
-            <a:ext cx="6647688" cy="413852"/>
+            <a:off x="98843" y="3834918"/>
+            <a:ext cx="6647688" cy="241533"/>
           </a:xfrm>
           <a:prstGeom prst="rect">
             <a:avLst/>
@@ -8434,7 +8445,7 @@
         </p:nvSpPr>
         <p:spPr>
           <a:xfrm>
-            <a:off x="85216" y="8046434"/>
+            <a:off x="85216" y="4073043"/>
             <a:ext cx="7425657" cy="307777"/>
           </a:xfrm>
           <a:prstGeom prst="rect">
@@ -8473,8 +8484,8 @@
         </p:nvSpPr>
         <p:spPr>
           <a:xfrm>
-            <a:off x="85307" y="8341957"/>
-            <a:ext cx="7442806" cy="492443"/>
+            <a:off x="-13020" y="4368566"/>
+            <a:ext cx="7541133" cy="430887"/>
           </a:xfrm>
           <a:prstGeom prst="rect">
             <a:avLst/>
@@ -8492,28 +8503,21 @@
               <a:buChar char="•"/>
             </a:pPr>
             <a:r>
-              <a:rPr lang="en-US" sz="1400" dirty="0">
+              <a:rPr lang="en-US" sz="1100" dirty="0">
                 <a:ea typeface="+mn-lt"/>
                 <a:cs typeface="+mn-lt"/>
               </a:rPr>
-              <a:t>   </a:t>
-            </a:r>
-            <a:r>
-              <a:rPr lang="en-US" sz="1200" dirty="0">
-                <a:ea typeface="+mn-lt"/>
-                <a:cs typeface="+mn-lt"/>
-              </a:rPr>
-              <a:t> The raw MTA data contains multiple records for the same station complex and hour, including different fare categories</a:t>
-            </a:r>
-            <a:r>
-              <a:rPr lang="en-US" sz="1200" b="1" dirty="0">
+              <a:t>    The raw MTA data contains multiple records for the same station complex and hour, including different fare categories</a:t>
+            </a:r>
+            <a:r>
+              <a:rPr lang="en-US" sz="1100" b="1" dirty="0">
                 <a:ea typeface="+mn-lt"/>
                 <a:cs typeface="+mn-lt"/>
               </a:rPr>
               <a:t>.</a:t>
             </a:r>
             <a:r>
-              <a:rPr lang="en-US" sz="1200" dirty="0">
+              <a:rPr lang="en-US" sz="1100" dirty="0">
                 <a:ea typeface="+mn-lt"/>
                 <a:cs typeface="+mn-lt"/>
               </a:rPr>
@@ -8536,7 +8540,7 @@
         </p:nvSpPr>
         <p:spPr>
           <a:xfrm>
-            <a:off x="85375" y="8815352"/>
+            <a:off x="85375" y="4778590"/>
             <a:ext cx="7391359" cy="307777"/>
           </a:xfrm>
           <a:prstGeom prst="rect">
@@ -8575,8 +8579,8 @@
         </p:nvSpPr>
         <p:spPr>
           <a:xfrm>
-            <a:off x="92499" y="9137380"/>
-            <a:ext cx="7408508" cy="461665"/>
+            <a:off x="-9053" y="5028194"/>
+            <a:ext cx="7562849" cy="430887"/>
           </a:xfrm>
           <a:prstGeom prst="rect">
             <a:avLst/>
@@ -8589,26 +8593,26 @@
           </a:bodyPr>
           <a:lstStyle/>
           <a:p>
-            <a:pPr marL="285750" indent="-285750">
-              <a:buFont typeface="Arial"/>
+            <a:pPr marL="171450" indent="-171450">
+              <a:buFont typeface="Arial" panose="020B0604020202020204" pitchFamily="34" charset="0"/>
               <a:buChar char="•"/>
             </a:pPr>
             <a:r>
-              <a:rPr lang="en-US" sz="1200" dirty="0">
+              <a:rPr lang="en-US" sz="1100" dirty="0">
                 <a:ea typeface="+mn-lt"/>
                 <a:cs typeface="+mn-lt"/>
               </a:rPr>
               <a:t>Dry hours represent the reference condition against which rainy and snowy hours are compared</a:t>
             </a:r>
             <a:r>
-              <a:rPr lang="en-US" sz="1200" dirty="0">
+              <a:rPr lang="en-US" sz="1100" dirty="0">
                 <a:ea typeface="Calibri"/>
                 <a:cs typeface="Calibri"/>
               </a:rPr>
               <a:t> . </a:t>
             </a:r>
             <a:r>
-              <a:rPr lang="en-US" sz="1200" dirty="0">
+              <a:rPr lang="en-US" sz="1100" dirty="0">
                 <a:ea typeface="+mn-lt"/>
                 <a:cs typeface="+mn-lt"/>
               </a:rPr>
@@ -8631,8 +8635,8 @@
         </p:nvSpPr>
         <p:spPr>
           <a:xfrm>
-            <a:off x="167561" y="9588350"/>
-            <a:ext cx="6647688" cy="413852"/>
+            <a:off x="158508" y="5452004"/>
+            <a:ext cx="7318226" cy="319703"/>
           </a:xfrm>
           <a:prstGeom prst="rect">
             <a:avLst/>
@@ -8752,10 +8756,10 @@
       </p:sp>
       <p:sp>
         <p:nvSpPr>
-          <p:cNvPr id="11" name="Text 10">
+          <p:cNvPr id="13" name="Text 10">
             <a:extLst>
               <a:ext uri="{FF2B5EF4-FFF2-40B4-BE49-F238E27FC236}">
-                <a16:creationId xmlns:a16="http://schemas.microsoft.com/office/drawing/2014/main" id="{0DF37903-A246-28D8-C215-2FA4DE794AF5}"/>
+                <a16:creationId xmlns:a16="http://schemas.microsoft.com/office/drawing/2014/main" id="{F42CA090-405E-71E1-94E7-52F6D0601026}"/>
               </a:ext>
             </a:extLst>
           </p:cNvPr>
@@ -8764,203 +8768,8 @@
         </p:nvSpPr>
         <p:spPr>
           <a:xfrm>
-            <a:off x="167691" y="9897760"/>
-            <a:ext cx="7333315" cy="644291"/>
-          </a:xfrm>
-          <a:prstGeom prst="rect">
-            <a:avLst/>
-          </a:prstGeom>
-          <a:noFill/>
-          <a:ln/>
-        </p:spPr>
-        <p:txBody>
-          <a:bodyPr wrap="square" lIns="0" tIns="0" rIns="0" bIns="0" rtlCol="0" anchor="ctr"/>
-          <a:lstStyle>
-            <a:lvl1pPr marL="0" algn="l" defTabSz="914400" rtl="0" eaLnBrk="1" latinLnBrk="0" hangingPunct="1">
-              <a:defRPr sz="1800" kern="1200">
-                <a:solidFill>
-                  <a:schemeClr val="tx1"/>
-                </a:solidFill>
-                <a:latin typeface="+mn-lt"/>
-                <a:ea typeface="+mn-ea"/>
-                <a:cs typeface="+mn-cs"/>
-              </a:defRPr>
-            </a:lvl1pPr>
-            <a:lvl2pPr marL="457200" algn="l" defTabSz="914400" rtl="0" eaLnBrk="1" latinLnBrk="0" hangingPunct="1">
-              <a:defRPr sz="1800" kern="1200">
-                <a:solidFill>
-                  <a:schemeClr val="tx1"/>
-                </a:solidFill>
-                <a:latin typeface="+mn-lt"/>
-                <a:ea typeface="+mn-ea"/>
-                <a:cs typeface="+mn-cs"/>
-              </a:defRPr>
-            </a:lvl2pPr>
-            <a:lvl3pPr marL="914400" algn="l" defTabSz="914400" rtl="0" eaLnBrk="1" latinLnBrk="0" hangingPunct="1">
-              <a:defRPr sz="1800" kern="1200">
-                <a:solidFill>
-                  <a:schemeClr val="tx1"/>
-                </a:solidFill>
-                <a:latin typeface="+mn-lt"/>
-                <a:ea typeface="+mn-ea"/>
-                <a:cs typeface="+mn-cs"/>
-              </a:defRPr>
-            </a:lvl3pPr>
-            <a:lvl4pPr marL="1371600" algn="l" defTabSz="914400" rtl="0" eaLnBrk="1" latinLnBrk="0" hangingPunct="1">
-              <a:defRPr sz="1800" kern="1200">
-                <a:solidFill>
-                  <a:schemeClr val="tx1"/>
-                </a:solidFill>
-                <a:latin typeface="+mn-lt"/>
-                <a:ea typeface="+mn-ea"/>
-                <a:cs typeface="+mn-cs"/>
-              </a:defRPr>
-            </a:lvl4pPr>
-            <a:lvl5pPr marL="1828800" algn="l" defTabSz="914400" rtl="0" eaLnBrk="1" latinLnBrk="0" hangingPunct="1">
-              <a:defRPr sz="1800" kern="1200">
-                <a:solidFill>
-                  <a:schemeClr val="tx1"/>
-                </a:solidFill>
-                <a:latin typeface="+mn-lt"/>
-                <a:ea typeface="+mn-ea"/>
-                <a:cs typeface="+mn-cs"/>
-              </a:defRPr>
-            </a:lvl5pPr>
-            <a:lvl6pPr marL="2286000" algn="l" defTabSz="914400" rtl="0" eaLnBrk="1" latinLnBrk="0" hangingPunct="1">
-              <a:defRPr sz="1800" kern="1200">
-                <a:solidFill>
-                  <a:schemeClr val="tx1"/>
-                </a:solidFill>
-                <a:latin typeface="+mn-lt"/>
-                <a:ea typeface="+mn-ea"/>
-                <a:cs typeface="+mn-cs"/>
-              </a:defRPr>
-            </a:lvl6pPr>
-            <a:lvl7pPr marL="2743200" algn="l" defTabSz="914400" rtl="0" eaLnBrk="1" latinLnBrk="0" hangingPunct="1">
-              <a:defRPr sz="1800" kern="1200">
-                <a:solidFill>
-                  <a:schemeClr val="tx1"/>
-                </a:solidFill>
-                <a:latin typeface="+mn-lt"/>
-                <a:ea typeface="+mn-ea"/>
-                <a:cs typeface="+mn-cs"/>
-              </a:defRPr>
-            </a:lvl7pPr>
-            <a:lvl8pPr marL="3200400" algn="l" defTabSz="914400" rtl="0" eaLnBrk="1" latinLnBrk="0" hangingPunct="1">
-              <a:defRPr sz="1800" kern="1200">
-                <a:solidFill>
-                  <a:schemeClr val="tx1"/>
-                </a:solidFill>
-                <a:latin typeface="+mn-lt"/>
-                <a:ea typeface="+mn-ea"/>
-                <a:cs typeface="+mn-cs"/>
-              </a:defRPr>
-            </a:lvl8pPr>
-            <a:lvl9pPr marL="3657600" algn="l" defTabSz="914400" rtl="0" eaLnBrk="1" latinLnBrk="0" hangingPunct="1">
-              <a:defRPr sz="1800" kern="1200">
-                <a:solidFill>
-                  <a:schemeClr val="tx1"/>
-                </a:solidFill>
-                <a:latin typeface="+mn-lt"/>
-                <a:ea typeface="+mn-ea"/>
-                <a:cs typeface="+mn-cs"/>
-              </a:defRPr>
-            </a:lvl9pPr>
-          </a:lstStyle>
-          <a:p>
-            <a:pPr marL="171450" indent="-171450">
-              <a:buFont typeface="Arial"/>
-              <a:buChar char="•"/>
-            </a:pPr>
-            <a:r>
-              <a:rPr lang="en-US" sz="1200" dirty="0">
-                <a:ea typeface="+mn-lt"/>
-                <a:cs typeface="+mn-lt"/>
-              </a:rPr>
-              <a:t>The weather table has 317 records with a missing </a:t>
-            </a:r>
-            <a:r>
-              <a:rPr lang="en-US" sz="1200" dirty="0">
-                <a:latin typeface="Consolas"/>
-                <a:ea typeface="+mn-lt"/>
-                <a:cs typeface="+mn-lt"/>
-              </a:rPr>
-              <a:t>condition</a:t>
-            </a:r>
-            <a:r>
-              <a:rPr lang="en-US" sz="1200" dirty="0">
-                <a:ea typeface="+mn-lt"/>
-                <a:cs typeface="+mn-lt"/>
-              </a:rPr>
-              <a:t>, leaving 8,387 records with known conditions.</a:t>
-            </a:r>
-            <a:r>
-              <a:rPr lang="en-US" sz="1200" dirty="0">
-                <a:ea typeface="Calibri"/>
-                <a:cs typeface="Calibri"/>
-              </a:rPr>
-              <a:t> </a:t>
-            </a:r>
-            <a:r>
-              <a:rPr lang="en-US" sz="1200" dirty="0">
-                <a:ea typeface="+mn-lt"/>
-                <a:cs typeface="+mn-lt"/>
-              </a:rPr>
-              <a:t>We excluded those records from the weather-effect analysis because we could not confidently classify them as dry, light rain, heavy rain, or snow.</a:t>
-            </a:r>
-            <a:endParaRPr lang="en-US" sz="1200" dirty="0">
-              <a:ea typeface="Calibri"/>
-              <a:cs typeface="Calibri"/>
-            </a:endParaRPr>
-          </a:p>
-        </p:txBody>
-      </p:sp>
-    </p:spTree>
-    <p:extLst>
-      <p:ext uri="{BB962C8B-B14F-4D97-AF65-F5344CB8AC3E}">
-        <p14:creationId xmlns:p14="http://schemas.microsoft.com/office/powerpoint/2010/main" val="344045745"/>
-      </p:ext>
-    </p:extLst>
-  </p:cSld>
-  <p:clrMapOvr>
-    <a:masterClrMapping/>
-  </p:clrMapOvr>
-</p:sld>
-</file>
-
-<file path=ppt/slides/slide4.xml><?xml version="1.0" encoding="utf-8"?>
-<p:sld xmlns:a="http://schemas.openxmlformats.org/drawingml/2006/main" xmlns:r="http://schemas.openxmlformats.org/officeDocument/2006/relationships" xmlns:p="http://schemas.openxmlformats.org/presentationml/2006/main">
-  <p:cSld>
-    <p:spTree>
-      <p:nvGrpSpPr>
-        <p:cNvPr id="1" name=""/>
-        <p:cNvGrpSpPr/>
-        <p:nvPr/>
-      </p:nvGrpSpPr>
-      <p:grpSpPr>
-        <a:xfrm>
-          <a:off x="0" y="0"/>
-          <a:ext cx="0" cy="0"/>
-          <a:chOff x="0" y="0"/>
-          <a:chExt cx="0" cy="0"/>
-        </a:xfrm>
-      </p:grpSpPr>
-      <p:sp>
-        <p:nvSpPr>
-          <p:cNvPr id="3" name="Text 10">
-            <a:extLst>
-              <a:ext uri="{FF2B5EF4-FFF2-40B4-BE49-F238E27FC236}">
-                <a16:creationId xmlns:a16="http://schemas.microsoft.com/office/drawing/2014/main" id="{8C6EC6AA-DFDC-B910-F354-3ABEEF1A5D16}"/>
-              </a:ext>
-            </a:extLst>
-          </p:cNvPr>
-          <p:cNvSpPr txBox="1"/>
-          <p:nvPr/>
-        </p:nvSpPr>
-        <p:spPr>
-          <a:xfrm>
-            <a:off x="184576" y="93961"/>
-            <a:ext cx="6647688" cy="413852"/>
+            <a:off x="106241" y="6136249"/>
+            <a:ext cx="6647688" cy="361583"/>
           </a:xfrm>
           <a:prstGeom prst="rect">
             <a:avLst/>
@@ -9085,10 +8894,10 @@
       </p:sp>
       <p:sp>
         <p:nvSpPr>
-          <p:cNvPr id="6" name="Text 10">
+          <p:cNvPr id="15" name="Text 10">
             <a:extLst>
               <a:ext uri="{FF2B5EF4-FFF2-40B4-BE49-F238E27FC236}">
-                <a16:creationId xmlns:a16="http://schemas.microsoft.com/office/drawing/2014/main" id="{6EB5CAD2-7792-2E1B-C9EA-106DF14E8C76}"/>
+                <a16:creationId xmlns:a16="http://schemas.microsoft.com/office/drawing/2014/main" id="{AC32B3E8-8D9B-3BD5-E0F8-0476383DEBF0}"/>
               </a:ext>
             </a:extLst>
           </p:cNvPr>
@@ -9097,8 +8906,147 @@
         </p:nvSpPr>
         <p:spPr>
           <a:xfrm>
-            <a:off x="184970" y="910415"/>
-            <a:ext cx="2977734" cy="396696"/>
+            <a:off x="21716" y="6446775"/>
+            <a:ext cx="7541133" cy="413852"/>
+          </a:xfrm>
+          <a:prstGeom prst="rect">
+            <a:avLst/>
+          </a:prstGeom>
+          <a:noFill/>
+          <a:ln/>
+        </p:spPr>
+        <p:txBody>
+          <a:bodyPr wrap="square" lIns="0" tIns="0" rIns="0" bIns="0" rtlCol="0" anchor="ctr"/>
+          <a:lstStyle>
+            <a:lvl1pPr marL="0" algn="l" defTabSz="914400" rtl="0" eaLnBrk="1" latinLnBrk="0" hangingPunct="1">
+              <a:defRPr sz="1800" kern="1200">
+                <a:solidFill>
+                  <a:schemeClr val="tx1"/>
+                </a:solidFill>
+                <a:latin typeface="+mn-lt"/>
+                <a:ea typeface="+mn-ea"/>
+                <a:cs typeface="+mn-cs"/>
+              </a:defRPr>
+            </a:lvl1pPr>
+            <a:lvl2pPr marL="457200" algn="l" defTabSz="914400" rtl="0" eaLnBrk="1" latinLnBrk="0" hangingPunct="1">
+              <a:defRPr sz="1800" kern="1200">
+                <a:solidFill>
+                  <a:schemeClr val="tx1"/>
+                </a:solidFill>
+                <a:latin typeface="+mn-lt"/>
+                <a:ea typeface="+mn-ea"/>
+                <a:cs typeface="+mn-cs"/>
+              </a:defRPr>
+            </a:lvl2pPr>
+            <a:lvl3pPr marL="914400" algn="l" defTabSz="914400" rtl="0" eaLnBrk="1" latinLnBrk="0" hangingPunct="1">
+              <a:defRPr sz="1800" kern="1200">
+                <a:solidFill>
+                  <a:schemeClr val="tx1"/>
+                </a:solidFill>
+                <a:latin typeface="+mn-lt"/>
+                <a:ea typeface="+mn-ea"/>
+                <a:cs typeface="+mn-cs"/>
+              </a:defRPr>
+            </a:lvl3pPr>
+            <a:lvl4pPr marL="1371600" algn="l" defTabSz="914400" rtl="0" eaLnBrk="1" latinLnBrk="0" hangingPunct="1">
+              <a:defRPr sz="1800" kern="1200">
+                <a:solidFill>
+                  <a:schemeClr val="tx1"/>
+                </a:solidFill>
+                <a:latin typeface="+mn-lt"/>
+                <a:ea typeface="+mn-ea"/>
+                <a:cs typeface="+mn-cs"/>
+              </a:defRPr>
+            </a:lvl4pPr>
+            <a:lvl5pPr marL="1828800" algn="l" defTabSz="914400" rtl="0" eaLnBrk="1" latinLnBrk="0" hangingPunct="1">
+              <a:defRPr sz="1800" kern="1200">
+                <a:solidFill>
+                  <a:schemeClr val="tx1"/>
+                </a:solidFill>
+                <a:latin typeface="+mn-lt"/>
+                <a:ea typeface="+mn-ea"/>
+                <a:cs typeface="+mn-cs"/>
+              </a:defRPr>
+            </a:lvl5pPr>
+            <a:lvl6pPr marL="2286000" algn="l" defTabSz="914400" rtl="0" eaLnBrk="1" latinLnBrk="0" hangingPunct="1">
+              <a:defRPr sz="1800" kern="1200">
+                <a:solidFill>
+                  <a:schemeClr val="tx1"/>
+                </a:solidFill>
+                <a:latin typeface="+mn-lt"/>
+                <a:ea typeface="+mn-ea"/>
+                <a:cs typeface="+mn-cs"/>
+              </a:defRPr>
+            </a:lvl6pPr>
+            <a:lvl7pPr marL="2743200" algn="l" defTabSz="914400" rtl="0" eaLnBrk="1" latinLnBrk="0" hangingPunct="1">
+              <a:defRPr sz="1800" kern="1200">
+                <a:solidFill>
+                  <a:schemeClr val="tx1"/>
+                </a:solidFill>
+                <a:latin typeface="+mn-lt"/>
+                <a:ea typeface="+mn-ea"/>
+                <a:cs typeface="+mn-cs"/>
+              </a:defRPr>
+            </a:lvl7pPr>
+            <a:lvl8pPr marL="3200400" algn="l" defTabSz="914400" rtl="0" eaLnBrk="1" latinLnBrk="0" hangingPunct="1">
+              <a:defRPr sz="1800" kern="1200">
+                <a:solidFill>
+                  <a:schemeClr val="tx1"/>
+                </a:solidFill>
+                <a:latin typeface="+mn-lt"/>
+                <a:ea typeface="+mn-ea"/>
+                <a:cs typeface="+mn-cs"/>
+              </a:defRPr>
+            </a:lvl8pPr>
+            <a:lvl9pPr marL="3657600" algn="l" defTabSz="914400" rtl="0" eaLnBrk="1" latinLnBrk="0" hangingPunct="1">
+              <a:defRPr sz="1800" kern="1200">
+                <a:solidFill>
+                  <a:schemeClr val="tx1"/>
+                </a:solidFill>
+                <a:latin typeface="+mn-lt"/>
+                <a:ea typeface="+mn-ea"/>
+                <a:cs typeface="+mn-cs"/>
+              </a:defRPr>
+            </a:lvl9pPr>
+          </a:lstStyle>
+          <a:p>
+            <a:pPr marL="12700"/>
+            <a:r>
+              <a:rPr lang="en-US" sz="1100" b="1" dirty="0"/>
+              <a:t>The Sub-question</a:t>
+            </a:r>
+            <a:r>
+              <a:rPr lang="en-US" sz="1100" dirty="0"/>
+              <a:t>: What is the usual ridership in each subway station by hour and day of the week, and by how much does the weather change it?. </a:t>
+            </a:r>
+            <a:r>
+              <a:rPr lang="en-US" sz="1100" b="1" dirty="0"/>
+              <a:t>Answer :</a:t>
+            </a:r>
+            <a:endParaRPr lang="en-US" sz="1100" b="1" u="sng" dirty="0">
+              <a:latin typeface="Calibri"/>
+              <a:ea typeface="Calibri"/>
+              <a:cs typeface="Calibri"/>
+            </a:endParaRPr>
+          </a:p>
+        </p:txBody>
+      </p:sp>
+      <p:sp>
+        <p:nvSpPr>
+          <p:cNvPr id="17" name="Text 10">
+            <a:extLst>
+              <a:ext uri="{FF2B5EF4-FFF2-40B4-BE49-F238E27FC236}">
+                <a16:creationId xmlns:a16="http://schemas.microsoft.com/office/drawing/2014/main" id="{DD275B3A-C32C-C135-71EE-4E879D28051D}"/>
+              </a:ext>
+            </a:extLst>
+          </p:cNvPr>
+          <p:cNvSpPr txBox="1"/>
+          <p:nvPr/>
+        </p:nvSpPr>
+        <p:spPr>
+          <a:xfrm>
+            <a:off x="184969" y="6853217"/>
+            <a:ext cx="3427363" cy="229396"/>
           </a:xfrm>
           <a:prstGeom prst="rect">
             <a:avLst/>
@@ -9215,12 +9163,553 @@
           </a:p>
         </p:txBody>
       </p:sp>
+      <p:graphicFrame>
+        <p:nvGraphicFramePr>
+          <p:cNvPr id="20" name="Table 10">
+            <a:extLst>
+              <a:ext uri="{FF2B5EF4-FFF2-40B4-BE49-F238E27FC236}">
+                <a16:creationId xmlns:a16="http://schemas.microsoft.com/office/drawing/2014/main" id="{81949947-C463-96DC-001C-D80E243E7709}"/>
+              </a:ext>
+            </a:extLst>
+          </p:cNvPr>
+          <p:cNvGraphicFramePr>
+            <a:graphicFrameLocks noGrp="1"/>
+          </p:cNvGraphicFramePr>
+          <p:nvPr>
+            <p:extLst>
+              <p:ext uri="{D42A27DB-BD31-4B8C-83A1-F6EECF244321}">
+                <p14:modId xmlns:p14="http://schemas.microsoft.com/office/powerpoint/2010/main" val="236775070"/>
+              </p:ext>
+            </p:extLst>
+          </p:nvPr>
+        </p:nvGraphicFramePr>
+        <p:xfrm>
+          <a:off x="17147" y="7109883"/>
+          <a:ext cx="7510965" cy="1153615"/>
+        </p:xfrm>
+        <a:graphic>
+          <a:graphicData uri="http://schemas.openxmlformats.org/drawingml/2006/table">
+            <a:tbl>
+              <a:tblPr bandRow="1">
+                <a:tableStyleId>{5C22544A-7EE6-4342-B048-85BDC9FD1C3A}</a:tableStyleId>
+              </a:tblPr>
+              <a:tblGrid>
+                <a:gridCol w="2503655">
+                  <a:extLst>
+                    <a:ext uri="{9D8B030D-6E8A-4147-A177-3AD203B41FA5}">
+                      <a16:colId xmlns:a16="http://schemas.microsoft.com/office/drawing/2014/main" val="1114046732"/>
+                    </a:ext>
+                  </a:extLst>
+                </a:gridCol>
+                <a:gridCol w="2503655">
+                  <a:extLst>
+                    <a:ext uri="{9D8B030D-6E8A-4147-A177-3AD203B41FA5}">
+                      <a16:colId xmlns:a16="http://schemas.microsoft.com/office/drawing/2014/main" val="284020454"/>
+                    </a:ext>
+                  </a:extLst>
+                </a:gridCol>
+                <a:gridCol w="2503655">
+                  <a:extLst>
+                    <a:ext uri="{9D8B030D-6E8A-4147-A177-3AD203B41FA5}">
+                      <a16:colId xmlns:a16="http://schemas.microsoft.com/office/drawing/2014/main" val="1105523973"/>
+                    </a:ext>
+                  </a:extLst>
+                </a:gridCol>
+              </a:tblGrid>
+              <a:tr h="376375">
+                <a:tc>
+                  <a:txBody>
+                    <a:bodyPr/>
+                    <a:lstStyle/>
+                    <a:p>
+                      <a:pPr>
+                        <a:buNone/>
+                      </a:pPr>
+                      <a:r>
+                        <a:rPr lang="en-US" sz="1100" b="1" dirty="0"/>
+                        <a:t>Weather condition</a:t>
+                      </a:r>
+                    </a:p>
+                  </a:txBody>
+                  <a:tcPr anchor="ctr">
+                    <a:lnL w="12700">
+                      <a:solidFill>
+                        <a:schemeClr val="tx1"/>
+                      </a:solidFill>
+                    </a:lnL>
+                    <a:lnR w="12700">
+                      <a:solidFill>
+                        <a:schemeClr val="tx1"/>
+                      </a:solidFill>
+                    </a:lnR>
+                    <a:lnT w="12700">
+                      <a:solidFill>
+                        <a:schemeClr val="tx1"/>
+                      </a:solidFill>
+                    </a:lnT>
+                    <a:lnB w="12700">
+                      <a:solidFill>
+                        <a:schemeClr val="tx1"/>
+                      </a:solidFill>
+                    </a:lnB>
+                    <a:noFill/>
+                  </a:tcPr>
+                </a:tc>
+                <a:tc>
+                  <a:txBody>
+                    <a:bodyPr/>
+                    <a:lstStyle/>
+                    <a:p>
+                      <a:pPr>
+                        <a:buNone/>
+                      </a:pPr>
+                      <a:r>
+                        <a:rPr lang="en-US" sz="1100" b="1" dirty="0"/>
+                        <a:t>Hours observed</a:t>
+                      </a:r>
+                    </a:p>
+                  </a:txBody>
+                  <a:tcPr anchor="ctr">
+                    <a:lnL w="12700">
+                      <a:solidFill>
+                        <a:schemeClr val="tx1"/>
+                      </a:solidFill>
+                    </a:lnL>
+                    <a:lnR w="12700">
+                      <a:solidFill>
+                        <a:schemeClr val="tx1"/>
+                      </a:solidFill>
+                    </a:lnR>
+                    <a:lnT w="12700">
+                      <a:solidFill>
+                        <a:schemeClr val="tx1"/>
+                      </a:solidFill>
+                    </a:lnT>
+                    <a:lnB w="12700">
+                      <a:solidFill>
+                        <a:schemeClr val="tx1"/>
+                      </a:solidFill>
+                    </a:lnB>
+                    <a:noFill/>
+                  </a:tcPr>
+                </a:tc>
+                <a:tc>
+                  <a:txBody>
+                    <a:bodyPr/>
+                    <a:lstStyle/>
+                    <a:p>
+                      <a:pPr>
+                        <a:buNone/>
+                      </a:pPr>
+                      <a:r>
+                        <a:rPr lang="en-US" sz="1100" b="1" dirty="0"/>
+                        <a:t>Ridership change vs baseline</a:t>
+                      </a:r>
+                    </a:p>
+                  </a:txBody>
+                  <a:tcPr anchor="ctr">
+                    <a:lnL w="12700">
+                      <a:solidFill>
+                        <a:schemeClr val="tx1"/>
+                      </a:solidFill>
+                    </a:lnL>
+                    <a:lnR w="12700">
+                      <a:solidFill>
+                        <a:schemeClr val="tx1"/>
+                      </a:solidFill>
+                    </a:lnR>
+                    <a:lnT w="12700">
+                      <a:solidFill>
+                        <a:schemeClr val="tx1"/>
+                      </a:solidFill>
+                    </a:lnT>
+                    <a:lnB w="12700">
+                      <a:solidFill>
+                        <a:schemeClr val="tx1"/>
+                      </a:solidFill>
+                    </a:lnB>
+                    <a:noFill/>
+                  </a:tcPr>
+                </a:tc>
+                <a:extLst>
+                  <a:ext uri="{0D108BD9-81ED-4DB2-BD59-A6C34878D82A}">
+                    <a16:rowId xmlns:a16="http://schemas.microsoft.com/office/drawing/2014/main" val="49033072"/>
+                  </a:ext>
+                </a:extLst>
+              </a:tr>
+              <a:tr h="228513">
+                <a:tc>
+                  <a:txBody>
+                    <a:bodyPr/>
+                    <a:lstStyle/>
+                    <a:p>
+                      <a:pPr>
+                        <a:buNone/>
+                      </a:pPr>
+                      <a:r>
+                        <a:rPr lang="en-US" sz="1100"/>
+                        <a:t>Light rain</a:t>
+                      </a:r>
+                    </a:p>
+                  </a:txBody>
+                  <a:tcPr anchor="ctr">
+                    <a:lnL w="12700">
+                      <a:solidFill>
+                        <a:schemeClr val="tx1"/>
+                      </a:solidFill>
+                    </a:lnL>
+                    <a:lnR w="12700">
+                      <a:solidFill>
+                        <a:schemeClr val="tx1"/>
+                      </a:solidFill>
+                    </a:lnR>
+                    <a:lnT w="12700">
+                      <a:solidFill>
+                        <a:schemeClr val="tx1"/>
+                      </a:solidFill>
+                    </a:lnT>
+                    <a:lnB w="12700">
+                      <a:solidFill>
+                        <a:schemeClr val="tx1"/>
+                      </a:solidFill>
+                    </a:lnB>
+                    <a:noFill/>
+                  </a:tcPr>
+                </a:tc>
+                <a:tc>
+                  <a:txBody>
+                    <a:bodyPr/>
+                    <a:lstStyle/>
+                    <a:p>
+                      <a:pPr>
+                        <a:buNone/>
+                      </a:pPr>
+                      <a:r>
+                        <a:rPr lang="en-US" sz="1100"/>
+                        <a:t>454</a:t>
+                      </a:r>
+                    </a:p>
+                  </a:txBody>
+                  <a:tcPr anchor="ctr">
+                    <a:lnL w="12700">
+                      <a:solidFill>
+                        <a:schemeClr val="tx1"/>
+                      </a:solidFill>
+                    </a:lnL>
+                    <a:lnR w="12700">
+                      <a:solidFill>
+                        <a:schemeClr val="tx1"/>
+                      </a:solidFill>
+                    </a:lnR>
+                    <a:lnT w="12700">
+                      <a:solidFill>
+                        <a:schemeClr val="tx1"/>
+                      </a:solidFill>
+                    </a:lnT>
+                    <a:lnB w="12700">
+                      <a:solidFill>
+                        <a:schemeClr val="tx1"/>
+                      </a:solidFill>
+                    </a:lnB>
+                    <a:noFill/>
+                  </a:tcPr>
+                </a:tc>
+                <a:tc>
+                  <a:txBody>
+                    <a:bodyPr/>
+                    <a:lstStyle/>
+                    <a:p>
+                      <a:pPr>
+                        <a:buNone/>
+                      </a:pPr>
+                      <a:r>
+                        <a:rPr lang="en-US" sz="1100" dirty="0"/>
+                        <a:t>−2.0%</a:t>
+                      </a:r>
+                    </a:p>
+                  </a:txBody>
+                  <a:tcPr anchor="ctr">
+                    <a:lnL w="12700">
+                      <a:solidFill>
+                        <a:schemeClr val="tx1"/>
+                      </a:solidFill>
+                    </a:lnL>
+                    <a:lnR w="12700">
+                      <a:solidFill>
+                        <a:schemeClr val="tx1"/>
+                      </a:solidFill>
+                    </a:lnR>
+                    <a:lnT w="12700">
+                      <a:solidFill>
+                        <a:schemeClr val="tx1"/>
+                      </a:solidFill>
+                    </a:lnT>
+                    <a:lnB w="12700">
+                      <a:solidFill>
+                        <a:schemeClr val="tx1"/>
+                      </a:solidFill>
+                    </a:lnB>
+                    <a:noFill/>
+                  </a:tcPr>
+                </a:tc>
+                <a:extLst>
+                  <a:ext uri="{0D108BD9-81ED-4DB2-BD59-A6C34878D82A}">
+                    <a16:rowId xmlns:a16="http://schemas.microsoft.com/office/drawing/2014/main" val="442269309"/>
+                  </a:ext>
+                </a:extLst>
+              </a:tr>
+              <a:tr h="228513">
+                <a:tc>
+                  <a:txBody>
+                    <a:bodyPr/>
+                    <a:lstStyle/>
+                    <a:p>
+                      <a:pPr>
+                        <a:buNone/>
+                      </a:pPr>
+                      <a:r>
+                        <a:rPr lang="en-US" sz="1100"/>
+                        <a:t>Heavy rain</a:t>
+                      </a:r>
+                    </a:p>
+                  </a:txBody>
+                  <a:tcPr anchor="ctr">
+                    <a:lnL w="12700">
+                      <a:solidFill>
+                        <a:schemeClr val="tx1"/>
+                      </a:solidFill>
+                    </a:lnL>
+                    <a:lnR w="12700">
+                      <a:solidFill>
+                        <a:schemeClr val="tx1"/>
+                      </a:solidFill>
+                    </a:lnR>
+                    <a:lnT w="12700">
+                      <a:solidFill>
+                        <a:schemeClr val="tx1"/>
+                      </a:solidFill>
+                    </a:lnT>
+                    <a:lnB w="12700">
+                      <a:solidFill>
+                        <a:schemeClr val="tx1"/>
+                      </a:solidFill>
+                    </a:lnB>
+                    <a:noFill/>
+                  </a:tcPr>
+                </a:tc>
+                <a:tc>
+                  <a:txBody>
+                    <a:bodyPr/>
+                    <a:lstStyle/>
+                    <a:p>
+                      <a:pPr>
+                        <a:buNone/>
+                      </a:pPr>
+                      <a:r>
+                        <a:rPr lang="en-US" sz="1100"/>
+                        <a:t>110</a:t>
+                      </a:r>
+                    </a:p>
+                  </a:txBody>
+                  <a:tcPr anchor="ctr">
+                    <a:lnL w="12700">
+                      <a:solidFill>
+                        <a:schemeClr val="tx1"/>
+                      </a:solidFill>
+                    </a:lnL>
+                    <a:lnR w="12700">
+                      <a:solidFill>
+                        <a:schemeClr val="tx1"/>
+                      </a:solidFill>
+                    </a:lnR>
+                    <a:lnT w="12700">
+                      <a:solidFill>
+                        <a:schemeClr val="tx1"/>
+                      </a:solidFill>
+                    </a:lnT>
+                    <a:lnB w="12700">
+                      <a:solidFill>
+                        <a:schemeClr val="tx1"/>
+                      </a:solidFill>
+                    </a:lnB>
+                    <a:noFill/>
+                  </a:tcPr>
+                </a:tc>
+                <a:tc>
+                  <a:txBody>
+                    <a:bodyPr/>
+                    <a:lstStyle/>
+                    <a:p>
+                      <a:pPr>
+                        <a:buNone/>
+                      </a:pPr>
+                      <a:r>
+                        <a:rPr lang="en-US" sz="1100" dirty="0"/>
+                        <a:t>−1.0%</a:t>
+                      </a:r>
+                    </a:p>
+                  </a:txBody>
+                  <a:tcPr anchor="ctr">
+                    <a:lnL w="12700">
+                      <a:solidFill>
+                        <a:schemeClr val="tx1"/>
+                      </a:solidFill>
+                    </a:lnL>
+                    <a:lnR w="12700">
+                      <a:solidFill>
+                        <a:schemeClr val="tx1"/>
+                      </a:solidFill>
+                    </a:lnR>
+                    <a:lnT w="12700">
+                      <a:solidFill>
+                        <a:schemeClr val="tx1"/>
+                      </a:solidFill>
+                    </a:lnT>
+                    <a:lnB w="12700">
+                      <a:solidFill>
+                        <a:schemeClr val="tx1"/>
+                      </a:solidFill>
+                    </a:lnB>
+                    <a:noFill/>
+                  </a:tcPr>
+                </a:tc>
+                <a:extLst>
+                  <a:ext uri="{0D108BD9-81ED-4DB2-BD59-A6C34878D82A}">
+                    <a16:rowId xmlns:a16="http://schemas.microsoft.com/office/drawing/2014/main" val="4271105988"/>
+                  </a:ext>
+                </a:extLst>
+              </a:tr>
+              <a:tr h="228513">
+                <a:tc>
+                  <a:txBody>
+                    <a:bodyPr/>
+                    <a:lstStyle/>
+                    <a:p>
+                      <a:pPr>
+                        <a:buNone/>
+                      </a:pPr>
+                      <a:r>
+                        <a:rPr lang="en-US" sz="1100" dirty="0"/>
+                        <a:t>Snow</a:t>
+                      </a:r>
+                    </a:p>
+                  </a:txBody>
+                  <a:tcPr anchor="ctr">
+                    <a:lnL w="12700">
+                      <a:solidFill>
+                        <a:schemeClr val="tx1"/>
+                      </a:solidFill>
+                    </a:lnL>
+                    <a:lnR w="12700">
+                      <a:solidFill>
+                        <a:schemeClr val="tx1"/>
+                      </a:solidFill>
+                    </a:lnR>
+                    <a:lnT w="12700">
+                      <a:solidFill>
+                        <a:schemeClr val="tx1"/>
+                      </a:solidFill>
+                    </a:lnT>
+                    <a:lnB w="12700">
+                      <a:solidFill>
+                        <a:schemeClr val="tx1"/>
+                      </a:solidFill>
+                    </a:lnB>
+                    <a:noFill/>
+                  </a:tcPr>
+                </a:tc>
+                <a:tc>
+                  <a:txBody>
+                    <a:bodyPr/>
+                    <a:lstStyle/>
+                    <a:p>
+                      <a:pPr>
+                        <a:buNone/>
+                      </a:pPr>
+                      <a:r>
+                        <a:rPr lang="en-US" sz="1100" dirty="0"/>
+                        <a:t>64</a:t>
+                      </a:r>
+                    </a:p>
+                  </a:txBody>
+                  <a:tcPr anchor="ctr">
+                    <a:lnL w="12700">
+                      <a:solidFill>
+                        <a:schemeClr val="tx1"/>
+                      </a:solidFill>
+                    </a:lnL>
+                    <a:lnR w="12700">
+                      <a:solidFill>
+                        <a:schemeClr val="tx1"/>
+                      </a:solidFill>
+                    </a:lnR>
+                    <a:lnT w="12700">
+                      <a:solidFill>
+                        <a:schemeClr val="tx1"/>
+                      </a:solidFill>
+                    </a:lnT>
+                    <a:lnB w="12700">
+                      <a:solidFill>
+                        <a:schemeClr val="tx1"/>
+                      </a:solidFill>
+                    </a:lnB>
+                    <a:noFill/>
+                  </a:tcPr>
+                </a:tc>
+                <a:tc>
+                  <a:txBody>
+                    <a:bodyPr/>
+                    <a:lstStyle/>
+                    <a:p>
+                      <a:pPr>
+                        <a:buNone/>
+                      </a:pPr>
+                      <a:r>
+                        <a:rPr lang="en-US" sz="1100" dirty="0"/>
+                        <a:t>−4.8%</a:t>
+                      </a:r>
+                    </a:p>
+                  </a:txBody>
+                  <a:tcPr anchor="ctr">
+                    <a:lnL w="12700">
+                      <a:solidFill>
+                        <a:schemeClr val="tx1"/>
+                      </a:solidFill>
+                    </a:lnL>
+                    <a:lnR w="12700">
+                      <a:solidFill>
+                        <a:schemeClr val="tx1"/>
+                      </a:solidFill>
+                    </a:lnR>
+                    <a:lnT w="12700">
+                      <a:solidFill>
+                        <a:schemeClr val="tx1"/>
+                      </a:solidFill>
+                    </a:lnT>
+                    <a:lnB w="12700">
+                      <a:solidFill>
+                        <a:schemeClr val="tx1"/>
+                      </a:solidFill>
+                    </a:lnB>
+                    <a:noFill/>
+                  </a:tcPr>
+                </a:tc>
+                <a:extLst>
+                  <a:ext uri="{0D108BD9-81ED-4DB2-BD59-A6C34878D82A}">
+                    <a16:rowId xmlns:a16="http://schemas.microsoft.com/office/drawing/2014/main" val="2094425736"/>
+                  </a:ext>
+                </a:extLst>
+              </a:tr>
+            </a:tbl>
+          </a:graphicData>
+        </a:graphic>
+      </p:graphicFrame>
       <p:sp>
         <p:nvSpPr>
-          <p:cNvPr id="7" name="Text 10">
+          <p:cNvPr id="25" name="Text 10">
             <a:extLst>
               <a:ext uri="{FF2B5EF4-FFF2-40B4-BE49-F238E27FC236}">
-                <a16:creationId xmlns:a16="http://schemas.microsoft.com/office/drawing/2014/main" id="{01F82978-F08E-71A1-B5A1-C1466A9C12DE}"/>
+                <a16:creationId xmlns:a16="http://schemas.microsoft.com/office/drawing/2014/main" id="{88A8D3D6-834D-8702-7FED-3A50F7253988}"/>
               </a:ext>
             </a:extLst>
           </p:cNvPr>
@@ -9229,8 +9718,8 @@
         </p:nvSpPr>
         <p:spPr>
           <a:xfrm>
-            <a:off x="184707" y="498598"/>
-            <a:ext cx="6647688" cy="413852"/>
+            <a:off x="184969" y="8511665"/>
+            <a:ext cx="2977734" cy="252297"/>
           </a:xfrm>
           <a:prstGeom prst="rect">
             <a:avLst/>
@@ -9333,13 +9822,14 @@
             </a:lvl9pPr>
           </a:lstStyle>
           <a:p>
-            <a:pPr marL="12700"/>
-            <a:r>
-              <a:rPr lang="en-US" sz="1200" dirty="0"/>
-              <a:t>What is the usual ridership in each subway station by hour and day of the week, and by how much does the weather change it?</a:t>
-            </a:r>
-            <a:endParaRPr lang="en-US" sz="1200" b="1" u="sng" dirty="0">
-              <a:latin typeface="Calibri"/>
+            <a:r>
+              <a:rPr lang="en-US" sz="1400" b="1" dirty="0">
+                <a:ea typeface="+mn-lt"/>
+                <a:cs typeface="+mn-lt"/>
+              </a:rPr>
+              <a:t>2.       Differences between boroughs</a:t>
+            </a:r>
+            <a:endParaRPr lang="en-US" sz="1400" b="1" dirty="0">
               <a:ea typeface="Calibri"/>
               <a:cs typeface="Calibri"/>
             </a:endParaRPr>
@@ -9348,10 +9838,10 @@
       </p:sp>
       <p:graphicFrame>
         <p:nvGraphicFramePr>
-          <p:cNvPr id="11" name="Table 10">
+          <p:cNvPr id="27" name="Table 16">
             <a:extLst>
               <a:ext uri="{FF2B5EF4-FFF2-40B4-BE49-F238E27FC236}">
-                <a16:creationId xmlns:a16="http://schemas.microsoft.com/office/drawing/2014/main" id="{6986D3BD-0B36-89DD-A86D-D35DD311D2A3}"/>
+                <a16:creationId xmlns:a16="http://schemas.microsoft.com/office/drawing/2014/main" id="{EF03842D-6D45-D93B-E83A-DC1F43BD521E}"/>
               </a:ext>
             </a:extLst>
           </p:cNvPr>
@@ -9361,14 +9851,14 @@
           <p:nvPr>
             <p:extLst>
               <p:ext uri="{D42A27DB-BD31-4B8C-83A1-F6EECF244321}">
-                <p14:modId xmlns:p14="http://schemas.microsoft.com/office/powerpoint/2010/main" val="4106972898"/>
+                <p14:modId xmlns:p14="http://schemas.microsoft.com/office/powerpoint/2010/main" val="2276081598"/>
               </p:ext>
             </p:extLst>
           </p:nvPr>
         </p:nvGraphicFramePr>
         <p:xfrm>
-          <a:off x="17147" y="1362491"/>
-          <a:ext cx="7562850" cy="1127760"/>
+          <a:off x="17147" y="8763830"/>
+          <a:ext cx="7510968" cy="1295400"/>
         </p:xfrm>
         <a:graphic>
           <a:graphicData uri="http://schemas.openxmlformats.org/drawingml/2006/table">
@@ -9377,29 +9867,36 @@
                 <a:tableStyleId>{5C22544A-7EE6-4342-B048-85BDC9FD1C3A}</a:tableStyleId>
               </a:tblPr>
               <a:tblGrid>
-                <a:gridCol w="2520950">
+                <a:gridCol w="1877742">
                   <a:extLst>
                     <a:ext uri="{9D8B030D-6E8A-4147-A177-3AD203B41FA5}">
-                      <a16:colId xmlns:a16="http://schemas.microsoft.com/office/drawing/2014/main" val="1114046732"/>
+                      <a16:colId xmlns:a16="http://schemas.microsoft.com/office/drawing/2014/main" val="129859399"/>
                     </a:ext>
                   </a:extLst>
                 </a:gridCol>
-                <a:gridCol w="2520950">
+                <a:gridCol w="1877742">
                   <a:extLst>
                     <a:ext uri="{9D8B030D-6E8A-4147-A177-3AD203B41FA5}">
-                      <a16:colId xmlns:a16="http://schemas.microsoft.com/office/drawing/2014/main" val="284020454"/>
+                      <a16:colId xmlns:a16="http://schemas.microsoft.com/office/drawing/2014/main" val="4230606441"/>
                     </a:ext>
                   </a:extLst>
                 </a:gridCol>
-                <a:gridCol w="2520950">
+                <a:gridCol w="1877742">
                   <a:extLst>
                     <a:ext uri="{9D8B030D-6E8A-4147-A177-3AD203B41FA5}">
-                      <a16:colId xmlns:a16="http://schemas.microsoft.com/office/drawing/2014/main" val="1105523973"/>
+                      <a16:colId xmlns:a16="http://schemas.microsoft.com/office/drawing/2014/main" val="389008135"/>
+                    </a:ext>
+                  </a:extLst>
+                </a:gridCol>
+                <a:gridCol w="1877742">
+                  <a:extLst>
+                    <a:ext uri="{9D8B030D-6E8A-4147-A177-3AD203B41FA5}">
+                      <a16:colId xmlns:a16="http://schemas.microsoft.com/office/drawing/2014/main" val="2395327052"/>
                     </a:ext>
                   </a:extLst>
                 </a:gridCol>
               </a:tblGrid>
-              <a:tr h="0">
+              <a:tr h="221370">
                 <a:tc>
                   <a:txBody>
                     <a:bodyPr/>
@@ -9409,8 +9906,8 @@
                         <a:buNone/>
                       </a:pPr>
                       <a:r>
-                        <a:rPr lang="en-US" sz="1400" b="1" dirty="0"/>
-                        <a:t>Weather condition</a:t>
+                        <a:rPr lang="en-US" sz="1100" b="1" dirty="0"/>
+                        <a:t>Borough</a:t>
                       </a:r>
                     </a:p>
                   </a:txBody>
@@ -9447,8 +9944,8 @@
                         <a:buNone/>
                       </a:pPr>
                       <a:r>
-                        <a:rPr lang="en-US" sz="1400" b="1"/>
-                        <a:t>Hours observed</a:t>
+                        <a:rPr lang="en-US" sz="1100" b="1"/>
+                        <a:t>Light rain</a:t>
                       </a:r>
                     </a:p>
                   </a:txBody>
@@ -9485,53 +9982,8 @@
                         <a:buNone/>
                       </a:pPr>
                       <a:r>
-                        <a:rPr lang="en-US" sz="1400" b="1"/>
-                        <a:t>Ridership change vs. baseline</a:t>
-                      </a:r>
-                    </a:p>
-                  </a:txBody>
-                  <a:tcPr anchor="ctr">
-                    <a:lnL w="12700">
-                      <a:solidFill>
-                        <a:schemeClr val="tx1"/>
-                      </a:solidFill>
-                    </a:lnL>
-                    <a:lnR w="12700">
-                      <a:solidFill>
-                        <a:schemeClr val="tx1"/>
-                      </a:solidFill>
-                    </a:lnR>
-                    <a:lnT w="12700">
-                      <a:solidFill>
-                        <a:schemeClr val="tx1"/>
-                      </a:solidFill>
-                    </a:lnT>
-                    <a:lnB w="12700">
-                      <a:solidFill>
-                        <a:schemeClr val="tx1"/>
-                      </a:solidFill>
-                    </a:lnB>
-                    <a:noFill/>
-                  </a:tcPr>
-                </a:tc>
-                <a:extLst>
-                  <a:ext uri="{0D108BD9-81ED-4DB2-BD59-A6C34878D82A}">
-                    <a16:rowId xmlns:a16="http://schemas.microsoft.com/office/drawing/2014/main" val="49033072"/>
-                  </a:ext>
-                </a:extLst>
-              </a:tr>
-              <a:tr h="0">
-                <a:tc>
-                  <a:txBody>
-                    <a:bodyPr/>
-                    <a:lstStyle/>
-                    <a:p>
-                      <a:pPr>
-                        <a:buNone/>
-                      </a:pPr>
-                      <a:r>
-                        <a:rPr lang="en-US" sz="1200"/>
-                        <a:t>Light rain</a:t>
+                        <a:rPr lang="en-US" sz="1100" b="1"/>
+                        <a:t>Heavy rain</a:t>
                       </a:r>
                     </a:p>
                   </a:txBody>
@@ -9568,8 +10020,53 @@
                         <a:buNone/>
                       </a:pPr>
                       <a:r>
-                        <a:rPr lang="en-US" sz="1200"/>
-                        <a:t>454</a:t>
+                        <a:rPr lang="en-US" sz="1100" b="1"/>
+                        <a:t>Snow</a:t>
+                      </a:r>
+                    </a:p>
+                  </a:txBody>
+                  <a:tcPr anchor="ctr">
+                    <a:lnL w="12700">
+                      <a:solidFill>
+                        <a:schemeClr val="tx1"/>
+                      </a:solidFill>
+                    </a:lnL>
+                    <a:lnR w="12700">
+                      <a:solidFill>
+                        <a:schemeClr val="tx1"/>
+                      </a:solidFill>
+                    </a:lnR>
+                    <a:lnT w="12700">
+                      <a:solidFill>
+                        <a:schemeClr val="tx1"/>
+                      </a:solidFill>
+                    </a:lnT>
+                    <a:lnB w="12700">
+                      <a:solidFill>
+                        <a:schemeClr val="tx1"/>
+                      </a:solidFill>
+                    </a:lnB>
+                    <a:noFill/>
+                  </a:tcPr>
+                </a:tc>
+                <a:extLst>
+                  <a:ext uri="{0D108BD9-81ED-4DB2-BD59-A6C34878D82A}">
+                    <a16:rowId xmlns:a16="http://schemas.microsoft.com/office/drawing/2014/main" val="1594128642"/>
+                  </a:ext>
+                </a:extLst>
+              </a:tr>
+              <a:tr h="221370">
+                <a:tc>
+                  <a:txBody>
+                    <a:bodyPr/>
+                    <a:lstStyle/>
+                    <a:p>
+                      <a:pPr>
+                        <a:buNone/>
+                      </a:pPr>
+                      <a:r>
+                        <a:rPr lang="en-US" sz="1100" dirty="0"/>
+                        <a:t>Bronx</a:t>
                       </a:r>
                     </a:p>
                   </a:txBody>
@@ -9606,53 +10103,8 @@
                         <a:buNone/>
                       </a:pPr>
                       <a:r>
-                        <a:rPr lang="en-US" sz="1200"/>
-                        <a:t>−2.0%</a:t>
-                      </a:r>
-                    </a:p>
-                  </a:txBody>
-                  <a:tcPr anchor="ctr">
-                    <a:lnL w="12700">
-                      <a:solidFill>
-                        <a:schemeClr val="tx1"/>
-                      </a:solidFill>
-                    </a:lnL>
-                    <a:lnR w="12700">
-                      <a:solidFill>
-                        <a:schemeClr val="tx1"/>
-                      </a:solidFill>
-                    </a:lnR>
-                    <a:lnT w="12700">
-                      <a:solidFill>
-                        <a:schemeClr val="tx1"/>
-                      </a:solidFill>
-                    </a:lnT>
-                    <a:lnB w="12700">
-                      <a:solidFill>
-                        <a:schemeClr val="tx1"/>
-                      </a:solidFill>
-                    </a:lnB>
-                    <a:noFill/>
-                  </a:tcPr>
-                </a:tc>
-                <a:extLst>
-                  <a:ext uri="{0D108BD9-81ED-4DB2-BD59-A6C34878D82A}">
-                    <a16:rowId xmlns:a16="http://schemas.microsoft.com/office/drawing/2014/main" val="442269309"/>
-                  </a:ext>
-                </a:extLst>
-              </a:tr>
-              <a:tr h="0">
-                <a:tc>
-                  <a:txBody>
-                    <a:bodyPr/>
-                    <a:lstStyle/>
-                    <a:p>
-                      <a:pPr>
-                        <a:buNone/>
-                      </a:pPr>
-                      <a:r>
-                        <a:rPr lang="en-US" sz="1200"/>
-                        <a:t>Heavy rain</a:t>
+                        <a:rPr lang="en-US" sz="1100" dirty="0"/>
+                        <a:t>−3.7%</a:t>
                       </a:r>
                     </a:p>
                   </a:txBody>
@@ -9689,8 +10141,8 @@
                         <a:buNone/>
                       </a:pPr>
                       <a:r>
-                        <a:rPr lang="en-US" sz="1200"/>
-                        <a:t>110</a:t>
+                        <a:rPr lang="en-US" sz="1100"/>
+                        <a:t>−10.3%</a:t>
                       </a:r>
                     </a:p>
                   </a:txBody>
@@ -9727,8 +10179,8 @@
                         <a:buNone/>
                       </a:pPr>
                       <a:r>
-                        <a:rPr lang="en-US" sz="1200"/>
-                        <a:t>−1.0%</a:t>
+                        <a:rPr lang="en-US" sz="1100"/>
+                        <a:t>−9.0%</a:t>
                       </a:r>
                     </a:p>
                   </a:txBody>
@@ -9758,11 +10210,11 @@
                 </a:tc>
                 <a:extLst>
                   <a:ext uri="{0D108BD9-81ED-4DB2-BD59-A6C34878D82A}">
-                    <a16:rowId xmlns:a16="http://schemas.microsoft.com/office/drawing/2014/main" val="4271105988"/>
+                    <a16:rowId xmlns:a16="http://schemas.microsoft.com/office/drawing/2014/main" val="3749489621"/>
                   </a:ext>
                 </a:extLst>
               </a:tr>
-              <a:tr h="0">
+              <a:tr h="221370">
                 <a:tc>
                   <a:txBody>
                     <a:bodyPr/>
@@ -9772,8 +10224,8 @@
                         <a:buNone/>
                       </a:pPr>
                       <a:r>
-                        <a:rPr lang="en-US" sz="1200" dirty="0"/>
-                        <a:t>Snow</a:t>
+                        <a:rPr lang="en-US" sz="1100"/>
+                        <a:t>Brooklyn</a:t>
                       </a:r>
                     </a:p>
                   </a:txBody>
@@ -9810,8 +10262,8 @@
                         <a:buNone/>
                       </a:pPr>
                       <a:r>
-                        <a:rPr lang="en-US" sz="1200"/>
-                        <a:t>64</a:t>
+                        <a:rPr lang="en-US" sz="1100" dirty="0"/>
+                        <a:t>−4.1%</a:t>
                       </a:r>
                     </a:p>
                   </a:txBody>
@@ -9848,291 +10300,8 @@
                         <a:buNone/>
                       </a:pPr>
                       <a:r>
-                        <a:rPr lang="en-US" sz="1200" dirty="0"/>
-                        <a:t>−4.8%</a:t>
-                      </a:r>
-                    </a:p>
-                  </a:txBody>
-                  <a:tcPr anchor="ctr">
-                    <a:lnL w="12700">
-                      <a:solidFill>
-                        <a:schemeClr val="tx1"/>
-                      </a:solidFill>
-                    </a:lnL>
-                    <a:lnR w="12700">
-                      <a:solidFill>
-                        <a:schemeClr val="tx1"/>
-                      </a:solidFill>
-                    </a:lnR>
-                    <a:lnT w="12700">
-                      <a:solidFill>
-                        <a:schemeClr val="tx1"/>
-                      </a:solidFill>
-                    </a:lnT>
-                    <a:lnB w="12700">
-                      <a:solidFill>
-                        <a:schemeClr val="tx1"/>
-                      </a:solidFill>
-                    </a:lnB>
-                    <a:noFill/>
-                  </a:tcPr>
-                </a:tc>
-                <a:extLst>
-                  <a:ext uri="{0D108BD9-81ED-4DB2-BD59-A6C34878D82A}">
-                    <a16:rowId xmlns:a16="http://schemas.microsoft.com/office/drawing/2014/main" val="2094425736"/>
-                  </a:ext>
-                </a:extLst>
-              </a:tr>
-            </a:tbl>
-          </a:graphicData>
-        </a:graphic>
-      </p:graphicFrame>
-      <p:sp>
-        <p:nvSpPr>
-          <p:cNvPr id="12" name="TextBox 11">
-            <a:extLst>
-              <a:ext uri="{FF2B5EF4-FFF2-40B4-BE49-F238E27FC236}">
-                <a16:creationId xmlns:a16="http://schemas.microsoft.com/office/drawing/2014/main" id="{17EDA13E-6EE3-01D4-306D-85F934E94F82}"/>
-              </a:ext>
-            </a:extLst>
-          </p:cNvPr>
-          <p:cNvSpPr txBox="1"/>
-          <p:nvPr/>
-        </p:nvSpPr>
-        <p:spPr>
-          <a:xfrm>
-            <a:off x="21716" y="2567258"/>
-            <a:ext cx="6799705" cy="276999"/>
-          </a:xfrm>
-          <a:prstGeom prst="rect">
-            <a:avLst/>
-          </a:prstGeom>
-          <a:noFill/>
-        </p:spPr>
-        <p:txBody>
-          <a:bodyPr rot="0" spcFirstLastPara="0" vertOverflow="overflow" horzOverflow="overflow" vert="horz" wrap="square" lIns="91440" tIns="45720" rIns="91440" bIns="45720" numCol="1" spcCol="0" rtlCol="0" fromWordArt="0" anchor="t" anchorCtr="0" forceAA="0" compatLnSpc="1">
-            <a:prstTxWarp prst="textNoShape">
-              <a:avLst/>
-            </a:prstTxWarp>
-            <a:spAutoFit/>
-          </a:bodyPr>
-          <a:lstStyle/>
-          <a:p>
-            <a:r>
-              <a:rPr lang="en-US" sz="1200" dirty="0"/>
-              <a:t>Snow causes the largest estimated network-wide decrease, at 4.8%</a:t>
-            </a:r>
-            <a:endParaRPr lang="en-US" sz="1200" dirty="0">
-              <a:ea typeface="Calibri"/>
-              <a:cs typeface="Calibri"/>
-            </a:endParaRPr>
-          </a:p>
-        </p:txBody>
-      </p:sp>
-      <p:sp>
-        <p:nvSpPr>
-          <p:cNvPr id="14" name="Text 10">
-            <a:extLst>
-              <a:ext uri="{FF2B5EF4-FFF2-40B4-BE49-F238E27FC236}">
-                <a16:creationId xmlns:a16="http://schemas.microsoft.com/office/drawing/2014/main" id="{098B1602-C987-C3AD-4517-736C0A21C0D2}"/>
-              </a:ext>
-            </a:extLst>
-          </p:cNvPr>
-          <p:cNvSpPr txBox="1"/>
-          <p:nvPr/>
-        </p:nvSpPr>
-        <p:spPr>
-          <a:xfrm>
-            <a:off x="185161" y="2840296"/>
-            <a:ext cx="2977734" cy="396696"/>
-          </a:xfrm>
-          <a:prstGeom prst="rect">
-            <a:avLst/>
-          </a:prstGeom>
-          <a:noFill/>
-          <a:ln/>
-        </p:spPr>
-        <p:txBody>
-          <a:bodyPr wrap="square" lIns="0" tIns="0" rIns="0" bIns="0" rtlCol="0" anchor="ctr"/>
-          <a:lstStyle>
-            <a:lvl1pPr marL="0" algn="l" defTabSz="914400" rtl="0" eaLnBrk="1" latinLnBrk="0" hangingPunct="1">
-              <a:defRPr sz="1800" kern="1200">
-                <a:solidFill>
-                  <a:schemeClr val="tx1"/>
-                </a:solidFill>
-                <a:latin typeface="+mn-lt"/>
-                <a:ea typeface="+mn-ea"/>
-                <a:cs typeface="+mn-cs"/>
-              </a:defRPr>
-            </a:lvl1pPr>
-            <a:lvl2pPr marL="457200" algn="l" defTabSz="914400" rtl="0" eaLnBrk="1" latinLnBrk="0" hangingPunct="1">
-              <a:defRPr sz="1800" kern="1200">
-                <a:solidFill>
-                  <a:schemeClr val="tx1"/>
-                </a:solidFill>
-                <a:latin typeface="+mn-lt"/>
-                <a:ea typeface="+mn-ea"/>
-                <a:cs typeface="+mn-cs"/>
-              </a:defRPr>
-            </a:lvl2pPr>
-            <a:lvl3pPr marL="914400" algn="l" defTabSz="914400" rtl="0" eaLnBrk="1" latinLnBrk="0" hangingPunct="1">
-              <a:defRPr sz="1800" kern="1200">
-                <a:solidFill>
-                  <a:schemeClr val="tx1"/>
-                </a:solidFill>
-                <a:latin typeface="+mn-lt"/>
-                <a:ea typeface="+mn-ea"/>
-                <a:cs typeface="+mn-cs"/>
-              </a:defRPr>
-            </a:lvl3pPr>
-            <a:lvl4pPr marL="1371600" algn="l" defTabSz="914400" rtl="0" eaLnBrk="1" latinLnBrk="0" hangingPunct="1">
-              <a:defRPr sz="1800" kern="1200">
-                <a:solidFill>
-                  <a:schemeClr val="tx1"/>
-                </a:solidFill>
-                <a:latin typeface="+mn-lt"/>
-                <a:ea typeface="+mn-ea"/>
-                <a:cs typeface="+mn-cs"/>
-              </a:defRPr>
-            </a:lvl4pPr>
-            <a:lvl5pPr marL="1828800" algn="l" defTabSz="914400" rtl="0" eaLnBrk="1" latinLnBrk="0" hangingPunct="1">
-              <a:defRPr sz="1800" kern="1200">
-                <a:solidFill>
-                  <a:schemeClr val="tx1"/>
-                </a:solidFill>
-                <a:latin typeface="+mn-lt"/>
-                <a:ea typeface="+mn-ea"/>
-                <a:cs typeface="+mn-cs"/>
-              </a:defRPr>
-            </a:lvl5pPr>
-            <a:lvl6pPr marL="2286000" algn="l" defTabSz="914400" rtl="0" eaLnBrk="1" latinLnBrk="0" hangingPunct="1">
-              <a:defRPr sz="1800" kern="1200">
-                <a:solidFill>
-                  <a:schemeClr val="tx1"/>
-                </a:solidFill>
-                <a:latin typeface="+mn-lt"/>
-                <a:ea typeface="+mn-ea"/>
-                <a:cs typeface="+mn-cs"/>
-              </a:defRPr>
-            </a:lvl6pPr>
-            <a:lvl7pPr marL="2743200" algn="l" defTabSz="914400" rtl="0" eaLnBrk="1" latinLnBrk="0" hangingPunct="1">
-              <a:defRPr sz="1800" kern="1200">
-                <a:solidFill>
-                  <a:schemeClr val="tx1"/>
-                </a:solidFill>
-                <a:latin typeface="+mn-lt"/>
-                <a:ea typeface="+mn-ea"/>
-                <a:cs typeface="+mn-cs"/>
-              </a:defRPr>
-            </a:lvl7pPr>
-            <a:lvl8pPr marL="3200400" algn="l" defTabSz="914400" rtl="0" eaLnBrk="1" latinLnBrk="0" hangingPunct="1">
-              <a:defRPr sz="1800" kern="1200">
-                <a:solidFill>
-                  <a:schemeClr val="tx1"/>
-                </a:solidFill>
-                <a:latin typeface="+mn-lt"/>
-                <a:ea typeface="+mn-ea"/>
-                <a:cs typeface="+mn-cs"/>
-              </a:defRPr>
-            </a:lvl8pPr>
-            <a:lvl9pPr marL="3657600" algn="l" defTabSz="914400" rtl="0" eaLnBrk="1" latinLnBrk="0" hangingPunct="1">
-              <a:defRPr sz="1800" kern="1200">
-                <a:solidFill>
-                  <a:schemeClr val="tx1"/>
-                </a:solidFill>
-                <a:latin typeface="+mn-lt"/>
-                <a:ea typeface="+mn-ea"/>
-                <a:cs typeface="+mn-cs"/>
-              </a:defRPr>
-            </a:lvl9pPr>
-          </a:lstStyle>
-          <a:p>
-            <a:r>
-              <a:rPr lang="en-US" sz="1400" b="1" dirty="0">
-                <a:ea typeface="+mn-lt"/>
-                <a:cs typeface="+mn-lt"/>
-              </a:rPr>
-              <a:t>2.       Differences between boroughs</a:t>
-            </a:r>
-            <a:endParaRPr lang="en-US" sz="1400" b="1" dirty="0">
-              <a:ea typeface="Calibri"/>
-              <a:cs typeface="Calibri"/>
-            </a:endParaRPr>
-          </a:p>
-        </p:txBody>
-      </p:sp>
-      <p:graphicFrame>
-        <p:nvGraphicFramePr>
-          <p:cNvPr id="17" name="Table 16">
-            <a:extLst>
-              <a:ext uri="{FF2B5EF4-FFF2-40B4-BE49-F238E27FC236}">
-                <a16:creationId xmlns:a16="http://schemas.microsoft.com/office/drawing/2014/main" id="{16C22357-ADC1-1630-4809-E424F6893AD5}"/>
-              </a:ext>
-            </a:extLst>
-          </p:cNvPr>
-          <p:cNvGraphicFramePr>
-            <a:graphicFrameLocks noGrp="1"/>
-          </p:cNvGraphicFramePr>
-          <p:nvPr>
-            <p:extLst>
-              <p:ext uri="{D42A27DB-BD31-4B8C-83A1-F6EECF244321}">
-                <p14:modId xmlns:p14="http://schemas.microsoft.com/office/powerpoint/2010/main" val="266828142"/>
-              </p:ext>
-            </p:extLst>
-          </p:nvPr>
-        </p:nvGraphicFramePr>
-        <p:xfrm>
-          <a:off x="17147" y="3241204"/>
-          <a:ext cx="7562852" cy="1402080"/>
-        </p:xfrm>
-        <a:graphic>
-          <a:graphicData uri="http://schemas.openxmlformats.org/drawingml/2006/table">
-            <a:tbl>
-              <a:tblPr bandRow="1">
-                <a:tableStyleId>{5C22544A-7EE6-4342-B048-85BDC9FD1C3A}</a:tableStyleId>
-              </a:tblPr>
-              <a:tblGrid>
-                <a:gridCol w="1890713">
-                  <a:extLst>
-                    <a:ext uri="{9D8B030D-6E8A-4147-A177-3AD203B41FA5}">
-                      <a16:colId xmlns:a16="http://schemas.microsoft.com/office/drawing/2014/main" val="129859399"/>
-                    </a:ext>
-                  </a:extLst>
-                </a:gridCol>
-                <a:gridCol w="1890713">
-                  <a:extLst>
-                    <a:ext uri="{9D8B030D-6E8A-4147-A177-3AD203B41FA5}">
-                      <a16:colId xmlns:a16="http://schemas.microsoft.com/office/drawing/2014/main" val="4230606441"/>
-                    </a:ext>
-                  </a:extLst>
-                </a:gridCol>
-                <a:gridCol w="1890713">
-                  <a:extLst>
-                    <a:ext uri="{9D8B030D-6E8A-4147-A177-3AD203B41FA5}">
-                      <a16:colId xmlns:a16="http://schemas.microsoft.com/office/drawing/2014/main" val="389008135"/>
-                    </a:ext>
-                  </a:extLst>
-                </a:gridCol>
-                <a:gridCol w="1890713">
-                  <a:extLst>
-                    <a:ext uri="{9D8B030D-6E8A-4147-A177-3AD203B41FA5}">
-                      <a16:colId xmlns:a16="http://schemas.microsoft.com/office/drawing/2014/main" val="2395327052"/>
-                    </a:ext>
-                  </a:extLst>
-                </a:gridCol>
-              </a:tblGrid>
-              <a:tr h="0">
-                <a:tc>
-                  <a:txBody>
-                    <a:bodyPr/>
-                    <a:lstStyle/>
-                    <a:p>
-                      <a:pPr>
-                        <a:buNone/>
-                      </a:pPr>
-                      <a:r>
-                        <a:rPr lang="en-US" sz="1400" b="1"/>
-                        <a:t>Borough</a:t>
+                        <a:rPr lang="en-US" sz="1100"/>
+                        <a:t>−5.7%</a:t>
                       </a:r>
                     </a:p>
                   </a:txBody>
@@ -10169,8 +10338,53 @@
                         <a:buNone/>
                       </a:pPr>
                       <a:r>
-                        <a:rPr lang="en-US" sz="1400" b="1"/>
-                        <a:t>Light rain</a:t>
+                        <a:rPr lang="en-US" sz="1100"/>
+                        <a:t>−8.7%</a:t>
+                      </a:r>
+                    </a:p>
+                  </a:txBody>
+                  <a:tcPr anchor="ctr">
+                    <a:lnL w="12700">
+                      <a:solidFill>
+                        <a:schemeClr val="tx1"/>
+                      </a:solidFill>
+                    </a:lnL>
+                    <a:lnR w="12700">
+                      <a:solidFill>
+                        <a:schemeClr val="tx1"/>
+                      </a:solidFill>
+                    </a:lnR>
+                    <a:lnT w="12700">
+                      <a:solidFill>
+                        <a:schemeClr val="tx1"/>
+                      </a:solidFill>
+                    </a:lnT>
+                    <a:lnB w="12700">
+                      <a:solidFill>
+                        <a:schemeClr val="tx1"/>
+                      </a:solidFill>
+                    </a:lnB>
+                    <a:noFill/>
+                  </a:tcPr>
+                </a:tc>
+                <a:extLst>
+                  <a:ext uri="{0D108BD9-81ED-4DB2-BD59-A6C34878D82A}">
+                    <a16:rowId xmlns:a16="http://schemas.microsoft.com/office/drawing/2014/main" val="3070809532"/>
+                  </a:ext>
+                </a:extLst>
+              </a:tr>
+              <a:tr h="221370">
+                <a:tc>
+                  <a:txBody>
+                    <a:bodyPr/>
+                    <a:lstStyle/>
+                    <a:p>
+                      <a:pPr>
+                        <a:buNone/>
+                      </a:pPr>
+                      <a:r>
+                        <a:rPr lang="en-US" sz="1100" dirty="0"/>
+                        <a:t>Manhattan</a:t>
                       </a:r>
                     </a:p>
                   </a:txBody>
@@ -10207,8 +10421,8 @@
                         <a:buNone/>
                       </a:pPr>
                       <a:r>
-                        <a:rPr lang="en-US" sz="1400" b="1"/>
-                        <a:t>Heavy rain</a:t>
+                        <a:rPr lang="en-US" sz="1100" dirty="0"/>
+                        <a:t>−0.3%</a:t>
                       </a:r>
                     </a:p>
                   </a:txBody>
@@ -10245,53 +10459,8 @@
                         <a:buNone/>
                       </a:pPr>
                       <a:r>
-                        <a:rPr lang="en-US" sz="1400" b="1"/>
-                        <a:t>Snow</a:t>
-                      </a:r>
-                    </a:p>
-                  </a:txBody>
-                  <a:tcPr anchor="ctr">
-                    <a:lnL w="12700">
-                      <a:solidFill>
-                        <a:schemeClr val="tx1"/>
-                      </a:solidFill>
-                    </a:lnL>
-                    <a:lnR w="12700">
-                      <a:solidFill>
-                        <a:schemeClr val="tx1"/>
-                      </a:solidFill>
-                    </a:lnR>
-                    <a:lnT w="12700">
-                      <a:solidFill>
-                        <a:schemeClr val="tx1"/>
-                      </a:solidFill>
-                    </a:lnT>
-                    <a:lnB w="12700">
-                      <a:solidFill>
-                        <a:schemeClr val="tx1"/>
-                      </a:solidFill>
-                    </a:lnB>
-                    <a:noFill/>
-                  </a:tcPr>
-                </a:tc>
-                <a:extLst>
-                  <a:ext uri="{0D108BD9-81ED-4DB2-BD59-A6C34878D82A}">
-                    <a16:rowId xmlns:a16="http://schemas.microsoft.com/office/drawing/2014/main" val="1594128642"/>
-                  </a:ext>
-                </a:extLst>
-              </a:tr>
-              <a:tr h="0">
-                <a:tc>
-                  <a:txBody>
-                    <a:bodyPr/>
-                    <a:lstStyle/>
-                    <a:p>
-                      <a:pPr>
-                        <a:buNone/>
-                      </a:pPr>
-                      <a:r>
-                        <a:rPr lang="en-US" sz="1200"/>
-                        <a:t>Bronx</a:t>
+                        <a:rPr lang="en-US" sz="1100"/>
+                        <a:t>+3.2%</a:t>
                       </a:r>
                     </a:p>
                   </a:txBody>
@@ -10328,8 +10497,53 @@
                         <a:buNone/>
                       </a:pPr>
                       <a:r>
-                        <a:rPr lang="en-US" sz="1200"/>
-                        <a:t>−3.7%</a:t>
+                        <a:rPr lang="en-US" sz="1100"/>
+                        <a:t>−2.1%</a:t>
+                      </a:r>
+                    </a:p>
+                  </a:txBody>
+                  <a:tcPr anchor="ctr">
+                    <a:lnL w="12700">
+                      <a:solidFill>
+                        <a:schemeClr val="tx1"/>
+                      </a:solidFill>
+                    </a:lnL>
+                    <a:lnR w="12700">
+                      <a:solidFill>
+                        <a:schemeClr val="tx1"/>
+                      </a:solidFill>
+                    </a:lnR>
+                    <a:lnT w="12700">
+                      <a:solidFill>
+                        <a:schemeClr val="tx1"/>
+                      </a:solidFill>
+                    </a:lnT>
+                    <a:lnB w="12700">
+                      <a:solidFill>
+                        <a:schemeClr val="tx1"/>
+                      </a:solidFill>
+                    </a:lnB>
+                    <a:noFill/>
+                  </a:tcPr>
+                </a:tc>
+                <a:extLst>
+                  <a:ext uri="{0D108BD9-81ED-4DB2-BD59-A6C34878D82A}">
+                    <a16:rowId xmlns:a16="http://schemas.microsoft.com/office/drawing/2014/main" val="522229745"/>
+                  </a:ext>
+                </a:extLst>
+              </a:tr>
+              <a:tr h="221370">
+                <a:tc>
+                  <a:txBody>
+                    <a:bodyPr/>
+                    <a:lstStyle/>
+                    <a:p>
+                      <a:pPr>
+                        <a:buNone/>
+                      </a:pPr>
+                      <a:r>
+                        <a:rPr lang="en-US" sz="1100" dirty="0"/>
+                        <a:t>Queens</a:t>
                       </a:r>
                     </a:p>
                   </a:txBody>
@@ -10366,8 +10580,8 @@
                         <a:buNone/>
                       </a:pPr>
                       <a:r>
-                        <a:rPr lang="en-US" sz="1200"/>
-                        <a:t>−10.3%</a:t>
+                        <a:rPr lang="en-US" sz="1100"/>
+                        <a:t>−4.2%</a:t>
                       </a:r>
                     </a:p>
                   </a:txBody>
@@ -10404,53 +10618,8 @@
                         <a:buNone/>
                       </a:pPr>
                       <a:r>
-                        <a:rPr lang="en-US" sz="1200"/>
-                        <a:t>−9.0%</a:t>
-                      </a:r>
-                    </a:p>
-                  </a:txBody>
-                  <a:tcPr anchor="ctr">
-                    <a:lnL w="12700">
-                      <a:solidFill>
-                        <a:schemeClr val="tx1"/>
-                      </a:solidFill>
-                    </a:lnL>
-                    <a:lnR w="12700">
-                      <a:solidFill>
-                        <a:schemeClr val="tx1"/>
-                      </a:solidFill>
-                    </a:lnR>
-                    <a:lnT w="12700">
-                      <a:solidFill>
-                        <a:schemeClr val="tx1"/>
-                      </a:solidFill>
-                    </a:lnT>
-                    <a:lnB w="12700">
-                      <a:solidFill>
-                        <a:schemeClr val="tx1"/>
-                      </a:solidFill>
-                    </a:lnB>
-                    <a:noFill/>
-                  </a:tcPr>
-                </a:tc>
-                <a:extLst>
-                  <a:ext uri="{0D108BD9-81ED-4DB2-BD59-A6C34878D82A}">
-                    <a16:rowId xmlns:a16="http://schemas.microsoft.com/office/drawing/2014/main" val="3749489621"/>
-                  </a:ext>
-                </a:extLst>
-              </a:tr>
-              <a:tr h="0">
-                <a:tc>
-                  <a:txBody>
-                    <a:bodyPr/>
-                    <a:lstStyle/>
-                    <a:p>
-                      <a:pPr>
-                        <a:buNone/>
-                      </a:pPr>
-                      <a:r>
-                        <a:rPr lang="en-US" sz="1200"/>
-                        <a:t>Brooklyn</a:t>
+                        <a:rPr lang="en-US" sz="1100" dirty="0"/>
+                        <a:t>−7.1%</a:t>
                       </a:r>
                     </a:p>
                   </a:txBody>
@@ -10487,401 +10656,7 @@
                         <a:buNone/>
                       </a:pPr>
                       <a:r>
-                        <a:rPr lang="en-US" sz="1200"/>
-                        <a:t>−4.1%</a:t>
-                      </a:r>
-                    </a:p>
-                  </a:txBody>
-                  <a:tcPr anchor="ctr">
-                    <a:lnL w="12700">
-                      <a:solidFill>
-                        <a:schemeClr val="tx1"/>
-                      </a:solidFill>
-                    </a:lnL>
-                    <a:lnR w="12700">
-                      <a:solidFill>
-                        <a:schemeClr val="tx1"/>
-                      </a:solidFill>
-                    </a:lnR>
-                    <a:lnT w="12700">
-                      <a:solidFill>
-                        <a:schemeClr val="tx1"/>
-                      </a:solidFill>
-                    </a:lnT>
-                    <a:lnB w="12700">
-                      <a:solidFill>
-                        <a:schemeClr val="tx1"/>
-                      </a:solidFill>
-                    </a:lnB>
-                    <a:noFill/>
-                  </a:tcPr>
-                </a:tc>
-                <a:tc>
-                  <a:txBody>
-                    <a:bodyPr/>
-                    <a:lstStyle/>
-                    <a:p>
-                      <a:pPr>
-                        <a:buNone/>
-                      </a:pPr>
-                      <a:r>
-                        <a:rPr lang="en-US" sz="1200"/>
-                        <a:t>−5.7%</a:t>
-                      </a:r>
-                    </a:p>
-                  </a:txBody>
-                  <a:tcPr anchor="ctr">
-                    <a:lnL w="12700">
-                      <a:solidFill>
-                        <a:schemeClr val="tx1"/>
-                      </a:solidFill>
-                    </a:lnL>
-                    <a:lnR w="12700">
-                      <a:solidFill>
-                        <a:schemeClr val="tx1"/>
-                      </a:solidFill>
-                    </a:lnR>
-                    <a:lnT w="12700">
-                      <a:solidFill>
-                        <a:schemeClr val="tx1"/>
-                      </a:solidFill>
-                    </a:lnT>
-                    <a:lnB w="12700">
-                      <a:solidFill>
-                        <a:schemeClr val="tx1"/>
-                      </a:solidFill>
-                    </a:lnB>
-                    <a:noFill/>
-                  </a:tcPr>
-                </a:tc>
-                <a:tc>
-                  <a:txBody>
-                    <a:bodyPr/>
-                    <a:lstStyle/>
-                    <a:p>
-                      <a:pPr>
-                        <a:buNone/>
-                      </a:pPr>
-                      <a:r>
-                        <a:rPr lang="en-US" sz="1200"/>
-                        <a:t>−8.7%</a:t>
-                      </a:r>
-                    </a:p>
-                  </a:txBody>
-                  <a:tcPr anchor="ctr">
-                    <a:lnL w="12700">
-                      <a:solidFill>
-                        <a:schemeClr val="tx1"/>
-                      </a:solidFill>
-                    </a:lnL>
-                    <a:lnR w="12700">
-                      <a:solidFill>
-                        <a:schemeClr val="tx1"/>
-                      </a:solidFill>
-                    </a:lnR>
-                    <a:lnT w="12700">
-                      <a:solidFill>
-                        <a:schemeClr val="tx1"/>
-                      </a:solidFill>
-                    </a:lnT>
-                    <a:lnB w="12700">
-                      <a:solidFill>
-                        <a:schemeClr val="tx1"/>
-                      </a:solidFill>
-                    </a:lnB>
-                    <a:noFill/>
-                  </a:tcPr>
-                </a:tc>
-                <a:extLst>
-                  <a:ext uri="{0D108BD9-81ED-4DB2-BD59-A6C34878D82A}">
-                    <a16:rowId xmlns:a16="http://schemas.microsoft.com/office/drawing/2014/main" val="3070809532"/>
-                  </a:ext>
-                </a:extLst>
-              </a:tr>
-              <a:tr h="0">
-                <a:tc>
-                  <a:txBody>
-                    <a:bodyPr/>
-                    <a:lstStyle/>
-                    <a:p>
-                      <a:pPr>
-                        <a:buNone/>
-                      </a:pPr>
-                      <a:r>
-                        <a:rPr lang="en-US" sz="1200" dirty="0"/>
-                        <a:t>Manhattan</a:t>
-                      </a:r>
-                    </a:p>
-                  </a:txBody>
-                  <a:tcPr anchor="ctr">
-                    <a:lnL w="12700">
-                      <a:solidFill>
-                        <a:schemeClr val="tx1"/>
-                      </a:solidFill>
-                    </a:lnL>
-                    <a:lnR w="12700">
-                      <a:solidFill>
-                        <a:schemeClr val="tx1"/>
-                      </a:solidFill>
-                    </a:lnR>
-                    <a:lnT w="12700">
-                      <a:solidFill>
-                        <a:schemeClr val="tx1"/>
-                      </a:solidFill>
-                    </a:lnT>
-                    <a:lnB w="12700">
-                      <a:solidFill>
-                        <a:schemeClr val="tx1"/>
-                      </a:solidFill>
-                    </a:lnB>
-                    <a:noFill/>
-                  </a:tcPr>
-                </a:tc>
-                <a:tc>
-                  <a:txBody>
-                    <a:bodyPr/>
-                    <a:lstStyle/>
-                    <a:p>
-                      <a:pPr>
-                        <a:buNone/>
-                      </a:pPr>
-                      <a:r>
-                        <a:rPr lang="en-US" sz="1200"/>
-                        <a:t>−0.3%</a:t>
-                      </a:r>
-                    </a:p>
-                  </a:txBody>
-                  <a:tcPr anchor="ctr">
-                    <a:lnL w="12700">
-                      <a:solidFill>
-                        <a:schemeClr val="tx1"/>
-                      </a:solidFill>
-                    </a:lnL>
-                    <a:lnR w="12700">
-                      <a:solidFill>
-                        <a:schemeClr val="tx1"/>
-                      </a:solidFill>
-                    </a:lnR>
-                    <a:lnT w="12700">
-                      <a:solidFill>
-                        <a:schemeClr val="tx1"/>
-                      </a:solidFill>
-                    </a:lnT>
-                    <a:lnB w="12700">
-                      <a:solidFill>
-                        <a:schemeClr val="tx1"/>
-                      </a:solidFill>
-                    </a:lnB>
-                    <a:noFill/>
-                  </a:tcPr>
-                </a:tc>
-                <a:tc>
-                  <a:txBody>
-                    <a:bodyPr/>
-                    <a:lstStyle/>
-                    <a:p>
-                      <a:pPr>
-                        <a:buNone/>
-                      </a:pPr>
-                      <a:r>
-                        <a:rPr lang="en-US" sz="1200"/>
-                        <a:t>+3.2%</a:t>
-                      </a:r>
-                    </a:p>
-                  </a:txBody>
-                  <a:tcPr anchor="ctr">
-                    <a:lnL w="12700">
-                      <a:solidFill>
-                        <a:schemeClr val="tx1"/>
-                      </a:solidFill>
-                    </a:lnL>
-                    <a:lnR w="12700">
-                      <a:solidFill>
-                        <a:schemeClr val="tx1"/>
-                      </a:solidFill>
-                    </a:lnR>
-                    <a:lnT w="12700">
-                      <a:solidFill>
-                        <a:schemeClr val="tx1"/>
-                      </a:solidFill>
-                    </a:lnT>
-                    <a:lnB w="12700">
-                      <a:solidFill>
-                        <a:schemeClr val="tx1"/>
-                      </a:solidFill>
-                    </a:lnB>
-                    <a:noFill/>
-                  </a:tcPr>
-                </a:tc>
-                <a:tc>
-                  <a:txBody>
-                    <a:bodyPr/>
-                    <a:lstStyle/>
-                    <a:p>
-                      <a:pPr>
-                        <a:buNone/>
-                      </a:pPr>
-                      <a:r>
-                        <a:rPr lang="en-US" sz="1200"/>
-                        <a:t>−2.1%</a:t>
-                      </a:r>
-                    </a:p>
-                  </a:txBody>
-                  <a:tcPr anchor="ctr">
-                    <a:lnL w="12700">
-                      <a:solidFill>
-                        <a:schemeClr val="tx1"/>
-                      </a:solidFill>
-                    </a:lnL>
-                    <a:lnR w="12700">
-                      <a:solidFill>
-                        <a:schemeClr val="tx1"/>
-                      </a:solidFill>
-                    </a:lnR>
-                    <a:lnT w="12700">
-                      <a:solidFill>
-                        <a:schemeClr val="tx1"/>
-                      </a:solidFill>
-                    </a:lnT>
-                    <a:lnB w="12700">
-                      <a:solidFill>
-                        <a:schemeClr val="tx1"/>
-                      </a:solidFill>
-                    </a:lnB>
-                    <a:noFill/>
-                  </a:tcPr>
-                </a:tc>
-                <a:extLst>
-                  <a:ext uri="{0D108BD9-81ED-4DB2-BD59-A6C34878D82A}">
-                    <a16:rowId xmlns:a16="http://schemas.microsoft.com/office/drawing/2014/main" val="522229745"/>
-                  </a:ext>
-                </a:extLst>
-              </a:tr>
-              <a:tr h="0">
-                <a:tc>
-                  <a:txBody>
-                    <a:bodyPr/>
-                    <a:lstStyle/>
-                    <a:p>
-                      <a:pPr>
-                        <a:buNone/>
-                      </a:pPr>
-                      <a:r>
-                        <a:rPr lang="en-US" sz="1200" dirty="0"/>
-                        <a:t>Queens</a:t>
-                      </a:r>
-                    </a:p>
-                  </a:txBody>
-                  <a:tcPr anchor="ctr">
-                    <a:lnL w="12700">
-                      <a:solidFill>
-                        <a:schemeClr val="tx1"/>
-                      </a:solidFill>
-                    </a:lnL>
-                    <a:lnR w="12700">
-                      <a:solidFill>
-                        <a:schemeClr val="tx1"/>
-                      </a:solidFill>
-                    </a:lnR>
-                    <a:lnT w="12700">
-                      <a:solidFill>
-                        <a:schemeClr val="tx1"/>
-                      </a:solidFill>
-                    </a:lnT>
-                    <a:lnB w="12700">
-                      <a:solidFill>
-                        <a:schemeClr val="tx1"/>
-                      </a:solidFill>
-                    </a:lnB>
-                    <a:noFill/>
-                  </a:tcPr>
-                </a:tc>
-                <a:tc>
-                  <a:txBody>
-                    <a:bodyPr/>
-                    <a:lstStyle/>
-                    <a:p>
-                      <a:pPr>
-                        <a:buNone/>
-                      </a:pPr>
-                      <a:r>
-                        <a:rPr lang="en-US" sz="1200"/>
-                        <a:t>−4.2%</a:t>
-                      </a:r>
-                    </a:p>
-                  </a:txBody>
-                  <a:tcPr anchor="ctr">
-                    <a:lnL w="12700">
-                      <a:solidFill>
-                        <a:schemeClr val="tx1"/>
-                      </a:solidFill>
-                    </a:lnL>
-                    <a:lnR w="12700">
-                      <a:solidFill>
-                        <a:schemeClr val="tx1"/>
-                      </a:solidFill>
-                    </a:lnR>
-                    <a:lnT w="12700">
-                      <a:solidFill>
-                        <a:schemeClr val="tx1"/>
-                      </a:solidFill>
-                    </a:lnT>
-                    <a:lnB w="12700">
-                      <a:solidFill>
-                        <a:schemeClr val="tx1"/>
-                      </a:solidFill>
-                    </a:lnB>
-                    <a:noFill/>
-                  </a:tcPr>
-                </a:tc>
-                <a:tc>
-                  <a:txBody>
-                    <a:bodyPr/>
-                    <a:lstStyle/>
-                    <a:p>
-                      <a:pPr>
-                        <a:buNone/>
-                      </a:pPr>
-                      <a:r>
-                        <a:rPr lang="en-US" sz="1200"/>
-                        <a:t>−7.1%</a:t>
-                      </a:r>
-                    </a:p>
-                  </a:txBody>
-                  <a:tcPr anchor="ctr">
-                    <a:lnL w="12700">
-                      <a:solidFill>
-                        <a:schemeClr val="tx1"/>
-                      </a:solidFill>
-                    </a:lnL>
-                    <a:lnR w="12700">
-                      <a:solidFill>
-                        <a:schemeClr val="tx1"/>
-                      </a:solidFill>
-                    </a:lnR>
-                    <a:lnT w="12700">
-                      <a:solidFill>
-                        <a:schemeClr val="tx1"/>
-                      </a:solidFill>
-                    </a:lnT>
-                    <a:lnB w="12700">
-                      <a:solidFill>
-                        <a:schemeClr val="tx1"/>
-                      </a:solidFill>
-                    </a:lnB>
-                    <a:noFill/>
-                  </a:tcPr>
-                </a:tc>
-                <a:tc>
-                  <a:txBody>
-                    <a:bodyPr/>
-                    <a:lstStyle/>
-                    <a:p>
-                      <a:pPr>
-                        <a:buNone/>
-                      </a:pPr>
-                      <a:r>
-                        <a:rPr lang="en-US" sz="1200" dirty="0"/>
+                        <a:rPr lang="en-US" sz="1100" dirty="0"/>
                         <a:t>−8.6%</a:t>
                       </a:r>
                     </a:p>
@@ -10922,10 +10697,10 @@
       </p:graphicFrame>
       <p:sp>
         <p:nvSpPr>
-          <p:cNvPr id="18" name="TextBox 17">
+          <p:cNvPr id="29" name="ZoneTexte 9">
             <a:extLst>
               <a:ext uri="{FF2B5EF4-FFF2-40B4-BE49-F238E27FC236}">
-                <a16:creationId xmlns:a16="http://schemas.microsoft.com/office/drawing/2014/main" id="{4FCA6095-F9B4-34A5-1888-DBEE4D1A29A6}"/>
+                <a16:creationId xmlns:a16="http://schemas.microsoft.com/office/drawing/2014/main" id="{4BD4F4BE-D3CB-898F-B47A-E0E0499EB0A8}"/>
               </a:ext>
             </a:extLst>
           </p:cNvPr>
@@ -10934,8 +10709,83 @@
         </p:nvSpPr>
         <p:spPr>
           <a:xfrm>
-            <a:off x="21713" y="4699897"/>
-            <a:ext cx="7365632" cy="646331"/>
+            <a:off x="-589" y="5739640"/>
+            <a:ext cx="7562849" cy="430887"/>
+          </a:xfrm>
+          <a:prstGeom prst="rect">
+            <a:avLst/>
+          </a:prstGeom>
+          <a:noFill/>
+        </p:spPr>
+        <p:txBody>
+          <a:bodyPr wrap="square" lIns="91440" tIns="45720" rIns="91440" bIns="45720" rtlCol="0" anchor="t">
+            <a:spAutoFit/>
+          </a:bodyPr>
+          <a:lstStyle/>
+          <a:p>
+            <a:pPr marL="171450" indent="-171450">
+              <a:buFont typeface="Arial" panose="020B0604020202020204" pitchFamily="34" charset="0"/>
+              <a:buChar char="•"/>
+            </a:pPr>
+            <a:r>
+              <a:rPr lang="en-US" sz="1100" dirty="0">
+                <a:ea typeface="+mn-lt"/>
+                <a:cs typeface="+mn-lt"/>
+              </a:rPr>
+              <a:t>The weather table has 317 records with a missing </a:t>
+            </a:r>
+            <a:r>
+              <a:rPr lang="en-US" sz="1100" dirty="0">
+                <a:latin typeface="Consolas"/>
+                <a:ea typeface="+mn-lt"/>
+                <a:cs typeface="+mn-lt"/>
+              </a:rPr>
+              <a:t>condition</a:t>
+            </a:r>
+            <a:r>
+              <a:rPr lang="en-US" sz="1100" dirty="0">
+                <a:ea typeface="+mn-lt"/>
+                <a:cs typeface="+mn-lt"/>
+              </a:rPr>
+              <a:t>, leaving 8,387 records with known conditions.</a:t>
+            </a:r>
+            <a:r>
+              <a:rPr lang="en-US" sz="1100" dirty="0">
+                <a:ea typeface="Calibri"/>
+                <a:cs typeface="Calibri"/>
+              </a:rPr>
+              <a:t> </a:t>
+            </a:r>
+            <a:r>
+              <a:rPr lang="en-US" sz="1100" dirty="0">
+                <a:ea typeface="+mn-lt"/>
+                <a:cs typeface="+mn-lt"/>
+              </a:rPr>
+              <a:t>We excluded those records from the weather-effect analysis because we could not classify them as dry, light rain, heavy rain, or snow.</a:t>
+            </a:r>
+            <a:endParaRPr lang="en-US" sz="1100" dirty="0">
+              <a:ea typeface="Calibri"/>
+              <a:cs typeface="Calibri"/>
+            </a:endParaRPr>
+          </a:p>
+        </p:txBody>
+      </p:sp>
+      <p:sp>
+        <p:nvSpPr>
+          <p:cNvPr id="31" name="TextBox 11">
+            <a:extLst>
+              <a:ext uri="{FF2B5EF4-FFF2-40B4-BE49-F238E27FC236}">
+                <a16:creationId xmlns:a16="http://schemas.microsoft.com/office/drawing/2014/main" id="{97E71FCF-C207-E821-0F52-281FB8C254C7}"/>
+              </a:ext>
+            </a:extLst>
+          </p:cNvPr>
+          <p:cNvSpPr txBox="1"/>
+          <p:nvPr/>
+        </p:nvSpPr>
+        <p:spPr>
+          <a:xfrm>
+            <a:off x="21716" y="8289064"/>
+            <a:ext cx="6799705" cy="261610"/>
           </a:xfrm>
           <a:prstGeom prst="rect">
             <a:avLst/>
@@ -10952,16 +10802,52 @@
           <a:lstStyle/>
           <a:p>
             <a:r>
-              <a:rPr lang="en-US" sz="1200" dirty="0"/>
-              <a:t>Manhattan behaved differently: its estimated ridership was slightly higher during heavy rain (3.2%) and almost unchanged during light rain (−0.3%)</a:t>
-            </a:r>
+              <a:rPr lang="en-US" sz="1100" dirty="0"/>
+              <a:t>Snow causes the largest estimated network-wide decrease, at 4.8%</a:t>
+            </a:r>
+            <a:endParaRPr lang="en-US" sz="1100" dirty="0">
+              <a:ea typeface="Calibri"/>
+              <a:cs typeface="Calibri"/>
+            </a:endParaRPr>
           </a:p>
+        </p:txBody>
+      </p:sp>
+      <p:sp>
+        <p:nvSpPr>
+          <p:cNvPr id="33" name="TextBox 17">
+            <a:extLst>
+              <a:ext uri="{FF2B5EF4-FFF2-40B4-BE49-F238E27FC236}">
+                <a16:creationId xmlns:a16="http://schemas.microsoft.com/office/drawing/2014/main" id="{DBF798C1-976C-43B8-B217-75D0134F3E9E}"/>
+              </a:ext>
+            </a:extLst>
+          </p:cNvPr>
+          <p:cNvSpPr txBox="1"/>
+          <p:nvPr/>
+        </p:nvSpPr>
+        <p:spPr>
+          <a:xfrm>
+            <a:off x="21712" y="10068621"/>
+            <a:ext cx="7541137" cy="600164"/>
+          </a:xfrm>
+          <a:prstGeom prst="rect">
+            <a:avLst/>
+          </a:prstGeom>
+          <a:noFill/>
+        </p:spPr>
+        <p:txBody>
+          <a:bodyPr rot="0" spcFirstLastPara="0" vertOverflow="overflow" horzOverflow="overflow" vert="horz" wrap="square" lIns="91440" tIns="45720" rIns="91440" bIns="45720" numCol="1" spcCol="0" rtlCol="0" fromWordArt="0" anchor="t" anchorCtr="0" forceAA="0" compatLnSpc="1">
+            <a:prstTxWarp prst="textNoShape">
+              <a:avLst/>
+            </a:prstTxWarp>
+            <a:spAutoFit/>
+          </a:bodyPr>
+          <a:lstStyle/>
           <a:p>
             <a:r>
-              <a:rPr lang="en-US" sz="1200" dirty="0"/>
-              <a:t>This suggests weather related ridership patterns vary geographically rather than affecting every borough equally</a:t>
-            </a:r>
-            <a:endParaRPr lang="en-US" sz="1200" dirty="0">
+              <a:rPr lang="en-US" sz="1100" dirty="0"/>
+              <a:t>Manhattan behaved differently: its estimated ridership was slightly higher during heavy rain (3.2%) and almost unchanged during light rain (−0.3%). This suggests weather related ridership patterns vary geographically rather than affecting every borough equally</a:t>
+            </a:r>
+            <a:endParaRPr lang="en-US" sz="1100" dirty="0">
               <a:ea typeface="Calibri"/>
               <a:cs typeface="Calibri"/>
             </a:endParaRPr>
@@ -10971,7 +10857,7 @@
     </p:spTree>
     <p:extLst>
       <p:ext uri="{BB962C8B-B14F-4D97-AF65-F5344CB8AC3E}">
-        <p14:creationId xmlns:p14="http://schemas.microsoft.com/office/powerpoint/2010/main" val="2416273242"/>
+        <p14:creationId xmlns:p14="http://schemas.microsoft.com/office/powerpoint/2010/main" val="344045745"/>
       </p:ext>
     </p:extLst>
   </p:cSld>

--- a/report/NYC_Subway_Part1_Delivrable_Report_V2.pptx
+++ b/report/NYC_Subway_Part1_Delivrable_Report_V2.pptx
@@ -747,7 +747,7 @@
         </p:nvSpPr>
         <p:spPr>
           <a:xfrm>
-            <a:off x="325344" y="37442"/>
+            <a:off x="325344" y="50505"/>
             <a:ext cx="6647688" cy="685800"/>
           </a:xfrm>
           <a:prstGeom prst="rect">
@@ -786,7 +786,7 @@
         </p:nvSpPr>
         <p:spPr>
           <a:xfrm>
-            <a:off x="128186" y="1839032"/>
+            <a:off x="128186" y="2126418"/>
             <a:ext cx="7434661" cy="338287"/>
           </a:xfrm>
           <a:prstGeom prst="rect">
@@ -825,7 +825,7 @@
         </p:nvSpPr>
         <p:spPr>
           <a:xfrm>
-            <a:off x="128185" y="3275846"/>
+            <a:off x="128185" y="3514866"/>
             <a:ext cx="7434663" cy="567289"/>
           </a:xfrm>
           <a:prstGeom prst="rect">
@@ -874,14 +874,14 @@
           <p:nvPr>
             <p:extLst>
               <p:ext uri="{D42A27DB-BD31-4B8C-83A1-F6EECF244321}">
-                <p14:modId xmlns:p14="http://schemas.microsoft.com/office/powerpoint/2010/main" val="1768325466"/>
+                <p14:modId xmlns:p14="http://schemas.microsoft.com/office/powerpoint/2010/main" val="643533661"/>
               </p:ext>
             </p:extLst>
           </p:nvPr>
         </p:nvGraphicFramePr>
         <p:xfrm>
-          <a:off x="128185" y="4135917"/>
-          <a:ext cx="7279781" cy="2434007"/>
+          <a:off x="128185" y="4420202"/>
+          <a:ext cx="7279781" cy="2132857"/>
         </p:xfrm>
         <a:graphic>
           <a:graphicData uri="http://schemas.openxmlformats.org/drawingml/2006/table">
@@ -1178,14 +1178,14 @@
                         <a:buNone/>
                       </a:pPr>
                       <a:r>
-                        <a:rPr lang="en-US" sz="1200" dirty="0">
+                        <a:rPr lang="en-US" sz="1100" dirty="0">
                           <a:solidFill>
                             <a:schemeClr val="tx1"/>
                           </a:solidFill>
                         </a:rPr>
                         <a:t>MTA Subway Hourly Ridership: 2020–2024</a:t>
                       </a:r>
-                      <a:endParaRPr lang="en-US" sz="1200" dirty="0"/>
+                      <a:endParaRPr lang="en-US" sz="1100" dirty="0"/>
                     </a:p>
                   </a:txBody>
                   <a:tcPr marL="45720" marR="45720" marT="27432" marB="27432" anchor="ctr">
@@ -1239,7 +1239,7 @@
                         <a:buNone/>
                       </a:pPr>
                       <a:r>
-                        <a:rPr lang="en-US" sz="1200" u="sng" dirty="0">
+                        <a:rPr lang="en-US" sz="1100" u="sng" dirty="0">
                           <a:solidFill>
                             <a:schemeClr val="accent6"/>
                           </a:solidFill>
@@ -1253,7 +1253,7 @@
                         </a:rPr>
                         <a:t>data.ny.gov/d/wujg-7c2s</a:t>
                       </a:r>
-                      <a:endParaRPr lang="en-US" sz="1200" dirty="0"/>
+                      <a:endParaRPr lang="en-US" sz="1100" dirty="0"/>
                     </a:p>
                   </a:txBody>
                   <a:tcPr marL="45720" marR="45720" marT="27432" marB="27432" anchor="ctr">
@@ -1307,28 +1307,28 @@
                         <a:buNone/>
                       </a:pPr>
                       <a:r>
-                        <a:rPr lang="en-US" sz="1200" dirty="0">
+                        <a:rPr lang="en-US" sz="1100" dirty="0">
                           <a:solidFill>
                             <a:schemeClr val="tx1"/>
                           </a:solidFill>
                         </a:rPr>
                         <a:t>Jul–Dec 2024</a:t>
                       </a:r>
-                      <a:endParaRPr lang="en-US" sz="1200" dirty="0"/>
+                      <a:endParaRPr lang="en-US" sz="1100" dirty="0"/>
                     </a:p>
                     <a:p>
                       <a:pPr marL="0" indent="0">
                         <a:buNone/>
                       </a:pPr>
                       <a:r>
-                        <a:rPr lang="en-US" sz="1200" b="1" dirty="0">
+                        <a:rPr lang="en-US" sz="1100" b="1" dirty="0">
                           <a:solidFill>
                             <a:schemeClr val="tx1"/>
                           </a:solidFill>
                         </a:rPr>
                         <a:t>14.0 M rows · 2.43 GB</a:t>
                       </a:r>
-                      <a:endParaRPr lang="en-US" sz="1200" dirty="0"/>
+                      <a:endParaRPr lang="en-US" sz="1100" dirty="0"/>
                     </a:p>
                   </a:txBody>
                   <a:tcPr marL="45720" marR="45720" marT="27432" marB="27432" anchor="ctr">
@@ -1382,7 +1382,7 @@
                         <a:buNone/>
                       </a:pPr>
                       <a:r>
-                        <a:rPr lang="en-US" sz="1200" u="sng" dirty="0">
+                        <a:rPr lang="en-US" sz="1100" u="sng" dirty="0">
                           <a:solidFill>
                             <a:schemeClr val="accent6"/>
                           </a:solidFill>
@@ -1396,7 +1396,7 @@
                         </a:rPr>
                         <a:t>OPEN-NY</a:t>
                       </a:r>
-                      <a:endParaRPr lang="en-US" sz="1200" dirty="0"/>
+                      <a:endParaRPr lang="en-US" sz="1100" dirty="0"/>
                     </a:p>
                   </a:txBody>
                   <a:tcPr marL="45720" marR="45720" marT="27432" marB="27432" anchor="ctr">
@@ -1457,14 +1457,14 @@
                         <a:buNone/>
                       </a:pPr>
                       <a:r>
-                        <a:rPr lang="en-US" sz="1200" dirty="0">
+                        <a:rPr lang="en-US" sz="1100" dirty="0">
                           <a:solidFill>
                             <a:schemeClr val="tx1"/>
                           </a:solidFill>
                         </a:rPr>
                         <a:t>MTA Subway Hourly Ridership: Beginning 2025</a:t>
                       </a:r>
-                      <a:endParaRPr lang="en-US" sz="1200" dirty="0"/>
+                      <a:endParaRPr lang="en-US" sz="1100" dirty="0"/>
                     </a:p>
                   </a:txBody>
                   <a:tcPr marL="45720" marR="45720" marT="27432" marB="27432" anchor="ctr">
@@ -1518,7 +1518,7 @@
                         <a:buNone/>
                       </a:pPr>
                       <a:r>
-                        <a:rPr lang="en-US" sz="1200" u="sng" dirty="0">
+                        <a:rPr lang="en-US" sz="1100" u="sng" dirty="0">
                           <a:solidFill>
                             <a:schemeClr val="accent6"/>
                           </a:solidFill>
@@ -1532,7 +1532,7 @@
                         </a:rPr>
                         <a:t>data.ny.gov/d/5wq4-mkjj</a:t>
                       </a:r>
-                      <a:endParaRPr lang="en-US" sz="1200" dirty="0"/>
+                      <a:endParaRPr lang="en-US" sz="1100" dirty="0"/>
                     </a:p>
                   </a:txBody>
                   <a:tcPr marL="45720" marR="45720" marT="27432" marB="27432" anchor="ctr">
@@ -1586,28 +1586,28 @@
                         <a:buNone/>
                       </a:pPr>
                       <a:r>
-                        <a:rPr lang="en-US" sz="1200" dirty="0">
+                        <a:rPr lang="en-US" sz="1100" dirty="0">
                           <a:solidFill>
                             <a:schemeClr val="tx1"/>
                           </a:solidFill>
                         </a:rPr>
                         <a:t>Jan–Jun 2025</a:t>
                       </a:r>
-                      <a:endParaRPr lang="en-US" sz="1200" dirty="0"/>
+                      <a:endParaRPr lang="en-US" sz="1100" dirty="0"/>
                     </a:p>
                     <a:p>
                       <a:pPr marL="0" indent="0">
                         <a:buNone/>
                       </a:pPr>
                       <a:r>
-                        <a:rPr lang="en-US" sz="1200" b="1" dirty="0">
+                        <a:rPr lang="en-US" sz="1100" b="1" dirty="0">
                           <a:solidFill>
                             <a:schemeClr val="tx1"/>
                           </a:solidFill>
                         </a:rPr>
                         <a:t>15.4 M rows · 2.65 GB</a:t>
                       </a:r>
-                      <a:endParaRPr lang="en-US" sz="1200" dirty="0"/>
+                      <a:endParaRPr lang="en-US" sz="1100" dirty="0"/>
                     </a:p>
                   </a:txBody>
                   <a:tcPr marL="45720" marR="45720" marT="27432" marB="27432" anchor="ctr">
@@ -1661,7 +1661,7 @@
                         <a:buNone/>
                       </a:pPr>
                       <a:r>
-                        <a:rPr lang="en-US" sz="1200" u="sng" dirty="0">
+                        <a:rPr lang="en-US" sz="1100" u="sng" dirty="0">
                           <a:solidFill>
                             <a:schemeClr val="accent6"/>
                           </a:solidFill>
@@ -1675,7 +1675,7 @@
                         </a:rPr>
                         <a:t>OPEN-NY</a:t>
                       </a:r>
-                      <a:endParaRPr lang="en-US" sz="1200" dirty="0"/>
+                      <a:endParaRPr lang="en-US" sz="1100" dirty="0"/>
                     </a:p>
                   </a:txBody>
                   <a:tcPr marL="45720" marR="45720" marT="27432" marB="27432" anchor="ctr">
@@ -1736,14 +1736,14 @@
                         <a:buNone/>
                       </a:pPr>
                       <a:r>
-                        <a:rPr lang="en-US" sz="1200" dirty="0">
+                        <a:rPr lang="en-US" sz="1100" dirty="0">
                           <a:solidFill>
                             <a:schemeClr val="tx1"/>
                           </a:solidFill>
                         </a:rPr>
                         <a:t>NOAA Local Climatological Data v2, Central Park (USW00094728)</a:t>
                       </a:r>
-                      <a:endParaRPr lang="en-US" sz="1200" dirty="0"/>
+                      <a:endParaRPr lang="en-US" sz="1100" dirty="0"/>
                     </a:p>
                   </a:txBody>
                   <a:tcPr marL="45720" marR="45720" marT="27432" marB="27432" anchor="ctr">
@@ -1797,7 +1797,7 @@
                         <a:buNone/>
                       </a:pPr>
                       <a:r>
-                        <a:rPr lang="en-US" sz="1200" u="sng" dirty="0">
+                        <a:rPr lang="en-US" sz="1100" u="sng" dirty="0">
                           <a:solidFill>
                             <a:schemeClr val="accent6"/>
                           </a:solidFill>
@@ -1811,7 +1811,7 @@
                         </a:rPr>
                         <a:t>ncei.noaa.gov (LCD v2 API)</a:t>
                       </a:r>
-                      <a:endParaRPr lang="en-US" sz="1200" dirty="0"/>
+                      <a:endParaRPr lang="en-US" sz="1100" dirty="0"/>
                     </a:p>
                   </a:txBody>
                   <a:tcPr marL="45720" marR="45720" marT="27432" marB="27432" anchor="ctr">
@@ -1865,28 +1865,28 @@
                         <a:buNone/>
                       </a:pPr>
                       <a:r>
-                        <a:rPr lang="en-US" sz="1200" dirty="0">
+                        <a:rPr lang="en-US" sz="1100" dirty="0">
                           <a:solidFill>
                             <a:schemeClr val="tx1"/>
                           </a:solidFill>
                         </a:rPr>
                         <a:t>Hourly, Jul 2024–Jun 2025</a:t>
                       </a:r>
-                      <a:endParaRPr lang="en-US" sz="1200" dirty="0"/>
+                      <a:endParaRPr lang="en-US" sz="1100" dirty="0"/>
                     </a:p>
                     <a:p>
                       <a:pPr marL="0" indent="0">
                         <a:buNone/>
                       </a:pPr>
                       <a:r>
-                        <a:rPr lang="en-US" sz="1200" b="1" dirty="0">
+                        <a:rPr lang="en-US" sz="1100" b="1" dirty="0">
                           <a:solidFill>
                             <a:schemeClr val="tx1"/>
                           </a:solidFill>
                         </a:rPr>
                         <a:t>11,765 rows · 5.7 MB</a:t>
                       </a:r>
-                      <a:endParaRPr lang="en-US" sz="1200" dirty="0"/>
+                      <a:endParaRPr lang="en-US" sz="1100" dirty="0"/>
                     </a:p>
                   </a:txBody>
                   <a:tcPr marL="45720" marR="45720" marT="27432" marB="27432" anchor="ctr">
@@ -1940,7 +1940,7 @@
                         <a:buNone/>
                       </a:pPr>
                       <a:r>
-                        <a:rPr lang="en-US" sz="1200" u="sng" dirty="0">
+                        <a:rPr lang="en-US" sz="1100" u="sng" dirty="0">
                           <a:solidFill>
                             <a:schemeClr val="accent6"/>
                           </a:solidFill>
@@ -1954,7 +1954,7 @@
                         </a:rPr>
                         <a:t>U.S. public domain, cite NOAA</a:t>
                       </a:r>
-                      <a:endParaRPr lang="en-US" sz="1200" dirty="0"/>
+                      <a:endParaRPr lang="en-US" sz="1100" dirty="0"/>
                     </a:p>
                   </a:txBody>
                   <a:tcPr marL="45720" marR="45720" marT="27432" marB="27432" anchor="ctr">
@@ -2015,14 +2015,14 @@
                         <a:buNone/>
                       </a:pPr>
                       <a:r>
-                        <a:rPr lang="en-US" sz="1200" dirty="0">
+                        <a:rPr lang="en-US" sz="1100" dirty="0">
                           <a:solidFill>
                             <a:schemeClr val="tx1"/>
                           </a:solidFill>
                         </a:rPr>
                         <a:t>MTA Subway Stations (links complexes, stop IDs and GTFS stops)</a:t>
                       </a:r>
-                      <a:endParaRPr lang="en-US" sz="1200" dirty="0"/>
+                      <a:endParaRPr lang="en-US" sz="1100" dirty="0"/>
                     </a:p>
                   </a:txBody>
                   <a:tcPr marL="45720" marR="45720" marT="27432" marB="27432" anchor="ctr">
@@ -2076,7 +2076,7 @@
                         <a:buNone/>
                       </a:pPr>
                       <a:r>
-                        <a:rPr lang="en-US" sz="1200" u="sng" dirty="0">
+                        <a:rPr lang="en-US" sz="1100" u="sng" dirty="0">
                           <a:solidFill>
                             <a:schemeClr val="accent6"/>
                           </a:solidFill>
@@ -2090,7 +2090,7 @@
                         </a:rPr>
                         <a:t>data.ny.gov/d/39hk-dx4f</a:t>
                       </a:r>
-                      <a:endParaRPr lang="en-US" sz="1200" dirty="0"/>
+                      <a:endParaRPr lang="en-US" sz="1100" dirty="0"/>
                     </a:p>
                   </a:txBody>
                   <a:tcPr marL="45720" marR="45720" marT="27432" marB="27432" anchor="ctr">
@@ -2144,28 +2144,28 @@
                         <a:buNone/>
                       </a:pPr>
                       <a:r>
-                        <a:rPr lang="en-US" sz="1200" dirty="0">
+                        <a:rPr lang="en-US" sz="1100" dirty="0">
                           <a:solidFill>
                             <a:schemeClr val="tx1"/>
                           </a:solidFill>
                         </a:rPr>
                         <a:t>Whole table</a:t>
                       </a:r>
-                      <a:endParaRPr lang="en-US" sz="1200" dirty="0"/>
+                      <a:endParaRPr lang="en-US" sz="1100" dirty="0"/>
                     </a:p>
                     <a:p>
                       <a:pPr marL="0" indent="0">
                         <a:buNone/>
                       </a:pPr>
                       <a:r>
-                        <a:rPr lang="en-US" sz="1200" b="1" dirty="0">
+                        <a:rPr lang="en-US" sz="1100" b="1" dirty="0">
                           <a:solidFill>
                             <a:schemeClr val="tx1"/>
                           </a:solidFill>
                         </a:rPr>
                         <a:t>496 rows · 69 KB</a:t>
                       </a:r>
-                      <a:endParaRPr lang="en-US" sz="1200" dirty="0"/>
+                      <a:endParaRPr lang="en-US" sz="1100" dirty="0"/>
                     </a:p>
                   </a:txBody>
                   <a:tcPr marL="45720" marR="45720" marT="27432" marB="27432" anchor="ctr">
@@ -2219,7 +2219,7 @@
                         <a:buNone/>
                       </a:pPr>
                       <a:r>
-                        <a:rPr lang="en-US" sz="1200" u="sng" dirty="0">
+                        <a:rPr lang="en-US" sz="1100" u="sng" dirty="0">
                           <a:solidFill>
                             <a:schemeClr val="accent6"/>
                           </a:solidFill>
@@ -2233,7 +2233,7 @@
                         </a:rPr>
                         <a:t>OPEN-NY</a:t>
                       </a:r>
-                      <a:endParaRPr lang="en-US" sz="1200" dirty="0"/>
+                      <a:endParaRPr lang="en-US" sz="1100" dirty="0"/>
                     </a:p>
                   </a:txBody>
                   <a:tcPr marL="45720" marR="45720" marT="27432" marB="27432" anchor="ctr">
@@ -2302,7 +2302,7 @@
         </p:nvSpPr>
         <p:spPr>
           <a:xfrm>
-            <a:off x="128187" y="720302"/>
+            <a:off x="128187" y="863995"/>
             <a:ext cx="7135738" cy="1138773"/>
           </a:xfrm>
           <a:prstGeom prst="rect">
@@ -2362,7 +2362,7 @@
         </p:nvSpPr>
         <p:spPr>
           <a:xfrm>
-            <a:off x="1" y="2111059"/>
+            <a:off x="1" y="2476823"/>
             <a:ext cx="7562850" cy="1107996"/>
           </a:xfrm>
           <a:prstGeom prst="rect">
@@ -2385,10 +2385,10 @@
               <a:t>Domain: </a:t>
             </a:r>
             <a:r>
-              <a:rPr lang="en-US" sz="1200" dirty="0"/>
+              <a:rPr lang="en-US" sz="1100" dirty="0"/>
               <a:t>Public transport, the New York City subway: critical stations and live disruptions</a:t>
             </a:r>
-            <a:endParaRPr lang="en-US" sz="1200" b="1" dirty="0"/>
+            <a:endParaRPr lang="en-US" sz="1100" b="1" dirty="0"/>
           </a:p>
           <a:p>
             <a:pPr marL="228600" indent="-228600">
@@ -2400,7 +2400,7 @@
               <a:t>Overarching Question : </a:t>
             </a:r>
             <a:r>
-              <a:rPr lang="en-US" sz="1200" dirty="0"/>
+              <a:rPr lang="en-US" sz="1100" dirty="0"/>
               <a:t>Which subway stations are critical for the network, and are live disruptions happening in those stations or not?</a:t>
             </a:r>
           </a:p>
@@ -2414,10 +2414,10 @@
               <a:t>Part 1-Volume (Spark SQL)  Sub-question: </a:t>
             </a:r>
             <a:r>
-              <a:rPr lang="en-US" sz="1200" dirty="0"/>
+              <a:rPr lang="en-US" sz="1100" dirty="0"/>
               <a:t>What is the usual ridership in each subway station by hour and day of the week, and by how much does the weather change it?</a:t>
             </a:r>
-            <a:endParaRPr lang="en-US" sz="1200" b="1" dirty="0"/>
+            <a:endParaRPr lang="en-US" sz="1100" b="1" dirty="0"/>
           </a:p>
         </p:txBody>
       </p:sp>
@@ -2465,7 +2465,7 @@
         </p:nvSpPr>
         <p:spPr>
           <a:xfrm>
-            <a:off x="255905" y="3828140"/>
+            <a:off x="255905" y="4094320"/>
             <a:ext cx="7306945" cy="307777"/>
           </a:xfrm>
           <a:prstGeom prst="rect">
@@ -2505,7 +2505,7 @@
         </p:nvSpPr>
         <p:spPr>
           <a:xfrm>
-            <a:off x="17971" y="6666787"/>
+            <a:off x="17971" y="6742843"/>
             <a:ext cx="7544876" cy="699573"/>
           </a:xfrm>
           <a:prstGeom prst="rect">
@@ -2538,16 +2538,8 @@
               <a:t>: </a:t>
             </a:r>
             <a:r>
-              <a:rPr lang="en-US" sz="1200" dirty="0"/>
-              <a:t>29.4 M rows · 5.08 GB of CSV for 12 months . Raw files on the original database should be kept </a:t>
-            </a:r>
-            <a:r>
-              <a:rPr lang="en-US" sz="1200"/>
-              <a:t>untouched According to the licensing rules for MTA database regulations, therefore we created our own copies to </a:t>
-            </a:r>
-            <a:r>
-              <a:rPr lang="en-US" sz="1200" dirty="0"/>
-              <a:t>manipulate. For that every change is written to new parquet tables.</a:t>
+              <a:rPr lang="en-US" sz="1100" dirty="0"/>
+              <a:t>29.4 M rows · 5.08 GB of CSV for 12 months . Raw files on the original database should be kept untouched According to the licensing rules for MTA database regulations, therefore we created our own copies to manipulate. For that every change is written to new parquet tables.</a:t>
             </a:r>
           </a:p>
         </p:txBody>
@@ -2566,8 +2558,8 @@
         </p:nvSpPr>
         <p:spPr>
           <a:xfrm>
-            <a:off x="0" y="7635028"/>
-            <a:ext cx="7562851" cy="1477328"/>
+            <a:off x="0" y="7656766"/>
+            <a:ext cx="7562851" cy="1415772"/>
           </a:xfrm>
           <a:prstGeom prst="rect">
             <a:avLst/>
@@ -2595,15 +2587,15 @@
               <a:t>Ridership dataset with stations dataset: </a:t>
             </a:r>
             <a:r>
-              <a:rPr lang="en-US" sz="1200" dirty="0"/>
+              <a:rPr lang="en-US" sz="1100" dirty="0"/>
               <a:t>We joined by </a:t>
             </a:r>
             <a:r>
-              <a:rPr lang="en-US" sz="1200" dirty="0" err="1"/>
+              <a:rPr lang="en-US" sz="1100" dirty="0" err="1"/>
               <a:t>Complex_ID</a:t>
             </a:r>
             <a:r>
-              <a:rPr lang="en-US" sz="1200" dirty="0"/>
+              <a:rPr lang="en-US" sz="1100" dirty="0"/>
               <a:t> so that each ridership database row gets also the stations name and the borough. This is done in order to know about the busiest stations and to compare boroughs.</a:t>
             </a:r>
           </a:p>
@@ -2617,7 +2609,7 @@
               <a:t>Ridership dataset with weather dataset: </a:t>
             </a:r>
             <a:r>
-              <a:rPr lang="en-US" sz="1200" dirty="0"/>
+              <a:rPr lang="en-US" sz="1100" dirty="0"/>
               <a:t>We joined  the hour (New York time). Each hour of ridership gets its corresponding weather (dry, light rain,  heavy rain, snow). This is done to be able to compare rides in rainy or snowy hours with the rides in dry hours.</a:t>
             </a:r>
           </a:p>
@@ -2637,7 +2629,7 @@
         </p:nvSpPr>
         <p:spPr>
           <a:xfrm>
-            <a:off x="262533" y="7306840"/>
+            <a:off x="262533" y="7328578"/>
             <a:ext cx="7306945" cy="307777"/>
           </a:xfrm>
           <a:prstGeom prst="rect">
@@ -2673,8 +2665,8 @@
         </p:nvSpPr>
         <p:spPr>
           <a:xfrm>
-            <a:off x="12660" y="9414114"/>
-            <a:ext cx="7562850" cy="1200329"/>
+            <a:off x="12660" y="9481123"/>
+            <a:ext cx="7550187" cy="938719"/>
           </a:xfrm>
           <a:prstGeom prst="rect">
             <a:avLst/>
@@ -2688,23 +2680,23 @@
           <a:lstStyle/>
           <a:p>
             <a:r>
-              <a:rPr lang="en-US" sz="1200" dirty="0"/>
+              <a:rPr lang="en-US" sz="1100" dirty="0"/>
               <a:t>We have mainly used spark because of the Size of Data we have. In fact, Ridership data alone is 5.08 GB of CSVs. This data size is too big for normal tools. Matter of fact 1 month data is already twice Excel’s limit of 1,048,576 rows. And if we use Pandas </a:t>
             </a:r>
             <a:r>
-              <a:rPr lang="en-US" sz="1200" dirty="0" err="1"/>
+              <a:rPr lang="en-US" sz="1100" dirty="0" err="1"/>
               <a:t>dataframes</a:t>
             </a:r>
             <a:r>
-              <a:rPr lang="en-US" sz="1200" dirty="0"/>
+              <a:rPr lang="en-US" sz="1100" dirty="0"/>
               <a:t>, it </a:t>
             </a:r>
             <a:r>
-              <a:rPr lang="en-US" sz="1200" dirty="0" err="1"/>
+              <a:rPr lang="en-US" sz="1100" dirty="0" err="1"/>
               <a:t>would</a:t>
             </a:r>
             <a:r>
-              <a:rPr lang="en-US" sz="1200" dirty="0"/>
+              <a:rPr lang="en-US" sz="1100" dirty="0"/>
               <a:t> have to load the whole table into the laptop’s memory at once and overloading it. The interesting part of using Spark here is its ability to process large datasets by splitting  data into small pieces and processing them in parallel on all the processor cores which results in the cleaning of 29.4 million rows in a matter of few minutes.</a:t>
             </a:r>
           </a:p>
@@ -2724,7 +2716,7 @@
         </p:nvSpPr>
         <p:spPr>
           <a:xfrm>
-            <a:off x="269161" y="9129018"/>
+            <a:off x="269161" y="9114544"/>
             <a:ext cx="7306945" cy="307777"/>
           </a:xfrm>
           <a:prstGeom prst="rect">
